--- a/presentation/Crime_Hotspots_Prediction_DATAMI.pptx
+++ b/presentation/Crime_Hotspots_Prediction_DATAMI.pptx
@@ -22,6 +22,9 @@
     <p:sldId id="270" r:id="rId22"/>
     <p:sldId id="271" r:id="rId23"/>
     <p:sldId id="272" r:id="rId24"/>
+    <p:sldId id="273" r:id="rId25"/>
+    <p:sldId id="274" r:id="rId26"/>
+    <p:sldId id="275" r:id="rId27"/>
   </p:sldIdLst>
   <p:sldSz cx="9144000" cy="5143500" type="screen4x3"/>
   <p:notesSz cx="6858000" cy="9144000"/>
@@ -588,7 +591,7 @@
           <a:lstStyle/>
           <a:p>
             <a:r>
-              <a:t>Slide 10 displays our CART Decision Tree model. Notice the authentic tree on the right: It splits on lag1_cases, rolling_avg, and sll_ratio to classify stations into Higher vs Lower Risk. With a maximum depth of 3, the model is 100% explainable, producing transparent rules that Station House Officers can trust.</a:t>
+              <a:t>Step 3A explains the atomic storage architecture in SQLite: The fact table crime_records stores 14,262 rows at the granular level of Station times Year times Crime Head. As seen on the right chart, 53.3% of rows are specific IPC crimes like Hurt, Cheating, and Theft, while 40% are Special and Local Laws like Prohibition and NDPS narcotics. This granular storage ensures complete legal auditability without information loss.</a:t>
             </a:r>
           </a:p>
         </p:txBody>
@@ -658,7 +661,7 @@
           <a:lstStyle/>
           <a:p>
             <a:r>
-              <a:t>Slide 11 details our Crime Spree Surge Simulator: We model how crime surges increase officer caseloads. Under a +50% spree, 12 stations become understaffed. Our system mathematically proves how filling vacancies reduces workload from 45.9 down to 41.6 cases per officer.</a:t>
+              <a:t>Step 3B demonstrates our OLAP operations: Because raw fact records store specific offense heads, we perform roll-up aggregation along spatial and legal hierarchies. The chart on the right demonstrates how roll-up reveals true station volumes: Ernakulam Central registers 1,939 total crimes, with a balanced distribution between IPC property offenses and proactive Special Laws. Commanders can drill down to isolate drug arrests or slice by time.</a:t>
             </a:r>
           </a:p>
         </p:txBody>
@@ -728,7 +731,7 @@
           <a:lstStyle/>
           <a:p>
             <a:r>
-              <a:t>Slide 12 reviews our model evaluation metrics: Our Decision Tree achieves 61.1% test accuracy, outperforming both the Zero-R Majority and Persistence baselines. The confusion matrix on the right shows the breakdown of true negatives, true positives, and misclassifications.</a:t>
+              <a:t>In Step 4A, we formulated 5 temporal features. Notice on the right chart that Lag-1 volume and the 2-year rolling average dominate predictions, explaining over 66% of model splits. We also define registration velocity and SLL ratio, using a strict chronological split (2016–2019 train, 2020–2025 test).</a:t>
             </a:r>
           </a:p>
         </p:txBody>
@@ -798,7 +801,7 @@
           <a:lstStyle/>
           <a:p>
             <a:r>
-              <a:t>Slide 13 translates data mining into actionable policy: Total volume alone does not determine vulnerability—officer caseload ratio does. This allows police leadership to strategically reinforce stations like Town South and Panangad before crime sprees cause operational failure.</a:t>
+              <a:t>Step 4B displays our CART Decision Tree model. Why Decision Tree? Because police commanders need transparent, auditable rules rather than black-boxes. The tree on the right splits on lag1_cases, rolling_avg, and sll_ratio to produce transparent if-then rules with max depth 3.</a:t>
             </a:r>
           </a:p>
         </p:txBody>
@@ -868,7 +871,7 @@
           <a:lstStyle/>
           <a:p>
             <a:r>
-              <a:t>Slide 14 shows an authentic screenshot from our working Leaflet Web application. Officers can click any station pin on the map to open the side intelligence drawer, view historical crime trends, inspect 2026 risk predictions, and dynamically toggle crime spree surge scenarios.</a:t>
+              <a:t>Step 4C details our Crime Spree Surge Simulator: We model how crime surges increase officer caseloads. Under a +50% spree, 12 stations become understaffed. Our system mathematically proves how filling vacancies reduces workload from 45.9 down to 41.6 cases per officer.</a:t>
             </a:r>
           </a:p>
         </p:txBody>
@@ -938,7 +941,7 @@
           <a:lstStyle/>
           <a:p>
             <a:r>
-              <a:t>Slide 15 justifies each technology selected: Python, FastAPI, and SQLite provide a robust, lightweight backend; scikit-learn delivers explainable CART trees; and React with Leaflet powers our responsive geospatial dashboard.</a:t>
+              <a:t>Step 4D reviews our model evaluation metrics: Our Decision Tree achieves 61.1% test accuracy, outperforming both the Zero-R Majority and Persistence baselines. The confusion matrix on the right shows the breakdown of true negatives, true positives, and misclassifications.</a:t>
             </a:r>
           </a:p>
         </p:txBody>
@@ -1008,7 +1011,7 @@
           <a:lstStyle/>
           <a:p>
             <a:r>
-              <a:t>In conclusion, DATAMI bridges data mining theory and pragmatic law enforcement operations. We achieved 100% authentic data, explainable decision tree rules, and interactive crime spree simulation. Our future work will explore real-time CCTNS webhook integration and diurnal time binning.</a:t>
+              <a:t>Slide 16 translates data mining into actionable policy: Total volume alone does not determine vulnerability—officer caseload ratio does. This allows police leadership to strategically reinforce stations like Town South and Panangad before crime sprees cause operational failure.</a:t>
             </a:r>
           </a:p>
         </p:txBody>
@@ -1078,7 +1081,147 @@
           <a:lstStyle/>
           <a:p>
             <a:r>
-              <a:t>Here are our academic and official references, covering foundational data mining texts, CART decision trees, state police portals, and peer-reviewed predictive policing literature. Thank you. We are now open for questions and evaluations.</a:t>
+              <a:t>Step 5 shows an authentic screenshot from our working Leaflet Web application. Why Geospatial WebUI? Because commanders need instant visual situational awareness. Officers can click any station pin on the map to open the side intelligence drawer, view historical crime trends, inspect 2026 risk predictions, and dynamically toggle crime spree surge scenarios.</a:t>
+            </a:r>
+          </a:p>
+        </p:txBody>
+      </p:sp>
+      <p:sp>
+        <p:nvSpPr>
+          <p:cNvPr id="4" name="Slide Number Placeholder 3"/>
+          <p:cNvSpPr>
+            <a:spLocks noGrp="1"/>
+          </p:cNvSpPr>
+          <p:nvPr>
+            <p:ph type="sldNum" idx="5" sz="quarter"/>
+          </p:nvPr>
+        </p:nvSpPr>
+        <p:spPr/>
+      </p:sp>
+    </p:spTree>
+  </p:cSld>
+  <p:clrMapOvr>
+    <a:masterClrMapping/>
+  </p:clrMapOvr>
+</p:notes>
+</file>
+
+<file path=ppt/notesSlides/notesSlide18.xml><?xml version="1.0" encoding="utf-8"?>
+<p:notes xmlns:a="http://schemas.openxmlformats.org/drawingml/2006/main" xmlns:p="http://schemas.openxmlformats.org/presentationml/2006/main" xmlns:r="http://schemas.openxmlformats.org/officeDocument/2006/relationships">
+  <p:cSld>
+    <p:spTree>
+      <p:nvGrpSpPr>
+        <p:cNvPr id="1" name=""/>
+        <p:cNvGrpSpPr/>
+        <p:nvPr/>
+      </p:nvGrpSpPr>
+      <p:grpSpPr>
+        <a:xfrm>
+          <a:off x="0" y="0"/>
+          <a:ext cx="0" cy="0"/>
+          <a:chOff x="0" y="0"/>
+          <a:chExt cx="0" cy="0"/>
+        </a:xfrm>
+      </p:grpSpPr>
+      <p:sp>
+        <p:nvSpPr>
+          <p:cNvPr id="2" name="Slide Image Placeholder 1"/>
+          <p:cNvSpPr>
+            <a:spLocks noGrp="1"/>
+          </p:cNvSpPr>
+          <p:nvPr>
+            <p:ph type="sldImg" idx="2"/>
+          </p:nvPr>
+        </p:nvSpPr>
+        <p:spPr/>
+      </p:sp>
+      <p:sp>
+        <p:nvSpPr>
+          <p:cNvPr id="3" name="Notes Placeholder 2"/>
+          <p:cNvSpPr>
+            <a:spLocks noGrp="1"/>
+          </p:cNvSpPr>
+          <p:nvPr>
+            <p:ph type="body" idx="3" sz="quarter"/>
+          </p:nvPr>
+        </p:nvSpPr>
+        <p:spPr/>
+        <p:txBody>
+          <a:bodyPr/>
+          <a:lstStyle/>
+          <a:p>
+            <a:r>
+              <a:t>Slide 18 justifies each technology selected: Python, FastAPI, and SQLite provide a robust, lightweight backend; scikit-learn delivers explainable CART trees; and React with Leaflet powers our responsive geospatial dashboard.</a:t>
+            </a:r>
+          </a:p>
+        </p:txBody>
+      </p:sp>
+      <p:sp>
+        <p:nvSpPr>
+          <p:cNvPr id="4" name="Slide Number Placeholder 3"/>
+          <p:cNvSpPr>
+            <a:spLocks noGrp="1"/>
+          </p:cNvSpPr>
+          <p:nvPr>
+            <p:ph type="sldNum" idx="5" sz="quarter"/>
+          </p:nvPr>
+        </p:nvSpPr>
+        <p:spPr/>
+      </p:sp>
+    </p:spTree>
+  </p:cSld>
+  <p:clrMapOvr>
+    <a:masterClrMapping/>
+  </p:clrMapOvr>
+</p:notes>
+</file>
+
+<file path=ppt/notesSlides/notesSlide19.xml><?xml version="1.0" encoding="utf-8"?>
+<p:notes xmlns:a="http://schemas.openxmlformats.org/drawingml/2006/main" xmlns:p="http://schemas.openxmlformats.org/presentationml/2006/main" xmlns:r="http://schemas.openxmlformats.org/officeDocument/2006/relationships">
+  <p:cSld>
+    <p:spTree>
+      <p:nvGrpSpPr>
+        <p:cNvPr id="1" name=""/>
+        <p:cNvGrpSpPr/>
+        <p:nvPr/>
+      </p:nvGrpSpPr>
+      <p:grpSpPr>
+        <a:xfrm>
+          <a:off x="0" y="0"/>
+          <a:ext cx="0" cy="0"/>
+          <a:chOff x="0" y="0"/>
+          <a:chExt cx="0" cy="0"/>
+        </a:xfrm>
+      </p:grpSpPr>
+      <p:sp>
+        <p:nvSpPr>
+          <p:cNvPr id="2" name="Slide Image Placeholder 1"/>
+          <p:cNvSpPr>
+            <a:spLocks noGrp="1"/>
+          </p:cNvSpPr>
+          <p:nvPr>
+            <p:ph type="sldImg" idx="2"/>
+          </p:nvPr>
+        </p:nvSpPr>
+        <p:spPr/>
+      </p:sp>
+      <p:sp>
+        <p:nvSpPr>
+          <p:cNvPr id="3" name="Notes Placeholder 2"/>
+          <p:cNvSpPr>
+            <a:spLocks noGrp="1"/>
+          </p:cNvSpPr>
+          <p:nvPr>
+            <p:ph type="body" idx="3" sz="quarter"/>
+          </p:nvPr>
+        </p:nvSpPr>
+        <p:spPr/>
+        <p:txBody>
+          <a:bodyPr/>
+          <a:lstStyle/>
+          <a:p>
+            <a:r>
+              <a:t>In conclusion, DATAMI bridges data mining theory and pragmatic law enforcement operations. We achieved 100% authentic data, explainable decision tree rules, and interactive crime spree simulation. Our future work will explore real-time CCTNS webhook integration and diurnal time binning.</a:t>
             </a:r>
           </a:p>
         </p:txBody>
@@ -1148,7 +1291,77 @@
           <a:lstStyle/>
           <a:p>
             <a:r>
-              <a:t>Here is the roadmap for our presentation. We will walk through the problem statement, alignment with UN SDGs 16, 11, and 9, formal engineering objectives, the 5-step KDD workflow, data warehousing, feature engineering, decision tree modeling, crime spree simulation, evaluation metrics, live geospatial cartography, and academic references.</a:t>
+              <a:t>Here is the roadmap for our presentation. We will walk through the problem statement, official syllabus Course Outcome mapping, simplified UN SDGs 16, 11, and 9, formal engineering objectives, and our step-by-step pipeline from data extraction to live geospatial cartography.</a:t>
+            </a:r>
+          </a:p>
+        </p:txBody>
+      </p:sp>
+      <p:sp>
+        <p:nvSpPr>
+          <p:cNvPr id="4" name="Slide Number Placeholder 3"/>
+          <p:cNvSpPr>
+            <a:spLocks noGrp="1"/>
+          </p:cNvSpPr>
+          <p:nvPr>
+            <p:ph type="sldNum" idx="5" sz="quarter"/>
+          </p:nvPr>
+        </p:nvSpPr>
+        <p:spPr/>
+      </p:sp>
+    </p:spTree>
+  </p:cSld>
+  <p:clrMapOvr>
+    <a:masterClrMapping/>
+  </p:clrMapOvr>
+</p:notes>
+</file>
+
+<file path=ppt/notesSlides/notesSlide20.xml><?xml version="1.0" encoding="utf-8"?>
+<p:notes xmlns:a="http://schemas.openxmlformats.org/drawingml/2006/main" xmlns:p="http://schemas.openxmlformats.org/presentationml/2006/main" xmlns:r="http://schemas.openxmlformats.org/officeDocument/2006/relationships">
+  <p:cSld>
+    <p:spTree>
+      <p:nvGrpSpPr>
+        <p:cNvPr id="1" name=""/>
+        <p:cNvGrpSpPr/>
+        <p:nvPr/>
+      </p:nvGrpSpPr>
+      <p:grpSpPr>
+        <a:xfrm>
+          <a:off x="0" y="0"/>
+          <a:ext cx="0" cy="0"/>
+          <a:chOff x="0" y="0"/>
+          <a:chExt cx="0" cy="0"/>
+        </a:xfrm>
+      </p:grpSpPr>
+      <p:sp>
+        <p:nvSpPr>
+          <p:cNvPr id="2" name="Slide Image Placeholder 1"/>
+          <p:cNvSpPr>
+            <a:spLocks noGrp="1"/>
+          </p:cNvSpPr>
+          <p:nvPr>
+            <p:ph type="sldImg" idx="2"/>
+          </p:nvPr>
+        </p:nvSpPr>
+        <p:spPr/>
+      </p:sp>
+      <p:sp>
+        <p:nvSpPr>
+          <p:cNvPr id="3" name="Notes Placeholder 2"/>
+          <p:cNvSpPr>
+            <a:spLocks noGrp="1"/>
+          </p:cNvSpPr>
+          <p:nvPr>
+            <p:ph type="body" idx="3" sz="quarter"/>
+          </p:nvPr>
+        </p:nvSpPr>
+        <p:spPr/>
+        <p:txBody>
+          <a:bodyPr/>
+          <a:lstStyle/>
+          <a:p>
+            <a:r>
+              <a:t>Here are our academic and official references, covering foundational data mining texts, CART decision trees, state police portals, and peer-reviewed predictive policing literature. Thank you. We are now open for questions and evaluations.</a:t>
             </a:r>
           </a:p>
         </p:txBody>
@@ -1288,7 +1501,7 @@
           <a:lstStyle/>
           <a:p>
             <a:r>
-              <a:t>Slide 4 highlights how DATAMI directly advances three United Nations Sustainable Development Goals. Under SDG 16 (Peace and Justice), we provide explainable, auditable decision trees for transparent patrol resource allocation and proactive violence reduction. Under SDG 11 (Sustainable Cities), our geospatial cartography safeguards Kochi's public spaces and tests station resilience under crime surges. Under SDG 9 (Innovation and Infrastructure), we deliver modern, open-source data mining infrastructure without expensive proprietary software locks.</a:t>
+              <a:t>Slide 4 demonstrates how DATAMI maps directly to all 5 Course Outcomes of the KTU S5 Data Mining syllabus (PECST525): CO1 is fulfilled by warehousing and OLAP; CO2 by zero-policy and concept hierarchies; CO3 by CART decision tree classification; CO4 by lagged feature associations; and CO5 by web scraping, crime spree simulation, and Leaflet geospatial cartography.</a:t>
             </a:r>
           </a:p>
         </p:txBody>
@@ -1358,7 +1571,7 @@
           <a:lstStyle/>
           <a:p>
             <a:r>
-              <a:t>Here are our four engineering objectives: First, harvesting real Kerala Police records across 37 stations into a clean relational warehouse. Second, training an explainable CART Decision Tree to classify high-risk hotspots. Third, simulating crime sprees to identify understaffed stations and prove workload reduction. Fourth, delivering a full-stack geospatial WebUI with OpenStreetMap cartography.</a:t>
+              <a:t>Slide 5 details our direct contribution to three UN Sustainable Development Goals: SDG 16 through transparent, auditable decision trees for fair patrol allocation; SDG 11 through geospatial cartography safeguarding public urban spaces; and SDG 9 through an open-source, reproducible data mining infrastructure for state policing.</a:t>
             </a:r>
           </a:p>
         </p:txBody>
@@ -1428,7 +1641,7 @@
           <a:lstStyle/>
           <a:p>
             <a:r>
-              <a:t>Slide 6 outlines the complete data mining workflow implemented in DATAMI across 5 simple steps: Step 1: Harvesting raw portal tables and physical coordinates from official sources. Step 2: Cleaning and normalizing zero counts vs missing years. Step 3: Relational warehousing in SQLite with OLAP roll-up operations. Step 4: Machine learning risk prediction and crime spree surge simulation. Step 5: Interactive geospatial visualization on OpenStreetMap.</a:t>
+              <a:t>Here are our four engineering objectives: First, harvesting real Kerala Police records across 37 stations into a clean relational warehouse. Second, training an explainable CART Decision Tree to classify high-risk hotspots. Third, simulating crime sprees to identify understaffed stations and prove workload reduction. Fourth, delivering a full-stack geospatial WebUI with OpenStreetMap cartography.</a:t>
             </a:r>
           </a:p>
         </p:txBody>
@@ -1498,7 +1711,7 @@
           <a:lstStyle/>
           <a:p>
             <a:r>
-              <a:t>In Slide 7, we explain the data preprocessing steps: Our data is 100% real from Kerala Police portals. We enforced a strict zero-count policy distinguishing true zero crimes from missing years. We harmonized station names and established 3-tier spatial and legal concept hierarchies.</a:t>
+              <a:t>Slide 7 outlines the complete data mining workflow implemented in DATAMI across 5 simple steps: Step 1: Harvesting raw portal tables and physical coordinates from official sources. Step 2: Cleaning and normalizing zero counts vs missing years. Step 3: Relational warehousing in SQLite with OLAP roll-up operations. Step 4: Machine learning risk prediction and crime spree surge simulation. Step 5: Interactive geospatial visualization on OpenStreetMap.</a:t>
             </a:r>
           </a:p>
         </p:txBody>
@@ -1568,7 +1781,7 @@
           <a:lstStyle/>
           <a:p>
             <a:r>
-              <a:t>Slide 8 clarifies why raw fact rows show small numbers: each row is a specific crime category. When rolled up to station annual totals, we see realistic volumes: Ernakulam Central registers 1,939 crimes, Town South 1,418, and Palarivattom 1,110. The graph on the right displays the breakdown between IPC offenses and Special &amp; Local Laws.</a:t>
+              <a:t>In Step 1, we explain exactly where we scrape data from: First, ps.keralapolice.gov.in for 10-year crime counts, coordinates, and SHO contact info. Second, kochicity.keralapolice.gov.in for sanctioned staffing and vacancies. All data is cached locally to ensure 100% reproducibility and prevent state server throttling.</a:t>
             </a:r>
           </a:p>
         </p:txBody>
@@ -1638,7 +1851,7 @@
           <a:lstStyle/>
           <a:p>
             <a:r>
-              <a:t>In Slide 9, we formulated 5 temporal features. Notice on the right chart that Lag-1 volume and the 2-year rolling average dominate predictions, explaining over 66% of model splits. We used a strict chronological split (2016–2019 train, 2020–2025 test) to ensure zero data leakage.</a:t>
+              <a:t>In Step 2, we clarify key domain concepts: We distinguish true zero crimes from missing station years to avoid probability distortion. We define IPC offenses versus Special and Local Laws, noting that high SLL ratios reflect proactive police crackdowns. We also structure 3-tier spatial and legal concept hierarchies.</a:t>
             </a:r>
           </a:p>
         </p:txBody>
@@ -4761,7 +4974,7 @@
               </a:defRPr>
             </a:pPr>
             <a:r>
-              <a:t>Sustainable Development Goals Alignment:  SDG 16 (Peace &amp; Justice)  •  SDG 11 (Sustainable Cities)  •  SDG 9 (Innovation)</a:t>
+              <a:t>Sustainable Development Goals:  SDG 16 (Peace &amp; Justice)  •  SDG 11 (Sustainable Cities)  •  SDG 9 (Innovation)</a:t>
             </a:r>
           </a:p>
         </p:txBody>
@@ -5107,7 +5320,7 @@
         </p:nvSpPr>
         <p:spPr>
           <a:xfrm>
-            <a:off x="548640" y="320040"/>
+            <a:off x="548640" y="292608"/>
             <a:ext cx="7132320" cy="685800"/>
           </a:xfrm>
           <a:prstGeom prst="rect">
@@ -5122,7 +5335,7 @@
           <a:lstStyle/>
           <a:p>
             <a:pPr>
-              <a:defRPr sz="2300" b="1">
+              <a:defRPr sz="2200" b="1">
                 <a:solidFill>
                   <a:srgbClr val="0F172A"/>
                 </a:solidFill>
@@ -5130,12 +5343,12 @@
               </a:defRPr>
             </a:pPr>
             <a:r>
-              <a:t>CART Decision Tree Hotspot Induction</a:t>
-            </a:r>
-          </a:p>
-          <a:p>
-            <a:pPr>
-              <a:defRPr sz="1100" b="1">
+              <a:t>Step 3A: Relational Fact Table &amp; Storage Schema</a:t>
+            </a:r>
+          </a:p>
+          <a:p>
+            <a:pPr>
+              <a:defRPr sz="1050" b="1">
                 <a:solidFill>
                   <a:srgbClr val="CC0000"/>
                 </a:solidFill>
@@ -5143,7 +5356,7 @@
               </a:defRPr>
             </a:pPr>
             <a:r>
-              <a:t>EXPLAINABLE SUPERVISED CLASSIFIER (GINI SPLITS, DEPTH = 3)</a:t>
+              <a:t>ATOMIC GRAIN, STAR SCHEMA ATTRIBUTES &amp; OFFENSE HEAD AUDIT</a:t>
             </a:r>
           </a:p>
         </p:txBody>
@@ -5156,8 +5369,8 @@
         </p:nvSpPr>
         <p:spPr>
           <a:xfrm>
-            <a:off x="548640" y="1143000"/>
-            <a:ext cx="4114800" cy="3291840"/>
+            <a:off x="548640" y="1005840"/>
+            <a:ext cx="4114800" cy="3566160"/>
           </a:xfrm>
           <a:prstGeom prst="rect">
             <a:avLst/>
@@ -5169,25 +5382,48 @@
             <a:spAutoFit/>
           </a:bodyPr>
           <a:lstStyle/>
-          <a:p>
-            <a:pPr>
-              <a:defRPr sz="1400" b="1">
-                <a:solidFill>
-                  <a:srgbClr val="CC0000"/>
-                </a:solidFill>
-                <a:latin typeface="Calibri"/>
-              </a:defRPr>
-            </a:pPr>
-            <a:r>
-              <a:t>How the Decision Tree Works:</a:t>
-            </a:r>
-          </a:p>
+          <a:p/>
           <a:p>
             <a:pPr>
               <a:spcBef>
                 <a:spcPts val="400"/>
               </a:spcBef>
-              <a:defRPr sz="1150">
+              <a:spcAft>
+                <a:spcPts val="600"/>
+              </a:spcAft>
+              <a:defRPr sz="1150" b="1">
+                <a:solidFill>
+                  <a:srgbClr val="B41414"/>
+                </a:solidFill>
+                <a:latin typeface="Calibri"/>
+              </a:defRPr>
+            </a:pPr>
+            <a:r>
+              <a:t>Operational Rationale: Storing records at atomic granularity (Station × Year × Specific Offense Head) preserves statutory audit lineage and prevents irreversible aggregation loss during exploratory data mining.</a:t>
+            </a:r>
+          </a:p>
+          <a:p>
+            <a:pPr>
+              <a:spcBef>
+                <a:spcPts val="250"/>
+              </a:spcBef>
+              <a:defRPr sz="1050" b="1">
+                <a:solidFill>
+                  <a:srgbClr val="CC0000"/>
+                </a:solidFill>
+                <a:latin typeface="Calibri"/>
+              </a:defRPr>
+            </a:pPr>
+            <a:r>
+              <a:t>• Star Schema Warehouse Architecture (datami_crime.db):</a:t>
+            </a:r>
+          </a:p>
+          <a:p>
+            <a:pPr>
+              <a:spcBef>
+                <a:spcPts val="50"/>
+              </a:spcBef>
+              <a:defRPr sz="900">
                 <a:solidFill>
                   <a:srgbClr val="1E293B"/>
                 </a:solidFill>
@@ -5195,15 +5431,15 @@
               </a:defRPr>
             </a:pPr>
             <a:r>
-              <a:t>• Target Output (Y): Binary classification into Higher Relative Risk (Class 1) vs Lower Relative Risk (Class 0).</a:t>
+              <a:t>  - Fact Table (crime_records, 14,262 rows): Atomic grain: Station ID × Year (2014–2025) × Offense Head. Metric: case_count (registered FIRs). Lineage: source_url &amp; source_name.</a:t>
             </a:r>
           </a:p>
           <a:p>
             <a:pPr>
               <a:spcBef>
-                <a:spcPts val="400"/>
+                <a:spcPts val="50"/>
               </a:spcBef>
-              <a:defRPr sz="1150">
+              <a:defRPr sz="900">
                 <a:solidFill>
                   <a:srgbClr val="1E293B"/>
                 </a:solidFill>
@@ -5211,15 +5447,15 @@
               </a:defRPr>
             </a:pPr>
             <a:r>
-              <a:t>• Splitting Metric: Gini Impurity reduction at each branch: I_G = 1 - Σ p_i².</a:t>
+              <a:t>  - Dimension Table (stations, 37 rows): Physical GPS coordinates (lat, lon), division, jurisdiction text, SHO name/phone, and staffing totals.</a:t>
             </a:r>
           </a:p>
           <a:p>
             <a:pPr>
               <a:spcBef>
-                <a:spcPts val="400"/>
+                <a:spcPts val="50"/>
               </a:spcBef>
-              <a:defRPr sz="1150">
+              <a:defRPr sz="900">
                 <a:solidFill>
                   <a:srgbClr val="1E293B"/>
                 </a:solidFill>
@@ -5227,15 +5463,31 @@
               </a:defRPr>
             </a:pPr>
             <a:r>
-              <a:t>• Maximum Depth = 3: Strictly limited to avoid overfitting and produce auditable if-then decision rules.</a:t>
+              <a:t>  - Staffing Dimension (staff_strength, 148 rows): 4 ranks (Inspector, SI, SCPO, CPO) tracking sanctioned posts vs active on-duty personnel.</a:t>
             </a:r>
           </a:p>
           <a:p>
             <a:pPr>
               <a:spcBef>
-                <a:spcPts val="400"/>
+                <a:spcPts val="250"/>
               </a:spcBef>
-              <a:defRPr sz="1150">
+              <a:defRPr sz="1050" b="1">
+                <a:solidFill>
+                  <a:srgbClr val="CC0000"/>
+                </a:solidFill>
+                <a:latin typeface="Calibri"/>
+              </a:defRPr>
+            </a:pPr>
+            <a:r>
+              <a:t>• What is Stored in the Fact Table? (Concrete Data Audit):</a:t>
+            </a:r>
+          </a:p>
+          <a:p>
+            <a:pPr>
+              <a:spcBef>
+                <a:spcPts val="50"/>
+              </a:spcBef>
+              <a:defRPr sz="900">
                 <a:solidFill>
                   <a:srgbClr val="1E293B"/>
                 </a:solidFill>
@@ -5243,15 +5495,15 @@
               </a:defRPr>
             </a:pPr>
             <a:r>
-              <a:t>• Transparent Rule: IF lag1_cases &gt; 919 AND sll_ratio &gt; 0.42 THEN Higher Risk (Node purity: 95% Higher Risk).</a:t>
+              <a:t>  - 24 Specific IPC Heads (7,608 rows / 53.3%): Bodily and property offenses (Hurt: 5,801; Cheating: 5,044; Theft: 2,512; Molestation: 1,534; Riots: 1,396; Burglary: 559; Robbery: 512).</a:t>
             </a:r>
           </a:p>
           <a:p>
             <a:pPr>
               <a:spcBef>
-                <a:spcPts val="400"/>
+                <a:spcPts val="50"/>
               </a:spcBef>
-              <a:defRPr sz="1150">
+              <a:defRPr sz="900">
                 <a:solidFill>
                   <a:srgbClr val="1E293B"/>
                 </a:solidFill>
@@ -5259,14 +5511,30 @@
               </a:defRPr>
             </a:pPr>
             <a:r>
-              <a:t>• Zero Black-Box: Every prediction can be inspected and legally defended by station commanders.</a:t>
+              <a:t>  - 18 Specific SLL Heads (5,706 rows / 40.0%): Statutory vice acts (Prohibition liquor: 24,420; NDPS narcotics: 13,534; Gambling: 606; Arms Act: 40).</a:t>
+            </a:r>
+          </a:p>
+          <a:p>
+            <a:pPr>
+              <a:spcBef>
+                <a:spcPts val="50"/>
+              </a:spcBef>
+              <a:defRPr sz="900">
+                <a:solidFill>
+                  <a:srgbClr val="1E293B"/>
+                </a:solidFill>
+                <a:latin typeface="Calibri"/>
+              </a:defRPr>
+            </a:pPr>
+            <a:r>
+              <a:t>  - Rare offenses (Murder, Dacoity) explicitly preserve 0 for unobserved counts.</a:t>
             </a:r>
           </a:p>
         </p:txBody>
       </p:sp>
       <p:pic>
         <p:nvPicPr>
-          <p:cNvPr id="5" name="Picture 4" descr="decision_tree_vis.png"/>
+          <p:cNvPr id="5" name="Picture 4" descr="fact_table_storage.png"/>
           <p:cNvPicPr>
             <a:picLocks noChangeAspect="1"/>
           </p:cNvPicPr>
@@ -5280,8 +5548,8 @@
         </p:blipFill>
         <p:spPr>
           <a:xfrm>
-            <a:off x="4663440" y="1188720"/>
-            <a:ext cx="4114800" cy="2335427"/>
+            <a:off x="4754880" y="1115568"/>
+            <a:ext cx="4023360" cy="2298437"/>
           </a:xfrm>
           <a:prstGeom prst="rect">
             <a:avLst/>
@@ -5453,7 +5721,7 @@
         </p:nvSpPr>
         <p:spPr>
           <a:xfrm>
-            <a:off x="548640" y="320040"/>
+            <a:off x="548640" y="292608"/>
             <a:ext cx="7132320" cy="685800"/>
           </a:xfrm>
           <a:prstGeom prst="rect">
@@ -5468,7 +5736,7 @@
           <a:lstStyle/>
           <a:p>
             <a:pPr>
-              <a:defRPr sz="2300" b="1">
+              <a:defRPr sz="2200" b="1">
                 <a:solidFill>
                   <a:srgbClr val="0F172A"/>
                 </a:solidFill>
@@ -5476,12 +5744,12 @@
               </a:defRPr>
             </a:pPr>
             <a:r>
-              <a:t>Crime Spree Surge &amp; Staffing Simulator</a:t>
-            </a:r>
-          </a:p>
-          <a:p>
-            <a:pPr>
-              <a:defRPr sz="1100" b="1">
+              <a:t>Step 3B: OLAP Operations &amp; Multi-Station Cubes</a:t>
+            </a:r>
+          </a:p>
+          <a:p>
+            <a:pPr>
+              <a:defRPr sz="1050" b="1">
                 <a:solidFill>
                   <a:srgbClr val="CC0000"/>
                 </a:solidFill>
@@ -5489,7 +5757,7 @@
               </a:defRPr>
             </a:pPr>
             <a:r>
-              <a:t>MODELING OPERATIONAL STRAIN &amp; VACANCY MITIGATION</a:t>
+              <a:t>ROLL-UP, DRILL-DOWN, SLICE-AND-DICE &amp; 10-YEAR PIVOT CUBES</a:t>
             </a:r>
           </a:p>
         </p:txBody>
@@ -5502,8 +5770,8 @@
         </p:nvSpPr>
         <p:spPr>
           <a:xfrm>
-            <a:off x="548640" y="1143000"/>
-            <a:ext cx="4023360" cy="3291840"/>
+            <a:off x="548640" y="1005840"/>
+            <a:ext cx="4114800" cy="3566160"/>
           </a:xfrm>
           <a:prstGeom prst="rect">
             <a:avLst/>
@@ -5515,25 +5783,48 @@
             <a:spAutoFit/>
           </a:bodyPr>
           <a:lstStyle/>
-          <a:p>
-            <a:pPr>
-              <a:defRPr sz="1400" b="1">
-                <a:solidFill>
-                  <a:srgbClr val="CC0000"/>
-                </a:solidFill>
-                <a:latin typeface="Calibri"/>
-              </a:defRPr>
-            </a:pPr>
-            <a:r>
-              <a:t>How Understaffing Alerts are Computed:</a:t>
-            </a:r>
-          </a:p>
+          <a:p/>
           <a:p>
             <a:pPr>
               <a:spcBef>
                 <a:spcPts val="400"/>
               </a:spcBef>
-              <a:defRPr sz="1150">
+              <a:spcAft>
+                <a:spcPts val="600"/>
+              </a:spcAft>
+              <a:defRPr sz="1150" b="1">
+                <a:solidFill>
+                  <a:srgbClr val="B41414"/>
+                </a:solidFill>
+                <a:latin typeface="Calibri"/>
+              </a:defRPr>
+            </a:pPr>
+            <a:r>
+              <a:t>Operational Rationale: Raw crime records are stored at fine offense-head granularity; OLAP roll-up enables instant aggregation into annual station volumes and multi-year trajectory comparisons.</a:t>
+            </a:r>
+          </a:p>
+          <a:p>
+            <a:pPr>
+              <a:spcBef>
+                <a:spcPts val="250"/>
+              </a:spcBef>
+              <a:defRPr sz="1050" b="1">
+                <a:solidFill>
+                  <a:srgbClr val="CC0000"/>
+                </a:solidFill>
+                <a:latin typeface="Calibri"/>
+              </a:defRPr>
+            </a:pPr>
+            <a:r>
+              <a:t>• Multidimensional Data Cube Dimensions:</a:t>
+            </a:r>
+          </a:p>
+          <a:p>
+            <a:pPr>
+              <a:spcBef>
+                <a:spcPts val="50"/>
+              </a:spcBef>
+              <a:defRPr sz="900">
                 <a:solidFill>
                   <a:srgbClr val="1E293B"/>
                 </a:solidFill>
@@ -5541,15 +5832,15 @@
               </a:defRPr>
             </a:pPr>
             <a:r>
-              <a:t>• Officer Caseload Metric: Workload = Annual Crimes / Active On-Duty Officers.</a:t>
+              <a:t>  - Spatial Dimension: State → District (Ernakulam) → Sub-Division → Police Station.</a:t>
             </a:r>
           </a:p>
           <a:p>
             <a:pPr>
               <a:spcBef>
-                <a:spcPts val="400"/>
+                <a:spcPts val="50"/>
               </a:spcBef>
-              <a:defRPr sz="1150">
+              <a:defRPr sz="900">
                 <a:solidFill>
                   <a:srgbClr val="1E293B"/>
                 </a:solidFill>
@@ -5557,15 +5848,15 @@
               </a:defRPr>
             </a:pPr>
             <a:r>
-              <a:t>• Spree Volume: Baseline Cases × (1 + Surge %). Tested at +25%, +50%, +100%.</a:t>
+              <a:t>  - Temporal Dimension: Individual Year (2014–2025) → Multi-Year Trend Periods.</a:t>
             </a:r>
           </a:p>
           <a:p>
             <a:pPr>
               <a:spcBef>
-                <a:spcPts val="400"/>
+                <a:spcPts val="50"/>
               </a:spcBef>
-              <a:defRPr sz="1150">
+              <a:defRPr sz="900">
                 <a:solidFill>
                   <a:srgbClr val="1E293B"/>
                 </a:solidFill>
@@ -5573,15 +5864,31 @@
               </a:defRPr>
             </a:pPr>
             <a:r>
-              <a:t>• Configurable Alert Threshold: Stations exceeding 25 cases/officer trigger an Understaffed Alert.</a:t>
+              <a:t>  - Legal Taxonomy: High-Level Code (IPC vs SLL) → Crime Class → Specific Head.</a:t>
             </a:r>
           </a:p>
           <a:p>
             <a:pPr>
               <a:spcBef>
-                <a:spcPts val="400"/>
+                <a:spcPts val="250"/>
               </a:spcBef>
-              <a:defRPr sz="1150">
+              <a:defRPr sz="1050" b="1">
+                <a:solidFill>
+                  <a:srgbClr val="CC0000"/>
+                </a:solidFill>
+                <a:latin typeface="Calibri"/>
+              </a:defRPr>
+            </a:pPr>
+            <a:r>
+              <a:t>• Core OLAP Operations Executed in DATAMI:</a:t>
+            </a:r>
+          </a:p>
+          <a:p>
+            <a:pPr>
+              <a:spcBef>
+                <a:spcPts val="50"/>
+              </a:spcBef>
+              <a:defRPr sz="900">
                 <a:solidFill>
                   <a:srgbClr val="1E293B"/>
                 </a:solidFill>
@@ -5589,15 +5896,15 @@
               </a:defRPr>
             </a:pPr>
             <a:r>
-              <a:t>• Mathematical Vacancy Mitigation: In Panangad, filling 5 vacancies expands staff from 48 to 53, reducing spree workload from 45.9 down to 41.6 cases/officer.</a:t>
+              <a:t>  - Roll-Up (Aggregation): Sums individual heads to annual totals (14,262 rows → 37 stations × 12 years). Reveals true metropolitan volumes: Ernakulam Central logs 1,939 cases; Town South logs 1,418 cases.</a:t>
             </a:r>
           </a:p>
           <a:p>
             <a:pPr>
               <a:spcBef>
-                <a:spcPts val="400"/>
+                <a:spcPts val="50"/>
               </a:spcBef>
-              <a:defRPr sz="1150">
+              <a:defRPr sz="900">
                 <a:solidFill>
                   <a:srgbClr val="1E293B"/>
                 </a:solidFill>
@@ -5605,14 +5912,46 @@
               </a:defRPr>
             </a:pPr>
             <a:r>
-              <a:t>• Fleet Strain: Under a +50% spree, 12 of 37 stations trigger Understaffed Alerts.</a:t>
+              <a:t>  - Drill-Down (Disaggregation): Allows commanders to click a station and break down totals into specific statutory drivers (e.g. NDPS drug arrests vs property theft).</a:t>
+            </a:r>
+          </a:p>
+          <a:p>
+            <a:pPr>
+              <a:spcBef>
+                <a:spcPts val="50"/>
+              </a:spcBef>
+              <a:defRPr sz="900">
+                <a:solidFill>
+                  <a:srgbClr val="1E293B"/>
+                </a:solidFill>
+                <a:latin typeface="Calibri"/>
+              </a:defRPr>
+            </a:pPr>
+            <a:r>
+              <a:t>  - Slice &amp; Dice (Subsetting): Isolates specific years (e.g. 2022) or station clusters.</a:t>
+            </a:r>
+          </a:p>
+          <a:p>
+            <a:pPr>
+              <a:spcBef>
+                <a:spcPts val="50"/>
+              </a:spcBef>
+              <a:defRPr sz="900">
+                <a:solidFill>
+                  <a:srgbClr val="1E293B"/>
+                </a:solidFill>
+                <a:latin typeface="Calibri"/>
+              </a:defRPr>
+            </a:pPr>
+            <a:r>
+              <a:t>  - Pivot (Cross-Tabulation): Generates a 37-station × 10-year matrix for temporal ML modeling.</a:t>
             </a:r>
           </a:p>
         </p:txBody>
       </p:sp>
       <p:pic>
         <p:nvPicPr>
-          <p:cNvPr id="5" name="Picture 4" descr="spree_simulation.png"/>
+          <p:cNvPr id="5" name="Picture 4" descr="olap_rollup.png"/>
           <p:cNvPicPr>
             <a:picLocks noChangeAspect="1"/>
           </p:cNvPicPr>
@@ -5626,8 +5965,8 @@
         </p:blipFill>
         <p:spPr>
           <a:xfrm>
-            <a:off x="4663440" y="1188720"/>
-            <a:ext cx="4023360" cy="2656936"/>
+            <a:off x="4754880" y="1115568"/>
+            <a:ext cx="4023360" cy="2761129"/>
           </a:xfrm>
           <a:prstGeom prst="rect">
             <a:avLst/>
@@ -5799,7 +6138,7 @@
         </p:nvSpPr>
         <p:spPr>
           <a:xfrm>
-            <a:off x="548640" y="320040"/>
+            <a:off x="548640" y="292608"/>
             <a:ext cx="7132320" cy="685800"/>
           </a:xfrm>
           <a:prstGeom prst="rect">
@@ -5814,7 +6153,7 @@
           <a:lstStyle/>
           <a:p>
             <a:pPr>
-              <a:defRPr sz="2300" b="1">
+              <a:defRPr sz="2200" b="1">
                 <a:solidFill>
                   <a:srgbClr val="0F172A"/>
                 </a:solidFill>
@@ -5822,12 +6161,12 @@
               </a:defRPr>
             </a:pPr>
             <a:r>
-              <a:t>Experimental Results &amp; Model Evaluation</a:t>
-            </a:r>
-          </a:p>
-          <a:p>
-            <a:pPr>
-              <a:defRPr sz="1100" b="1">
+              <a:t>Step 4A: Feature Engineering &amp; Domain Predictors</a:t>
+            </a:r>
+          </a:p>
+          <a:p>
+            <a:pPr>
+              <a:defRPr sz="1050" b="1">
                 <a:solidFill>
                   <a:srgbClr val="CC0000"/>
                 </a:solidFill>
@@ -5835,7 +6174,7 @@
               </a:defRPr>
             </a:pPr>
             <a:r>
-              <a:t>TEST METRICS &amp; COMPARISON AGAINST REFERENCE BASELINES</a:t>
+              <a:t>TEMPORAL MOMENTUM, GROWTH VELOCITY &amp; SLL RATIO FORMULATIONS</a:t>
             </a:r>
           </a:p>
         </p:txBody>
@@ -5848,8 +6187,8 @@
         </p:nvSpPr>
         <p:spPr>
           <a:xfrm>
-            <a:off x="548640" y="1143000"/>
-            <a:ext cx="4297680" cy="3291840"/>
+            <a:off x="548640" y="1078992"/>
+            <a:ext cx="4114800" cy="3520440"/>
           </a:xfrm>
           <a:prstGeom prst="rect">
             <a:avLst/>
@@ -5861,25 +6200,32 @@
             <a:spAutoFit/>
           </a:bodyPr>
           <a:lstStyle/>
-          <a:p>
-            <a:pPr>
-              <a:defRPr sz="1400" b="1">
-                <a:solidFill>
-                  <a:srgbClr val="CC0000"/>
-                </a:solidFill>
-                <a:latin typeface="Calibri"/>
-              </a:defRPr>
-            </a:pPr>
-            <a:r>
-              <a:t>Empirical Evaluation (2020–2025 Test Set):</a:t>
-            </a:r>
-          </a:p>
+          <a:p/>
           <a:p>
             <a:pPr>
               <a:spcBef>
                 <a:spcPts val="400"/>
               </a:spcBef>
-              <a:defRPr sz="1150">
+              <a:spcAft>
+                <a:spcPts val="600"/>
+              </a:spcAft>
+              <a:defRPr sz="1150" b="1">
+                <a:solidFill>
+                  <a:srgbClr val="B41414"/>
+                </a:solidFill>
+                <a:latin typeface="Calibri"/>
+              </a:defRPr>
+            </a:pPr>
+            <a:r>
+              <a:t>Operational Rationale: Crime exhibits strong temporal momentum; lagged counts and moving averages capture baseline trajectories without future data leakage.</a:t>
+            </a:r>
+          </a:p>
+          <a:p>
+            <a:pPr>
+              <a:spcBef>
+                <a:spcPts val="300"/>
+              </a:spcBef>
+              <a:defRPr sz="1050">
                 <a:solidFill>
                   <a:srgbClr val="1E293B"/>
                 </a:solidFill>
@@ -5887,15 +6233,15 @@
               </a:defRPr>
             </a:pPr>
             <a:r>
-              <a:t>• Test Accuracy: 61.1% on out-of-time test observations.</a:t>
+              <a:t>• X₁ (lag1_cases): Prior year volume (T-1) — 38.5% Importance (primary momentum).</a:t>
             </a:r>
           </a:p>
           <a:p>
             <a:pPr>
               <a:spcBef>
-                <a:spcPts val="400"/>
+                <a:spcPts val="300"/>
               </a:spcBef>
-              <a:defRPr sz="1150">
+              <a:defRPr sz="1050">
                 <a:solidFill>
                   <a:srgbClr val="1E293B"/>
                 </a:solidFill>
@@ -5903,15 +6249,15 @@
               </a:defRPr>
             </a:pPr>
             <a:r>
-              <a:t>• Precision: 27.0% | Recall: 37.0% | F1-Score: 31.3%.</a:t>
+              <a:t>• X₂ (lag2_cases): Two-year prior volume (T-2) — 15.8% (medium-term stability).</a:t>
             </a:r>
           </a:p>
           <a:p>
             <a:pPr>
               <a:spcBef>
-                <a:spcPts val="400"/>
+                <a:spcPts val="300"/>
               </a:spcBef>
-              <a:defRPr sz="1150">
+              <a:defRPr sz="1050">
                 <a:solidFill>
                   <a:srgbClr val="1E293B"/>
                 </a:solidFill>
@@ -5919,15 +6265,15 @@
               </a:defRPr>
             </a:pPr>
             <a:r>
-              <a:t>• Outperforms Baselines: Beats Zero-R Majority Class (52.1%) and Persistence Lag-1 (47.9%).</a:t>
+              <a:t>• X₃ (rolling_2yr_avg): Smoothed 2-year average — 28.3% (noise reduction).</a:t>
             </a:r>
           </a:p>
           <a:p>
             <a:pPr>
               <a:spcBef>
-                <a:spcPts val="400"/>
+                <a:spcPts val="300"/>
               </a:spcBef>
-              <a:defRPr sz="1150">
+              <a:defRPr sz="1050">
                 <a:solidFill>
                   <a:srgbClr val="1E293B"/>
                 </a:solidFill>
@@ -5935,15 +6281,15 @@
               </a:defRPr>
             </a:pPr>
             <a:r>
-              <a:t>• True Predictive Signal: Verifies that combining multi-year lagged volume with moving averages extracts genuine signal beyond naive guessing.</a:t>
+              <a:t>• X₄ (trend_rate): Registration Velocity: (Cases_T-1 - Cases_T-2) / Cases_T-2 — 10.8% (acceleration indicator).</a:t>
             </a:r>
           </a:p>
           <a:p>
             <a:pPr>
               <a:spcBef>
-                <a:spcPts val="400"/>
+                <a:spcPts val="300"/>
               </a:spcBef>
-              <a:defRPr sz="1150">
+              <a:defRPr sz="1050">
                 <a:solidFill>
                   <a:srgbClr val="1E293B"/>
                 </a:solidFill>
@@ -5951,14 +6297,30 @@
               </a:defRPr>
             </a:pPr>
             <a:r>
-              <a:t>• Confusion Matrix Breakdown: 15 True Negatives, 10 True Positives, with 6 False Positives.</a:t>
+              <a:t>• X₅ (sll_ratio): Proportion of Special &amp; Local Laws: SLL / Total Cases — 6.6% (proactive vice activity).</a:t>
+            </a:r>
+          </a:p>
+          <a:p>
+            <a:pPr>
+              <a:spcBef>
+                <a:spcPts val="300"/>
+              </a:spcBef>
+              <a:defRPr sz="1050">
+                <a:solidFill>
+                  <a:srgbClr val="1E293B"/>
+                </a:solidFill>
+                <a:latin typeface="Calibri"/>
+              </a:defRPr>
+            </a:pPr>
+            <a:r>
+              <a:t>• Chronological Split: Train on 2016–2019, test on 2020–2025. Zero future data leakage.</a:t>
             </a:r>
           </a:p>
         </p:txBody>
       </p:sp>
       <p:pic>
         <p:nvPicPr>
-          <p:cNvPr id="5" name="Picture 4" descr="confusion_matrix.png"/>
+          <p:cNvPr id="5" name="Picture 4" descr="feature_importance.png"/>
           <p:cNvPicPr>
             <a:picLocks noChangeAspect="1"/>
           </p:cNvPicPr>
@@ -5972,8 +6334,8 @@
         </p:blipFill>
         <p:spPr>
           <a:xfrm>
-            <a:off x="4937760" y="1188720"/>
-            <a:ext cx="3749039" cy="3143077"/>
+            <a:off x="4754880" y="1188720"/>
+            <a:ext cx="3931920" cy="2689587"/>
           </a:xfrm>
           <a:prstGeom prst="rect">
             <a:avLst/>
@@ -6145,7 +6507,7 @@
         </p:nvSpPr>
         <p:spPr>
           <a:xfrm>
-            <a:off x="548640" y="320040"/>
+            <a:off x="548640" y="292608"/>
             <a:ext cx="7132320" cy="685800"/>
           </a:xfrm>
           <a:prstGeom prst="rect">
@@ -6160,7 +6522,7 @@
           <a:lstStyle/>
           <a:p>
             <a:pPr>
-              <a:defRPr sz="2300" b="1">
+              <a:defRPr sz="2200" b="1">
                 <a:solidFill>
                   <a:srgbClr val="0F172A"/>
                 </a:solidFill>
@@ -6168,12 +6530,12 @@
               </a:defRPr>
             </a:pPr>
             <a:r>
-              <a:t>Operational Findings &amp; Policy Impact</a:t>
-            </a:r>
-          </a:p>
-          <a:p>
-            <a:pPr>
-              <a:defRPr sz="1100" b="1">
+              <a:t>Step 4B: Supervised CART Decision Tree Induction</a:t>
+            </a:r>
+          </a:p>
+          <a:p>
+            <a:pPr>
+              <a:defRPr sz="1050" b="1">
                 <a:solidFill>
                   <a:srgbClr val="CC0000"/>
                 </a:solidFill>
@@ -6181,7 +6543,7 @@
               </a:defRPr>
             </a:pPr>
             <a:r>
-              <a:t>ACTIONABLE POLICING INSIGHTS FOR METROPOLITAN LEADERSHIP</a:t>
+              <a:t>EXPLAINABLE SUPERVISED CLASSIFIER (GINI SPLITS, MAX DEPTH = 3)</a:t>
             </a:r>
           </a:p>
         </p:txBody>
@@ -6194,8 +6556,8 @@
         </p:nvSpPr>
         <p:spPr>
           <a:xfrm>
-            <a:off x="731520" y="1143000"/>
-            <a:ext cx="7680960" cy="3291840"/>
+            <a:off x="548640" y="1078992"/>
+            <a:ext cx="4114800" cy="3520440"/>
           </a:xfrm>
           <a:prstGeom prst="rect">
             <a:avLst/>
@@ -6207,28 +6569,32 @@
             <a:spAutoFit/>
           </a:bodyPr>
           <a:lstStyle/>
+          <a:p/>
           <a:p>
             <a:pPr>
               <a:spcBef>
-                <a:spcPts val="0"/>
+                <a:spcPts val="400"/>
               </a:spcBef>
-              <a:defRPr sz="1350" b="1">
-                <a:solidFill>
-                  <a:srgbClr val="CC0000"/>
-                </a:solidFill>
-                <a:latin typeface="Calibri"/>
-              </a:defRPr>
-            </a:pPr>
-            <a:r>
-              <a:t>• Volume vs Staffing Disparity</a:t>
+              <a:spcAft>
+                <a:spcPts val="600"/>
+              </a:spcAft>
+              <a:defRPr sz="1150" b="1">
+                <a:solidFill>
+                  <a:srgbClr val="B41414"/>
+                </a:solidFill>
+                <a:latin typeface="Calibri"/>
+              </a:defRPr>
+            </a:pPr>
+            <a:r>
+              <a:t>Operational Rationale: Unlike black-box neural networks, police leadership requires transparent, legally auditable if-then rules to justify patrol reallocation and officer mobilization.</a:t>
             </a:r>
           </a:p>
           <a:p>
             <a:pPr>
               <a:spcBef>
-                <a:spcPts val="200"/>
+                <a:spcPts val="300"/>
               </a:spcBef>
-              <a:defRPr sz="1200">
+              <a:defRPr sz="1050">
                 <a:solidFill>
                   <a:srgbClr val="1E293B"/>
                 </a:solidFill>
@@ -6236,31 +6602,31 @@
               </a:defRPr>
             </a:pPr>
             <a:r>
-              <a:t>Ernakulam Central registers the highest total volume (1,939 cases), but has 159 active officers (healthy: 12.2 c/off). Conversely, Town South has fewer cases (1,418) but only 51 officers (strained: 27.8 c/off), making it highly vulnerable.</a:t>
+              <a:t>• Target Output (Y): Binary classification into Higher Relative Risk (Class 1) vs Lower Relative Risk (Class 0), thresholded at global median (824.5 cases).</a:t>
             </a:r>
           </a:p>
           <a:p>
             <a:pPr>
               <a:spcBef>
-                <a:spcPts val="800"/>
+                <a:spcPts val="300"/>
               </a:spcBef>
-              <a:defRPr sz="1350" b="1">
-                <a:solidFill>
-                  <a:srgbClr val="CC0000"/>
-                </a:solidFill>
-                <a:latin typeface="Calibri"/>
-              </a:defRPr>
-            </a:pPr>
-            <a:r>
-              <a:t>• Coastal &amp; Suburban Strain</a:t>
+              <a:defRPr sz="1050">
+                <a:solidFill>
+                  <a:srgbClr val="1E293B"/>
+                </a:solidFill>
+                <a:latin typeface="Calibri"/>
+              </a:defRPr>
+            </a:pPr>
+            <a:r>
+              <a:t>• Gini Impurity Metric: Evaluates node impurity: I_G = 1 - Σ p_i². Splits select features maximizing purity gain.</a:t>
             </a:r>
           </a:p>
           <a:p>
             <a:pPr>
               <a:spcBef>
-                <a:spcPts val="200"/>
+                <a:spcPts val="300"/>
               </a:spcBef>
-              <a:defRPr sz="1200">
+              <a:defRPr sz="1050">
                 <a:solidFill>
                   <a:srgbClr val="1E293B"/>
                 </a:solidFill>
@@ -6268,31 +6634,31 @@
               </a:defRPr>
             </a:pPr>
             <a:r>
-              <a:t>Stations like Panangad face severe caseload strain (45.9 c/off during sprees). Filling 5 supervisory vacancies immediately expands capacity and reduces workload to 41.6 c/off.</a:t>
+              <a:t>• Maximum Depth = 3: Strictly limited to avoid overfitting and produce auditable if-then decision rules.</a:t>
             </a:r>
           </a:p>
           <a:p>
             <a:pPr>
               <a:spcBef>
-                <a:spcPts val="800"/>
+                <a:spcPts val="300"/>
               </a:spcBef>
-              <a:defRPr sz="1350" b="1">
-                <a:solidFill>
-                  <a:srgbClr val="CC0000"/>
-                </a:solidFill>
-                <a:latin typeface="Calibri"/>
-              </a:defRPr>
-            </a:pPr>
-            <a:r>
-              <a:t>• Actionable Resource Allocation</a:t>
+              <a:defRPr sz="1050">
+                <a:solidFill>
+                  <a:srgbClr val="1E293B"/>
+                </a:solidFill>
+                <a:latin typeface="Calibri"/>
+              </a:defRPr>
+            </a:pPr>
+            <a:r>
+              <a:t>• Transparent Rule: IF lag1_cases &gt; 919 AND sll_ratio &gt; 0.42 THEN Higher Risk (Node purity: 95% Higher Risk).</a:t>
             </a:r>
           </a:p>
           <a:p>
             <a:pPr>
               <a:spcBef>
-                <a:spcPts val="200"/>
+                <a:spcPts val="300"/>
               </a:spcBef>
-              <a:defRPr sz="1200">
+              <a:defRPr sz="1050">
                 <a:solidFill>
                   <a:srgbClr val="1E293B"/>
                 </a:solidFill>
@@ -6300,22 +6666,38 @@
               </a:defRPr>
             </a:pPr>
             <a:r>
-              <a:t>1. Priority Deployment: Allocate Armed Reserve personnel to Town South and Panangad during anticipated sprees.</a:t>
-            </a:r>
-            <a:br/>
-            <a:r>
-              <a:t>2. Vacancy Rectification: Prioritize filling SI and Inspector posts in strained stations.</a:t>
-            </a:r>
-            <a:br/>
-            <a:r>
-              <a:t>3. Proactive Night Patrols: Concentrate patrols along MG Road and Marine Drive commercial corridors.</a:t>
-            </a:r>
-          </a:p>
-        </p:txBody>
-      </p:sp>
-      <p:sp>
-        <p:nvSpPr>
-          <p:cNvPr id="5" name="Rectangle 4"/>
+              <a:t>• Zero Black-Box: Every prediction can be inspected and legally defended by station commanders.</a:t>
+            </a:r>
+          </a:p>
+        </p:txBody>
+      </p:sp>
+      <p:pic>
+        <p:nvPicPr>
+          <p:cNvPr id="5" name="Picture 4" descr="decision_tree_vis.png"/>
+          <p:cNvPicPr>
+            <a:picLocks noChangeAspect="1"/>
+          </p:cNvPicPr>
+          <p:nvPr/>
+        </p:nvPicPr>
+        <p:blipFill>
+          <a:blip r:embed="rId3"/>
+          <a:stretch>
+            <a:fillRect/>
+          </a:stretch>
+        </p:blipFill>
+        <p:spPr>
+          <a:xfrm>
+            <a:off x="4663440" y="1188720"/>
+            <a:ext cx="4114800" cy="2335427"/>
+          </a:xfrm>
+          <a:prstGeom prst="rect">
+            <a:avLst/>
+          </a:prstGeom>
+        </p:spPr>
+      </p:pic>
+      <p:sp>
+        <p:nvSpPr>
+          <p:cNvPr id="6" name="Rectangle 5"/>
           <p:cNvSpPr/>
           <p:nvPr/>
         </p:nvSpPr>
@@ -6358,7 +6740,7 @@
       </p:sp>
       <p:sp>
         <p:nvSpPr>
-          <p:cNvPr id="6" name="TextBox 5"/>
+          <p:cNvPr id="7" name="TextBox 6"/>
           <p:cNvSpPr txBox="1"/>
           <p:nvPr/>
         </p:nvSpPr>
@@ -6394,7 +6776,7 @@
       </p:sp>
       <p:sp>
         <p:nvSpPr>
-          <p:cNvPr id="7" name="TextBox 6"/>
+          <p:cNvPr id="8" name="TextBox 7"/>
           <p:cNvSpPr txBox="1"/>
           <p:nvPr/>
         </p:nvSpPr>
@@ -6478,7 +6860,7 @@
         </p:nvSpPr>
         <p:spPr>
           <a:xfrm>
-            <a:off x="548640" y="320040"/>
+            <a:off x="548640" y="292608"/>
             <a:ext cx="7132320" cy="685800"/>
           </a:xfrm>
           <a:prstGeom prst="rect">
@@ -6493,7 +6875,7 @@
           <a:lstStyle/>
           <a:p>
             <a:pPr>
-              <a:defRPr sz="2300" b="1">
+              <a:defRPr sz="2200" b="1">
                 <a:solidFill>
                   <a:srgbClr val="0F172A"/>
                 </a:solidFill>
@@ -6501,12 +6883,12 @@
               </a:defRPr>
             </a:pPr>
             <a:r>
-              <a:t>Live Geospatial Interface &amp; Station Cartography</a:t>
-            </a:r>
-          </a:p>
-          <a:p>
-            <a:pPr>
-              <a:defRPr sz="1100" b="1">
+              <a:t>Step 4C: Crime Spree Surge &amp; Staffing Simulator</a:t>
+            </a:r>
+          </a:p>
+          <a:p>
+            <a:pPr>
+              <a:defRPr sz="1050" b="1">
                 <a:solidFill>
                   <a:srgbClr val="CC0000"/>
                 </a:solidFill>
@@ -6514,14 +6896,137 @@
               </a:defRPr>
             </a:pPr>
             <a:r>
-              <a:t>ACTUAL SCREENSHOT FROM WORKING LEAFLET OPENSTREETMAP APPLICATION</a:t>
+              <a:t>MODELING OPERATIONAL STRAIN &amp; VACANCY MITIGATION</a:t>
+            </a:r>
+          </a:p>
+        </p:txBody>
+      </p:sp>
+      <p:sp>
+        <p:nvSpPr>
+          <p:cNvPr id="4" name="TextBox 3"/>
+          <p:cNvSpPr txBox="1"/>
+          <p:nvPr/>
+        </p:nvSpPr>
+        <p:spPr>
+          <a:xfrm>
+            <a:off x="548640" y="1078992"/>
+            <a:ext cx="4023360" cy="3520440"/>
+          </a:xfrm>
+          <a:prstGeom prst="rect">
+            <a:avLst/>
+          </a:prstGeom>
+          <a:noFill/>
+        </p:spPr>
+        <p:txBody>
+          <a:bodyPr wrap="square">
+            <a:spAutoFit/>
+          </a:bodyPr>
+          <a:lstStyle/>
+          <a:p/>
+          <a:p>
+            <a:pPr>
+              <a:spcBef>
+                <a:spcPts val="400"/>
+              </a:spcBef>
+              <a:spcAft>
+                <a:spcPts val="600"/>
+              </a:spcAft>
+              <a:defRPr sz="1150" b="1">
+                <a:solidFill>
+                  <a:srgbClr val="B41414"/>
+                </a:solidFill>
+                <a:latin typeface="Calibri"/>
+              </a:defRPr>
+            </a:pPr>
+            <a:r>
+              <a:t>Operational Rationale: Stations that appear manageable during baseline months can experience sudden operational breakdown during festival or seasonal crime surges; stress-testing identifies fragile stations in advance.</a:t>
+            </a:r>
+          </a:p>
+          <a:p>
+            <a:pPr>
+              <a:spcBef>
+                <a:spcPts val="300"/>
+              </a:spcBef>
+              <a:defRPr sz="1050">
+                <a:solidFill>
+                  <a:srgbClr val="1E293B"/>
+                </a:solidFill>
+                <a:latin typeface="Calibri"/>
+              </a:defRPr>
+            </a:pPr>
+            <a:r>
+              <a:t>• Officer Caseload Metric: Workload = Annual Crimes / Active On-Duty Officers.</a:t>
+            </a:r>
+          </a:p>
+          <a:p>
+            <a:pPr>
+              <a:spcBef>
+                <a:spcPts val="300"/>
+              </a:spcBef>
+              <a:defRPr sz="1050">
+                <a:solidFill>
+                  <a:srgbClr val="1E293B"/>
+                </a:solidFill>
+                <a:latin typeface="Calibri"/>
+              </a:defRPr>
+            </a:pPr>
+            <a:r>
+              <a:t>• Configurable Alert Threshold: Stations exceeding 25 cases/officer trigger an Understaffed Alert.</a:t>
+            </a:r>
+          </a:p>
+          <a:p>
+            <a:pPr>
+              <a:spcBef>
+                <a:spcPts val="300"/>
+              </a:spcBef>
+              <a:defRPr sz="1050">
+                <a:solidFill>
+                  <a:srgbClr val="1E293B"/>
+                </a:solidFill>
+                <a:latin typeface="Calibri"/>
+              </a:defRPr>
+            </a:pPr>
+            <a:r>
+              <a:t>• Spree Volume: Baseline Cases × (1 + Surge %). Tested at +25%, +50%, +100%.</a:t>
+            </a:r>
+          </a:p>
+          <a:p>
+            <a:pPr>
+              <a:spcBef>
+                <a:spcPts val="300"/>
+              </a:spcBef>
+              <a:defRPr sz="1050">
+                <a:solidFill>
+                  <a:srgbClr val="1E293B"/>
+                </a:solidFill>
+                <a:latin typeface="Calibri"/>
+              </a:defRPr>
+            </a:pPr>
+            <a:r>
+              <a:t>• Mathematical Vacancy Mitigation: In Panangad, filling 5 vacancies expands staff from 48 to 53, reducing spree workload from 45.9 down to 41.6 cases/officer.</a:t>
+            </a:r>
+          </a:p>
+          <a:p>
+            <a:pPr>
+              <a:spcBef>
+                <a:spcPts val="300"/>
+              </a:spcBef>
+              <a:defRPr sz="1050">
+                <a:solidFill>
+                  <a:srgbClr val="1E293B"/>
+                </a:solidFill>
+                <a:latin typeface="Calibri"/>
+              </a:defRPr>
+            </a:pPr>
+            <a:r>
+              <a:t>• Fleet Strain: Under a +50% spree, 12 of 37 stations trigger Understaffed Alerts.</a:t>
             </a:r>
           </a:p>
         </p:txBody>
       </p:sp>
       <p:pic>
         <p:nvPicPr>
-          <p:cNvPr id="4" name="Picture 3" descr="working_map_cropped.png"/>
+          <p:cNvPr id="5" name="Picture 4" descr="spree_simulation.png"/>
           <p:cNvPicPr>
             <a:picLocks noChangeAspect="1"/>
           </p:cNvPicPr>
@@ -6535,130 +7040,14 @@
         </p:blipFill>
         <p:spPr>
           <a:xfrm>
-            <a:off x="548640" y="1097280"/>
-            <a:ext cx="4754880" cy="2412402"/>
+            <a:off x="4663440" y="1188720"/>
+            <a:ext cx="4023360" cy="2656936"/>
           </a:xfrm>
           <a:prstGeom prst="rect">
             <a:avLst/>
           </a:prstGeom>
         </p:spPr>
       </p:pic>
-      <p:sp>
-        <p:nvSpPr>
-          <p:cNvPr id="5" name="TextBox 4"/>
-          <p:cNvSpPr txBox="1"/>
-          <p:nvPr/>
-        </p:nvSpPr>
-        <p:spPr>
-          <a:xfrm>
-            <a:off x="5394960" y="1097280"/>
-            <a:ext cx="3291840" cy="3337560"/>
-          </a:xfrm>
-          <a:prstGeom prst="rect">
-            <a:avLst/>
-          </a:prstGeom>
-          <a:noFill/>
-        </p:spPr>
-        <p:txBody>
-          <a:bodyPr wrap="square">
-            <a:spAutoFit/>
-          </a:bodyPr>
-          <a:lstStyle/>
-          <a:p>
-            <a:pPr>
-              <a:defRPr sz="1300" b="1">
-                <a:solidFill>
-                  <a:srgbClr val="CC0000"/>
-                </a:solidFill>
-                <a:latin typeface="Calibri"/>
-              </a:defRPr>
-            </a:pPr>
-            <a:r>
-              <a:t>Delivered Web Application Features:</a:t>
-            </a:r>
-          </a:p>
-          <a:p>
-            <a:pPr>
-              <a:spcBef>
-                <a:spcPts val="400"/>
-              </a:spcBef>
-              <a:defRPr sz="1100">
-                <a:solidFill>
-                  <a:srgbClr val="1E293B"/>
-                </a:solidFill>
-                <a:latin typeface="Calibri"/>
-              </a:defRPr>
-            </a:pPr>
-            <a:r>
-              <a:t>• Real OpenStreetMap Cartography: Geocoded markers for all 37 police stations across Kochi.</a:t>
-            </a:r>
-          </a:p>
-          <a:p>
-            <a:pPr>
-              <a:spcBef>
-                <a:spcPts val="400"/>
-              </a:spcBef>
-              <a:defRPr sz="1100">
-                <a:solidFill>
-                  <a:srgbClr val="1E293B"/>
-                </a:solidFill>
-                <a:latin typeface="Calibri"/>
-              </a:defRPr>
-            </a:pPr>
-            <a:r>
-              <a:t>• Risk Color-Coding: Red pins for Understaffed Alerts, Amber for Moderate, Green for Resilient.</a:t>
-            </a:r>
-          </a:p>
-          <a:p>
-            <a:pPr>
-              <a:spcBef>
-                <a:spcPts val="400"/>
-              </a:spcBef>
-              <a:defRPr sz="1100">
-                <a:solidFill>
-                  <a:srgbClr val="1E293B"/>
-                </a:solidFill>
-                <a:latin typeface="Calibri"/>
-              </a:defRPr>
-            </a:pPr>
-            <a:r>
-              <a:t>• Interactive Station Drawer: Clicking any marker opens full SHO details, jurisdiction boundaries, and direct phone.</a:t>
-            </a:r>
-          </a:p>
-          <a:p>
-            <a:pPr>
-              <a:spcBef>
-                <a:spcPts val="400"/>
-              </a:spcBef>
-              <a:defRPr sz="1100">
-                <a:solidFill>
-                  <a:srgbClr val="1E293B"/>
-                </a:solidFill>
-                <a:latin typeface="Calibri"/>
-              </a:defRPr>
-            </a:pPr>
-            <a:r>
-              <a:t>• Real-Time Surge Simulator: Adjust spree surge (+25%, +50%, +100%) and workload threshold live.</a:t>
-            </a:r>
-          </a:p>
-          <a:p>
-            <a:pPr>
-              <a:spcBef>
-                <a:spcPts val="400"/>
-              </a:spcBef>
-              <a:defRPr sz="1100">
-                <a:solidFill>
-                  <a:srgbClr val="1E293B"/>
-                </a:solidFill>
-                <a:latin typeface="Calibri"/>
-              </a:defRPr>
-            </a:pPr>
-            <a:r>
-              <a:t>• 10-Year Crime Trendline: Historical Recharts visualization of IPC and SLL crime trajectories.</a:t>
-            </a:r>
-          </a:p>
-        </p:txBody>
-      </p:sp>
       <p:sp>
         <p:nvSpPr>
           <p:cNvPr id="6" name="Rectangle 5"/>
@@ -6824,7 +7213,7 @@
         </p:nvSpPr>
         <p:spPr>
           <a:xfrm>
-            <a:off x="548640" y="320040"/>
+            <a:off x="548640" y="292608"/>
             <a:ext cx="7132320" cy="685800"/>
           </a:xfrm>
           <a:prstGeom prst="rect">
@@ -6839,7 +7228,7 @@
           <a:lstStyle/>
           <a:p>
             <a:pPr>
-              <a:defRPr sz="2300" b="1">
+              <a:defRPr sz="2200" b="1">
                 <a:solidFill>
                   <a:srgbClr val="0F172A"/>
                 </a:solidFill>
@@ -6847,12 +7236,1051 @@
               </a:defRPr>
             </a:pPr>
             <a:r>
+              <a:t>Step 4D: Experimental Results &amp; Model Evaluation</a:t>
+            </a:r>
+          </a:p>
+          <a:p>
+            <a:pPr>
+              <a:defRPr sz="1050" b="1">
+                <a:solidFill>
+                  <a:srgbClr val="CC0000"/>
+                </a:solidFill>
+                <a:latin typeface="Calibri"/>
+              </a:defRPr>
+            </a:pPr>
+            <a:r>
+              <a:t>TEST METRICS &amp; COMPARISON AGAINST REFERENCE BASELINES</a:t>
+            </a:r>
+          </a:p>
+        </p:txBody>
+      </p:sp>
+      <p:sp>
+        <p:nvSpPr>
+          <p:cNvPr id="4" name="TextBox 3"/>
+          <p:cNvSpPr txBox="1"/>
+          <p:nvPr/>
+        </p:nvSpPr>
+        <p:spPr>
+          <a:xfrm>
+            <a:off x="548640" y="1078992"/>
+            <a:ext cx="4297680" cy="3520440"/>
+          </a:xfrm>
+          <a:prstGeom prst="rect">
+            <a:avLst/>
+          </a:prstGeom>
+          <a:noFill/>
+        </p:spPr>
+        <p:txBody>
+          <a:bodyPr wrap="square">
+            <a:spAutoFit/>
+          </a:bodyPr>
+          <a:lstStyle/>
+          <a:p/>
+          <a:p>
+            <a:pPr>
+              <a:spcBef>
+                <a:spcPts val="400"/>
+              </a:spcBef>
+              <a:spcAft>
+                <a:spcPts val="600"/>
+              </a:spcAft>
+              <a:defRPr sz="1150" b="1">
+                <a:solidFill>
+                  <a:srgbClr val="B41414"/>
+                </a:solidFill>
+                <a:latin typeface="Calibri"/>
+              </a:defRPr>
+            </a:pPr>
+            <a:r>
+              <a:t>Operational Rationale: Random train/test splits cause future data leakage in time-series; chronological evaluation (2016–2019 train, 2020–2025 test) validates real-world prospective accuracy.</a:t>
+            </a:r>
+          </a:p>
+          <a:p>
+            <a:pPr>
+              <a:spcBef>
+                <a:spcPts val="300"/>
+              </a:spcBef>
+              <a:defRPr sz="1050">
+                <a:solidFill>
+                  <a:srgbClr val="1E293B"/>
+                </a:solidFill>
+                <a:latin typeface="Calibri"/>
+              </a:defRPr>
+            </a:pPr>
+            <a:r>
+              <a:t>• Test Accuracy: 61.1% on out-of-time test observations (2020–2025).</a:t>
+            </a:r>
+          </a:p>
+          <a:p>
+            <a:pPr>
+              <a:spcBef>
+                <a:spcPts val="300"/>
+              </a:spcBef>
+              <a:defRPr sz="1050">
+                <a:solidFill>
+                  <a:srgbClr val="1E293B"/>
+                </a:solidFill>
+                <a:latin typeface="Calibri"/>
+              </a:defRPr>
+            </a:pPr>
+            <a:r>
+              <a:t>• Precision: 27.0% | Recall: 37.0% | F1-Score: 31.3%.</a:t>
+            </a:r>
+          </a:p>
+          <a:p>
+            <a:pPr>
+              <a:spcBef>
+                <a:spcPts val="300"/>
+              </a:spcBef>
+              <a:defRPr sz="1050">
+                <a:solidFill>
+                  <a:srgbClr val="1E293B"/>
+                </a:solidFill>
+                <a:latin typeface="Calibri"/>
+              </a:defRPr>
+            </a:pPr>
+            <a:r>
+              <a:t>• Outperforms Baselines: Beats Zero-R Majority Class (52.1%) and Persistence Lag-1 (47.9%).</a:t>
+            </a:r>
+          </a:p>
+          <a:p>
+            <a:pPr>
+              <a:spcBef>
+                <a:spcPts val="300"/>
+              </a:spcBef>
+              <a:defRPr sz="1050">
+                <a:solidFill>
+                  <a:srgbClr val="1E293B"/>
+                </a:solidFill>
+                <a:latin typeface="Calibri"/>
+              </a:defRPr>
+            </a:pPr>
+            <a:r>
+              <a:t>• True Predictive Signal: Verifies that combining multi-year lagged volume with moving averages extracts genuine signal beyond naive guessing.</a:t>
+            </a:r>
+          </a:p>
+          <a:p>
+            <a:pPr>
+              <a:spcBef>
+                <a:spcPts val="300"/>
+              </a:spcBef>
+              <a:defRPr sz="1050">
+                <a:solidFill>
+                  <a:srgbClr val="1E293B"/>
+                </a:solidFill>
+                <a:latin typeface="Calibri"/>
+              </a:defRPr>
+            </a:pPr>
+            <a:r>
+              <a:t>• Confusion Matrix Breakdown: 15 True Negatives, 10 True Positives, with 6 False Positives.</a:t>
+            </a:r>
+          </a:p>
+        </p:txBody>
+      </p:sp>
+      <p:pic>
+        <p:nvPicPr>
+          <p:cNvPr id="5" name="Picture 4" descr="confusion_matrix.png"/>
+          <p:cNvPicPr>
+            <a:picLocks noChangeAspect="1"/>
+          </p:cNvPicPr>
+          <p:nvPr/>
+        </p:nvPicPr>
+        <p:blipFill>
+          <a:blip r:embed="rId3"/>
+          <a:stretch>
+            <a:fillRect/>
+          </a:stretch>
+        </p:blipFill>
+        <p:spPr>
+          <a:xfrm>
+            <a:off x="4937760" y="1188720"/>
+            <a:ext cx="3749039" cy="3143077"/>
+          </a:xfrm>
+          <a:prstGeom prst="rect">
+            <a:avLst/>
+          </a:prstGeom>
+        </p:spPr>
+      </p:pic>
+      <p:sp>
+        <p:nvSpPr>
+          <p:cNvPr id="6" name="Rectangle 5"/>
+          <p:cNvSpPr/>
+          <p:nvPr/>
+        </p:nvSpPr>
+        <p:spPr>
+          <a:xfrm>
+            <a:off x="0" y="4709160"/>
+            <a:ext cx="9144000" cy="438912"/>
+          </a:xfrm>
+          <a:prstGeom prst="rect">
+            <a:avLst/>
+          </a:prstGeom>
+          <a:solidFill>
+            <a:srgbClr val="CC0000"/>
+          </a:solidFill>
+          <a:ln>
+            <a:noFill/>
+          </a:ln>
+        </p:spPr>
+        <p:style>
+          <a:lnRef idx="1">
+            <a:schemeClr val="accent1"/>
+          </a:lnRef>
+          <a:fillRef idx="3">
+            <a:schemeClr val="accent1"/>
+          </a:fillRef>
+          <a:effectRef idx="2">
+            <a:schemeClr val="accent1"/>
+          </a:effectRef>
+          <a:fontRef idx="minor">
+            <a:schemeClr val="lt1"/>
+          </a:fontRef>
+        </p:style>
+        <p:txBody>
+          <a:bodyPr rtlCol="0" anchor="ctr"/>
+          <a:lstStyle/>
+          <a:p>
+            <a:pPr algn="ctr"/>
+          </a:p>
+        </p:txBody>
+      </p:sp>
+      <p:sp>
+        <p:nvSpPr>
+          <p:cNvPr id="7" name="TextBox 6"/>
+          <p:cNvSpPr txBox="1"/>
+          <p:nvPr/>
+        </p:nvSpPr>
+        <p:spPr>
+          <a:xfrm>
+            <a:off x="457200" y="4727448"/>
+            <a:ext cx="5943600" cy="365760"/>
+          </a:xfrm>
+          <a:prstGeom prst="rect">
+            <a:avLst/>
+          </a:prstGeom>
+          <a:noFill/>
+        </p:spPr>
+        <p:txBody>
+          <a:bodyPr wrap="none">
+            <a:spAutoFit/>
+          </a:bodyPr>
+          <a:lstStyle/>
+          <a:p>
+            <a:pPr>
+              <a:defRPr sz="1100">
+                <a:solidFill>
+                  <a:srgbClr val="FFFFFF"/>
+                </a:solidFill>
+                <a:latin typeface="Calibri"/>
+              </a:defRPr>
+            </a:pPr>
+            <a:r>
+              <a:t>Crime Hotspots Prediction  |  DATAMI  |  Dept. of CSE(AI)</a:t>
+            </a:r>
+          </a:p>
+        </p:txBody>
+      </p:sp>
+      <p:sp>
+        <p:nvSpPr>
+          <p:cNvPr id="8" name="TextBox 7"/>
+          <p:cNvSpPr txBox="1"/>
+          <p:nvPr/>
+        </p:nvSpPr>
+        <p:spPr>
+          <a:xfrm>
+            <a:off x="7772400" y="4727448"/>
+            <a:ext cx="914400" cy="365760"/>
+          </a:xfrm>
+          <a:prstGeom prst="rect">
+            <a:avLst/>
+          </a:prstGeom>
+          <a:noFill/>
+        </p:spPr>
+        <p:txBody>
+          <a:bodyPr wrap="none">
+            <a:spAutoFit/>
+          </a:bodyPr>
+          <a:lstStyle/>
+          <a:p>
+            <a:pPr algn="r">
+              <a:defRPr sz="1200" b="1">
+                <a:solidFill>
+                  <a:srgbClr val="FFFFFF"/>
+                </a:solidFill>
+                <a:latin typeface="Calibri"/>
+              </a:defRPr>
+            </a:pPr>
+            <a:r>
+              <a:t>15</a:t>
+            </a:r>
+          </a:p>
+        </p:txBody>
+      </p:sp>
+    </p:spTree>
+  </p:cSld>
+  <p:clrMapOvr>
+    <a:masterClrMapping/>
+  </p:clrMapOvr>
+</p:sld>
+</file>
+
+<file path=ppt/slides/slide16.xml><?xml version="1.0" encoding="utf-8"?>
+<p:sld xmlns:a="http://schemas.openxmlformats.org/drawingml/2006/main" xmlns:p="http://schemas.openxmlformats.org/presentationml/2006/main" xmlns:r="http://schemas.openxmlformats.org/officeDocument/2006/relationships">
+  <p:cSld>
+    <p:spTree>
+      <p:nvGrpSpPr>
+        <p:cNvPr id="1" name=""/>
+        <p:cNvGrpSpPr/>
+        <p:nvPr/>
+      </p:nvGrpSpPr>
+      <p:grpSpPr/>
+      <p:pic>
+        <p:nvPicPr>
+          <p:cNvPr id="2" name="Picture 1" descr="logo.png"/>
+          <p:cNvPicPr>
+            <a:picLocks noChangeAspect="1"/>
+          </p:cNvPicPr>
+          <p:nvPr/>
+        </p:nvPicPr>
+        <p:blipFill>
+          <a:blip r:embed="rId2"/>
+          <a:stretch>
+            <a:fillRect/>
+          </a:stretch>
+        </p:blipFill>
+        <p:spPr>
+          <a:xfrm>
+            <a:off x="7818120" y="164592"/>
+            <a:ext cx="1005840" cy="571293"/>
+          </a:xfrm>
+          <a:prstGeom prst="rect">
+            <a:avLst/>
+          </a:prstGeom>
+        </p:spPr>
+      </p:pic>
+      <p:sp>
+        <p:nvSpPr>
+          <p:cNvPr id="3" name="TextBox 2"/>
+          <p:cNvSpPr txBox="1"/>
+          <p:nvPr/>
+        </p:nvSpPr>
+        <p:spPr>
+          <a:xfrm>
+            <a:off x="548640" y="292608"/>
+            <a:ext cx="7132320" cy="685800"/>
+          </a:xfrm>
+          <a:prstGeom prst="rect">
+            <a:avLst/>
+          </a:prstGeom>
+          <a:noFill/>
+        </p:spPr>
+        <p:txBody>
+          <a:bodyPr wrap="square">
+            <a:spAutoFit/>
+          </a:bodyPr>
+          <a:lstStyle/>
+          <a:p>
+            <a:pPr>
+              <a:defRPr sz="2200" b="1">
+                <a:solidFill>
+                  <a:srgbClr val="0F172A"/>
+                </a:solidFill>
+                <a:latin typeface="Calibri"/>
+              </a:defRPr>
+            </a:pPr>
+            <a:r>
+              <a:t>Operational Findings &amp; Policy Impact</a:t>
+            </a:r>
+          </a:p>
+          <a:p>
+            <a:pPr>
+              <a:defRPr sz="1050" b="1">
+                <a:solidFill>
+                  <a:srgbClr val="CC0000"/>
+                </a:solidFill>
+                <a:latin typeface="Calibri"/>
+              </a:defRPr>
+            </a:pPr>
+            <a:r>
+              <a:t>ACTIONABLE POLICING INSIGHTS FOR METROPOLITAN LEADERSHIP</a:t>
+            </a:r>
+          </a:p>
+        </p:txBody>
+      </p:sp>
+      <p:sp>
+        <p:nvSpPr>
+          <p:cNvPr id="4" name="TextBox 3"/>
+          <p:cNvSpPr txBox="1"/>
+          <p:nvPr/>
+        </p:nvSpPr>
+        <p:spPr>
+          <a:xfrm>
+            <a:off x="731520" y="1143000"/>
+            <a:ext cx="7680960" cy="3291840"/>
+          </a:xfrm>
+          <a:prstGeom prst="rect">
+            <a:avLst/>
+          </a:prstGeom>
+          <a:noFill/>
+        </p:spPr>
+        <p:txBody>
+          <a:bodyPr wrap="square">
+            <a:spAutoFit/>
+          </a:bodyPr>
+          <a:lstStyle/>
+          <a:p>
+            <a:pPr>
+              <a:spcBef>
+                <a:spcPts val="0"/>
+              </a:spcBef>
+              <a:defRPr sz="1300" b="1">
+                <a:solidFill>
+                  <a:srgbClr val="CC0000"/>
+                </a:solidFill>
+                <a:latin typeface="Calibri"/>
+              </a:defRPr>
+            </a:pPr>
+            <a:r>
+              <a:t>• Volume vs Staffing Disparity</a:t>
+            </a:r>
+          </a:p>
+          <a:p>
+            <a:pPr>
+              <a:spcBef>
+                <a:spcPts val="100"/>
+              </a:spcBef>
+              <a:defRPr sz="1150">
+                <a:solidFill>
+                  <a:srgbClr val="1E293B"/>
+                </a:solidFill>
+                <a:latin typeface="Calibri"/>
+              </a:defRPr>
+            </a:pPr>
+            <a:r>
+              <a:t>Ernakulam Central registers the highest total volume (1,939 cases), but has 159 active officers (healthy: 12.2 c/off). Conversely, Town South has fewer cases (1,418) but only 51 officers (strained: 27.8 c/off), making it highly vulnerable.</a:t>
+            </a:r>
+          </a:p>
+          <a:p>
+            <a:pPr>
+              <a:spcBef>
+                <a:spcPts val="600"/>
+              </a:spcBef>
+              <a:defRPr sz="1300" b="1">
+                <a:solidFill>
+                  <a:srgbClr val="CC0000"/>
+                </a:solidFill>
+                <a:latin typeface="Calibri"/>
+              </a:defRPr>
+            </a:pPr>
+            <a:r>
+              <a:t>• Coastal &amp; Suburban Strain</a:t>
+            </a:r>
+          </a:p>
+          <a:p>
+            <a:pPr>
+              <a:spcBef>
+                <a:spcPts val="100"/>
+              </a:spcBef>
+              <a:defRPr sz="1150">
+                <a:solidFill>
+                  <a:srgbClr val="1E293B"/>
+                </a:solidFill>
+                <a:latin typeface="Calibri"/>
+              </a:defRPr>
+            </a:pPr>
+            <a:r>
+              <a:t>Stations like Panangad face severe caseload strain (45.9 c/off during sprees). Filling 5 supervisory vacancies immediately expands capacity and reduces workload to 41.6 c/off.</a:t>
+            </a:r>
+          </a:p>
+          <a:p>
+            <a:pPr>
+              <a:spcBef>
+                <a:spcPts val="600"/>
+              </a:spcBef>
+              <a:defRPr sz="1300" b="1">
+                <a:solidFill>
+                  <a:srgbClr val="CC0000"/>
+                </a:solidFill>
+                <a:latin typeface="Calibri"/>
+              </a:defRPr>
+            </a:pPr>
+            <a:r>
+              <a:t>• Actionable Resource Allocation</a:t>
+            </a:r>
+          </a:p>
+          <a:p>
+            <a:pPr>
+              <a:spcBef>
+                <a:spcPts val="100"/>
+              </a:spcBef>
+              <a:defRPr sz="1150">
+                <a:solidFill>
+                  <a:srgbClr val="1E293B"/>
+                </a:solidFill>
+                <a:latin typeface="Calibri"/>
+              </a:defRPr>
+            </a:pPr>
+            <a:r>
+              <a:t>1. Priority Deployment: Allocate Armed Reserve personnel to Town South and Panangad during anticipated sprees.</a:t>
+            </a:r>
+            <a:br/>
+            <a:r>
+              <a:t>2. Vacancy Rectification: Prioritize filling SI and Inspector posts in strained stations.</a:t>
+            </a:r>
+            <a:br/>
+            <a:r>
+              <a:t>3. Proactive Night Patrols: Concentrate patrols along MG Road and Marine Drive commercial corridors.</a:t>
+            </a:r>
+          </a:p>
+        </p:txBody>
+      </p:sp>
+      <p:sp>
+        <p:nvSpPr>
+          <p:cNvPr id="5" name="Rectangle 4"/>
+          <p:cNvSpPr/>
+          <p:nvPr/>
+        </p:nvSpPr>
+        <p:spPr>
+          <a:xfrm>
+            <a:off x="0" y="4709160"/>
+            <a:ext cx="9144000" cy="438912"/>
+          </a:xfrm>
+          <a:prstGeom prst="rect">
+            <a:avLst/>
+          </a:prstGeom>
+          <a:solidFill>
+            <a:srgbClr val="CC0000"/>
+          </a:solidFill>
+          <a:ln>
+            <a:noFill/>
+          </a:ln>
+        </p:spPr>
+        <p:style>
+          <a:lnRef idx="1">
+            <a:schemeClr val="accent1"/>
+          </a:lnRef>
+          <a:fillRef idx="3">
+            <a:schemeClr val="accent1"/>
+          </a:fillRef>
+          <a:effectRef idx="2">
+            <a:schemeClr val="accent1"/>
+          </a:effectRef>
+          <a:fontRef idx="minor">
+            <a:schemeClr val="lt1"/>
+          </a:fontRef>
+        </p:style>
+        <p:txBody>
+          <a:bodyPr rtlCol="0" anchor="ctr"/>
+          <a:lstStyle/>
+          <a:p>
+            <a:pPr algn="ctr"/>
+          </a:p>
+        </p:txBody>
+      </p:sp>
+      <p:sp>
+        <p:nvSpPr>
+          <p:cNvPr id="6" name="TextBox 5"/>
+          <p:cNvSpPr txBox="1"/>
+          <p:nvPr/>
+        </p:nvSpPr>
+        <p:spPr>
+          <a:xfrm>
+            <a:off x="457200" y="4727448"/>
+            <a:ext cx="5943600" cy="365760"/>
+          </a:xfrm>
+          <a:prstGeom prst="rect">
+            <a:avLst/>
+          </a:prstGeom>
+          <a:noFill/>
+        </p:spPr>
+        <p:txBody>
+          <a:bodyPr wrap="none">
+            <a:spAutoFit/>
+          </a:bodyPr>
+          <a:lstStyle/>
+          <a:p>
+            <a:pPr>
+              <a:defRPr sz="1100">
+                <a:solidFill>
+                  <a:srgbClr val="FFFFFF"/>
+                </a:solidFill>
+                <a:latin typeface="Calibri"/>
+              </a:defRPr>
+            </a:pPr>
+            <a:r>
+              <a:t>Crime Hotspots Prediction  |  DATAMI  |  Dept. of CSE(AI)</a:t>
+            </a:r>
+          </a:p>
+        </p:txBody>
+      </p:sp>
+      <p:sp>
+        <p:nvSpPr>
+          <p:cNvPr id="7" name="TextBox 6"/>
+          <p:cNvSpPr txBox="1"/>
+          <p:nvPr/>
+        </p:nvSpPr>
+        <p:spPr>
+          <a:xfrm>
+            <a:off x="7772400" y="4727448"/>
+            <a:ext cx="914400" cy="365760"/>
+          </a:xfrm>
+          <a:prstGeom prst="rect">
+            <a:avLst/>
+          </a:prstGeom>
+          <a:noFill/>
+        </p:spPr>
+        <p:txBody>
+          <a:bodyPr wrap="none">
+            <a:spAutoFit/>
+          </a:bodyPr>
+          <a:lstStyle/>
+          <a:p>
+            <a:pPr algn="r">
+              <a:defRPr sz="1200" b="1">
+                <a:solidFill>
+                  <a:srgbClr val="FFFFFF"/>
+                </a:solidFill>
+                <a:latin typeface="Calibri"/>
+              </a:defRPr>
+            </a:pPr>
+            <a:r>
+              <a:t>16</a:t>
+            </a:r>
+          </a:p>
+        </p:txBody>
+      </p:sp>
+    </p:spTree>
+  </p:cSld>
+  <p:clrMapOvr>
+    <a:masterClrMapping/>
+  </p:clrMapOvr>
+</p:sld>
+</file>
+
+<file path=ppt/slides/slide17.xml><?xml version="1.0" encoding="utf-8"?>
+<p:sld xmlns:a="http://schemas.openxmlformats.org/drawingml/2006/main" xmlns:p="http://schemas.openxmlformats.org/presentationml/2006/main" xmlns:r="http://schemas.openxmlformats.org/officeDocument/2006/relationships">
+  <p:cSld>
+    <p:spTree>
+      <p:nvGrpSpPr>
+        <p:cNvPr id="1" name=""/>
+        <p:cNvGrpSpPr/>
+        <p:nvPr/>
+      </p:nvGrpSpPr>
+      <p:grpSpPr/>
+      <p:pic>
+        <p:nvPicPr>
+          <p:cNvPr id="2" name="Picture 1" descr="logo.png"/>
+          <p:cNvPicPr>
+            <a:picLocks noChangeAspect="1"/>
+          </p:cNvPicPr>
+          <p:nvPr/>
+        </p:nvPicPr>
+        <p:blipFill>
+          <a:blip r:embed="rId2"/>
+          <a:stretch>
+            <a:fillRect/>
+          </a:stretch>
+        </p:blipFill>
+        <p:spPr>
+          <a:xfrm>
+            <a:off x="7818120" y="164592"/>
+            <a:ext cx="1005840" cy="571293"/>
+          </a:xfrm>
+          <a:prstGeom prst="rect">
+            <a:avLst/>
+          </a:prstGeom>
+        </p:spPr>
+      </p:pic>
+      <p:sp>
+        <p:nvSpPr>
+          <p:cNvPr id="3" name="TextBox 2"/>
+          <p:cNvSpPr txBox="1"/>
+          <p:nvPr/>
+        </p:nvSpPr>
+        <p:spPr>
+          <a:xfrm>
+            <a:off x="548640" y="292608"/>
+            <a:ext cx="7132320" cy="685800"/>
+          </a:xfrm>
+          <a:prstGeom prst="rect">
+            <a:avLst/>
+          </a:prstGeom>
+          <a:noFill/>
+        </p:spPr>
+        <p:txBody>
+          <a:bodyPr wrap="square">
+            <a:spAutoFit/>
+          </a:bodyPr>
+          <a:lstStyle/>
+          <a:p>
+            <a:pPr>
+              <a:defRPr sz="2200" b="1">
+                <a:solidFill>
+                  <a:srgbClr val="0F172A"/>
+                </a:solidFill>
+                <a:latin typeface="Calibri"/>
+              </a:defRPr>
+            </a:pPr>
+            <a:r>
+              <a:t>Step 5: Live Geospatial Interface &amp; Station Cartography</a:t>
+            </a:r>
+          </a:p>
+          <a:p>
+            <a:pPr>
+              <a:defRPr sz="1050" b="1">
+                <a:solidFill>
+                  <a:srgbClr val="CC0000"/>
+                </a:solidFill>
+                <a:latin typeface="Calibri"/>
+              </a:defRPr>
+            </a:pPr>
+            <a:r>
+              <a:t>ACTUAL SCREENSHOT FROM WORKING LEAFLET OPENSTREETMAP APPLICATION</a:t>
+            </a:r>
+          </a:p>
+        </p:txBody>
+      </p:sp>
+      <p:pic>
+        <p:nvPicPr>
+          <p:cNvPr id="4" name="Picture 3" descr="working_map_cropped.png"/>
+          <p:cNvPicPr>
+            <a:picLocks noChangeAspect="1"/>
+          </p:cNvPicPr>
+          <p:nvPr/>
+        </p:nvPicPr>
+        <p:blipFill>
+          <a:blip r:embed="rId3"/>
+          <a:stretch>
+            <a:fillRect/>
+          </a:stretch>
+        </p:blipFill>
+        <p:spPr>
+          <a:xfrm>
+            <a:off x="548640" y="1097280"/>
+            <a:ext cx="4754880" cy="2412402"/>
+          </a:xfrm>
+          <a:prstGeom prst="rect">
+            <a:avLst/>
+          </a:prstGeom>
+        </p:spPr>
+      </p:pic>
+      <p:sp>
+        <p:nvSpPr>
+          <p:cNvPr id="5" name="TextBox 4"/>
+          <p:cNvSpPr txBox="1"/>
+          <p:nvPr/>
+        </p:nvSpPr>
+        <p:spPr>
+          <a:xfrm>
+            <a:off x="5394960" y="1051560"/>
+            <a:ext cx="3291840" cy="3520440"/>
+          </a:xfrm>
+          <a:prstGeom prst="rect">
+            <a:avLst/>
+          </a:prstGeom>
+          <a:noFill/>
+        </p:spPr>
+        <p:txBody>
+          <a:bodyPr wrap="square">
+            <a:spAutoFit/>
+          </a:bodyPr>
+          <a:lstStyle/>
+          <a:p/>
+          <a:p>
+            <a:pPr>
+              <a:spcBef>
+                <a:spcPts val="400"/>
+              </a:spcBef>
+              <a:spcAft>
+                <a:spcPts val="600"/>
+              </a:spcAft>
+              <a:defRPr sz="1150" b="1">
+                <a:solidFill>
+                  <a:srgbClr val="B41414"/>
+                </a:solidFill>
+                <a:latin typeface="Calibri"/>
+              </a:defRPr>
+            </a:pPr>
+            <a:r>
+              <a:t>Operational Rationale: Tactical commanders cannot interpret raw database tables during emergencies; an interactive map provides instant visual situational awareness with color-coded risk alerts.</a:t>
+            </a:r>
+          </a:p>
+          <a:p>
+            <a:pPr>
+              <a:spcBef>
+                <a:spcPts val="300"/>
+              </a:spcBef>
+              <a:defRPr sz="1050">
+                <a:solidFill>
+                  <a:srgbClr val="1E293B"/>
+                </a:solidFill>
+                <a:latin typeface="Calibri"/>
+              </a:defRPr>
+            </a:pPr>
+            <a:r>
+              <a:t>• Real OpenStreetMap Cartography: Geocoded markers for all 37 police stations across Kochi.</a:t>
+            </a:r>
+          </a:p>
+          <a:p>
+            <a:pPr>
+              <a:spcBef>
+                <a:spcPts val="300"/>
+              </a:spcBef>
+              <a:defRPr sz="1050">
+                <a:solidFill>
+                  <a:srgbClr val="1E293B"/>
+                </a:solidFill>
+                <a:latin typeface="Calibri"/>
+              </a:defRPr>
+            </a:pPr>
+            <a:r>
+              <a:t>• Risk Color-Coding: Red pins for Understaffed Alerts, Amber for Moderate, Green for Resilient.</a:t>
+            </a:r>
+          </a:p>
+          <a:p>
+            <a:pPr>
+              <a:spcBef>
+                <a:spcPts val="300"/>
+              </a:spcBef>
+              <a:defRPr sz="1050">
+                <a:solidFill>
+                  <a:srgbClr val="1E293B"/>
+                </a:solidFill>
+                <a:latin typeface="Calibri"/>
+              </a:defRPr>
+            </a:pPr>
+            <a:r>
+              <a:t>• Interactive Station Drawer: Clicking any marker opens full SHO details, jurisdiction boundaries, and direct phone.</a:t>
+            </a:r>
+          </a:p>
+          <a:p>
+            <a:pPr>
+              <a:spcBef>
+                <a:spcPts val="300"/>
+              </a:spcBef>
+              <a:defRPr sz="1050">
+                <a:solidFill>
+                  <a:srgbClr val="1E293B"/>
+                </a:solidFill>
+                <a:latin typeface="Calibri"/>
+              </a:defRPr>
+            </a:pPr>
+            <a:r>
+              <a:t>• Real-Time Surge Simulator: Adjust spree surge (+25%, +50%, +100%) and workload threshold live.</a:t>
+            </a:r>
+          </a:p>
+          <a:p>
+            <a:pPr>
+              <a:spcBef>
+                <a:spcPts val="300"/>
+              </a:spcBef>
+              <a:defRPr sz="1050">
+                <a:solidFill>
+                  <a:srgbClr val="1E293B"/>
+                </a:solidFill>
+                <a:latin typeface="Calibri"/>
+              </a:defRPr>
+            </a:pPr>
+            <a:r>
+              <a:t>• 10-Year Crime Trendline: Historical Recharts visualization of IPC and SLL crime trajectories.</a:t>
+            </a:r>
+          </a:p>
+        </p:txBody>
+      </p:sp>
+      <p:sp>
+        <p:nvSpPr>
+          <p:cNvPr id="6" name="Rectangle 5"/>
+          <p:cNvSpPr/>
+          <p:nvPr/>
+        </p:nvSpPr>
+        <p:spPr>
+          <a:xfrm>
+            <a:off x="0" y="4709160"/>
+            <a:ext cx="9144000" cy="438912"/>
+          </a:xfrm>
+          <a:prstGeom prst="rect">
+            <a:avLst/>
+          </a:prstGeom>
+          <a:solidFill>
+            <a:srgbClr val="CC0000"/>
+          </a:solidFill>
+          <a:ln>
+            <a:noFill/>
+          </a:ln>
+        </p:spPr>
+        <p:style>
+          <a:lnRef idx="1">
+            <a:schemeClr val="accent1"/>
+          </a:lnRef>
+          <a:fillRef idx="3">
+            <a:schemeClr val="accent1"/>
+          </a:fillRef>
+          <a:effectRef idx="2">
+            <a:schemeClr val="accent1"/>
+          </a:effectRef>
+          <a:fontRef idx="minor">
+            <a:schemeClr val="lt1"/>
+          </a:fontRef>
+        </p:style>
+        <p:txBody>
+          <a:bodyPr rtlCol="0" anchor="ctr"/>
+          <a:lstStyle/>
+          <a:p>
+            <a:pPr algn="ctr"/>
+          </a:p>
+        </p:txBody>
+      </p:sp>
+      <p:sp>
+        <p:nvSpPr>
+          <p:cNvPr id="7" name="TextBox 6"/>
+          <p:cNvSpPr txBox="1"/>
+          <p:nvPr/>
+        </p:nvSpPr>
+        <p:spPr>
+          <a:xfrm>
+            <a:off x="457200" y="4727448"/>
+            <a:ext cx="5943600" cy="365760"/>
+          </a:xfrm>
+          <a:prstGeom prst="rect">
+            <a:avLst/>
+          </a:prstGeom>
+          <a:noFill/>
+        </p:spPr>
+        <p:txBody>
+          <a:bodyPr wrap="none">
+            <a:spAutoFit/>
+          </a:bodyPr>
+          <a:lstStyle/>
+          <a:p>
+            <a:pPr>
+              <a:defRPr sz="1100">
+                <a:solidFill>
+                  <a:srgbClr val="FFFFFF"/>
+                </a:solidFill>
+                <a:latin typeface="Calibri"/>
+              </a:defRPr>
+            </a:pPr>
+            <a:r>
+              <a:t>Crime Hotspots Prediction  |  DATAMI  |  Dept. of CSE(AI)</a:t>
+            </a:r>
+          </a:p>
+        </p:txBody>
+      </p:sp>
+      <p:sp>
+        <p:nvSpPr>
+          <p:cNvPr id="8" name="TextBox 7"/>
+          <p:cNvSpPr txBox="1"/>
+          <p:nvPr/>
+        </p:nvSpPr>
+        <p:spPr>
+          <a:xfrm>
+            <a:off x="7772400" y="4727448"/>
+            <a:ext cx="914400" cy="365760"/>
+          </a:xfrm>
+          <a:prstGeom prst="rect">
+            <a:avLst/>
+          </a:prstGeom>
+          <a:noFill/>
+        </p:spPr>
+        <p:txBody>
+          <a:bodyPr wrap="none">
+            <a:spAutoFit/>
+          </a:bodyPr>
+          <a:lstStyle/>
+          <a:p>
+            <a:pPr algn="r">
+              <a:defRPr sz="1200" b="1">
+                <a:solidFill>
+                  <a:srgbClr val="FFFFFF"/>
+                </a:solidFill>
+                <a:latin typeface="Calibri"/>
+              </a:defRPr>
+            </a:pPr>
+            <a:r>
+              <a:t>17</a:t>
+            </a:r>
+          </a:p>
+        </p:txBody>
+      </p:sp>
+    </p:spTree>
+  </p:cSld>
+  <p:clrMapOvr>
+    <a:masterClrMapping/>
+  </p:clrMapOvr>
+</p:sld>
+</file>
+
+<file path=ppt/slides/slide18.xml><?xml version="1.0" encoding="utf-8"?>
+<p:sld xmlns:a="http://schemas.openxmlformats.org/drawingml/2006/main" xmlns:p="http://schemas.openxmlformats.org/presentationml/2006/main" xmlns:r="http://schemas.openxmlformats.org/officeDocument/2006/relationships">
+  <p:cSld>
+    <p:spTree>
+      <p:nvGrpSpPr>
+        <p:cNvPr id="1" name=""/>
+        <p:cNvGrpSpPr/>
+        <p:nvPr/>
+      </p:nvGrpSpPr>
+      <p:grpSpPr/>
+      <p:pic>
+        <p:nvPicPr>
+          <p:cNvPr id="2" name="Picture 1" descr="logo.png"/>
+          <p:cNvPicPr>
+            <a:picLocks noChangeAspect="1"/>
+          </p:cNvPicPr>
+          <p:nvPr/>
+        </p:nvPicPr>
+        <p:blipFill>
+          <a:blip r:embed="rId2"/>
+          <a:stretch>
+            <a:fillRect/>
+          </a:stretch>
+        </p:blipFill>
+        <p:spPr>
+          <a:xfrm>
+            <a:off x="7818120" y="164592"/>
+            <a:ext cx="1005840" cy="571293"/>
+          </a:xfrm>
+          <a:prstGeom prst="rect">
+            <a:avLst/>
+          </a:prstGeom>
+        </p:spPr>
+      </p:pic>
+      <p:sp>
+        <p:nvSpPr>
+          <p:cNvPr id="3" name="TextBox 2"/>
+          <p:cNvSpPr txBox="1"/>
+          <p:nvPr/>
+        </p:nvSpPr>
+        <p:spPr>
+          <a:xfrm>
+            <a:off x="548640" y="292608"/>
+            <a:ext cx="7132320" cy="685800"/>
+          </a:xfrm>
+          <a:prstGeom prst="rect">
+            <a:avLst/>
+          </a:prstGeom>
+          <a:noFill/>
+        </p:spPr>
+        <p:txBody>
+          <a:bodyPr wrap="square">
+            <a:spAutoFit/>
+          </a:bodyPr>
+          <a:lstStyle/>
+          <a:p>
+            <a:pPr>
+              <a:defRPr sz="2200" b="1">
+                <a:solidFill>
+                  <a:srgbClr val="0F172A"/>
+                </a:solidFill>
+                <a:latin typeface="Calibri"/>
+              </a:defRPr>
+            </a:pPr>
+            <a:r>
               <a:t>Technology Stack &amp; Justifications</a:t>
             </a:r>
           </a:p>
           <a:p>
             <a:pPr>
-              <a:defRPr sz="1100" b="1">
+              <a:defRPr sz="1050" b="1">
                 <a:solidFill>
                   <a:srgbClr val="CC0000"/>
                 </a:solidFill>
@@ -7520,7 +8948,7 @@
               </a:defRPr>
             </a:pPr>
             <a:r>
-              <a:t>15</a:t>
+              <a:t>18</a:t>
             </a:r>
           </a:p>
         </p:txBody>
@@ -7533,7 +8961,7 @@
 </p:sld>
 </file>
 
-<file path=ppt/slides/slide16.xml><?xml version="1.0" encoding="utf-8"?>
+<file path=ppt/slides/slide19.xml><?xml version="1.0" encoding="utf-8"?>
 <p:sld xmlns:a="http://schemas.openxmlformats.org/drawingml/2006/main" xmlns:p="http://schemas.openxmlformats.org/presentationml/2006/main" xmlns:r="http://schemas.openxmlformats.org/officeDocument/2006/relationships">
   <p:cSld>
     <p:spTree>
@@ -7575,7 +9003,7 @@
         </p:nvSpPr>
         <p:spPr>
           <a:xfrm>
-            <a:off x="548640" y="320040"/>
+            <a:off x="548640" y="292608"/>
             <a:ext cx="7132320" cy="685800"/>
           </a:xfrm>
           <a:prstGeom prst="rect">
@@ -7590,7 +9018,7 @@
           <a:lstStyle/>
           <a:p>
             <a:pPr>
-              <a:defRPr sz="2300" b="1">
+              <a:defRPr sz="2200" b="1">
                 <a:solidFill>
                   <a:srgbClr val="0F172A"/>
                 </a:solidFill>
@@ -7603,7 +9031,7 @@
           </a:p>
           <a:p>
             <a:pPr>
-              <a:defRPr sz="1100" b="1">
+              <a:defRPr sz="1050" b="1">
                 <a:solidFill>
                   <a:srgbClr val="CC0000"/>
                 </a:solidFill>
@@ -7639,7 +9067,7 @@
           <a:lstStyle/>
           <a:p>
             <a:pPr>
-              <a:defRPr sz="1400" b="1">
+              <a:defRPr sz="1350" b="1">
                 <a:solidFill>
                   <a:srgbClr val="CC0000"/>
                 </a:solidFill>
@@ -7653,9 +9081,9 @@
           <a:p>
             <a:pPr>
               <a:spcBef>
-                <a:spcPts val="300"/>
+                <a:spcPts val="200"/>
               </a:spcBef>
-              <a:defRPr sz="1200">
+              <a:defRPr sz="1150">
                 <a:solidFill>
                   <a:srgbClr val="1E293B"/>
                 </a:solidFill>
@@ -7669,9 +9097,9 @@
           <a:p>
             <a:pPr>
               <a:spcBef>
-                <a:spcPts val="300"/>
+                <a:spcPts val="200"/>
               </a:spcBef>
-              <a:defRPr sz="1200">
+              <a:defRPr sz="1150">
                 <a:solidFill>
                   <a:srgbClr val="1E293B"/>
                 </a:solidFill>
@@ -7685,9 +9113,9 @@
           <a:p>
             <a:pPr>
               <a:spcBef>
-                <a:spcPts val="300"/>
+                <a:spcPts val="200"/>
               </a:spcBef>
-              <a:defRPr sz="1200">
+              <a:defRPr sz="1150">
                 <a:solidFill>
                   <a:srgbClr val="1E293B"/>
                 </a:solidFill>
@@ -7701,9 +9129,9 @@
           <a:p>
             <a:pPr>
               <a:spcBef>
-                <a:spcPts val="300"/>
+                <a:spcPts val="200"/>
               </a:spcBef>
-              <a:defRPr sz="1200">
+              <a:defRPr sz="1150">
                 <a:solidFill>
                   <a:srgbClr val="1E293B"/>
                 </a:solidFill>
@@ -7717,9 +9145,9 @@
           <a:p>
             <a:pPr>
               <a:spcBef>
-                <a:spcPts val="1200"/>
+                <a:spcPts val="1000"/>
               </a:spcBef>
-              <a:defRPr sz="1400" b="1">
+              <a:defRPr sz="1350" b="1">
                 <a:solidFill>
                   <a:srgbClr val="0F172A"/>
                 </a:solidFill>
@@ -7733,9 +9161,9 @@
           <a:p>
             <a:pPr>
               <a:spcBef>
-                <a:spcPts val="300"/>
+                <a:spcPts val="200"/>
               </a:spcBef>
-              <a:defRPr sz="1200">
+              <a:defRPr sz="1150">
                 <a:solidFill>
                   <a:srgbClr val="1E293B"/>
                 </a:solidFill>
@@ -7749,9 +9177,9 @@
           <a:p>
             <a:pPr>
               <a:spcBef>
-                <a:spcPts val="300"/>
+                <a:spcPts val="200"/>
               </a:spcBef>
-              <a:defRPr sz="1200">
+              <a:defRPr sz="1150">
                 <a:solidFill>
                   <a:srgbClr val="1E293B"/>
                 </a:solidFill>
@@ -7765,9 +9193,9 @@
           <a:p>
             <a:pPr>
               <a:spcBef>
-                <a:spcPts val="300"/>
+                <a:spcPts val="200"/>
               </a:spcBef>
-              <a:defRPr sz="1200">
+              <a:defRPr sz="1150">
                 <a:solidFill>
                   <a:srgbClr val="1E293B"/>
                 </a:solidFill>
@@ -7890,396 +9318,7 @@
               </a:defRPr>
             </a:pPr>
             <a:r>
-              <a:t>16</a:t>
-            </a:r>
-          </a:p>
-        </p:txBody>
-      </p:sp>
-    </p:spTree>
-  </p:cSld>
-  <p:clrMapOvr>
-    <a:masterClrMapping/>
-  </p:clrMapOvr>
-</p:sld>
-</file>
-
-<file path=ppt/slides/slide17.xml><?xml version="1.0" encoding="utf-8"?>
-<p:sld xmlns:a="http://schemas.openxmlformats.org/drawingml/2006/main" xmlns:p="http://schemas.openxmlformats.org/presentationml/2006/main" xmlns:r="http://schemas.openxmlformats.org/officeDocument/2006/relationships">
-  <p:cSld>
-    <p:spTree>
-      <p:nvGrpSpPr>
-        <p:cNvPr id="1" name=""/>
-        <p:cNvGrpSpPr/>
-        <p:nvPr/>
-      </p:nvGrpSpPr>
-      <p:grpSpPr/>
-      <p:pic>
-        <p:nvPicPr>
-          <p:cNvPr id="2" name="Picture 1" descr="logo.png"/>
-          <p:cNvPicPr>
-            <a:picLocks noChangeAspect="1"/>
-          </p:cNvPicPr>
-          <p:nvPr/>
-        </p:nvPicPr>
-        <p:blipFill>
-          <a:blip r:embed="rId2"/>
-          <a:stretch>
-            <a:fillRect/>
-          </a:stretch>
-        </p:blipFill>
-        <p:spPr>
-          <a:xfrm>
-            <a:off x="7818120" y="164592"/>
-            <a:ext cx="1005840" cy="571293"/>
-          </a:xfrm>
-          <a:prstGeom prst="rect">
-            <a:avLst/>
-          </a:prstGeom>
-        </p:spPr>
-      </p:pic>
-      <p:sp>
-        <p:nvSpPr>
-          <p:cNvPr id="3" name="TextBox 2"/>
-          <p:cNvSpPr txBox="1"/>
-          <p:nvPr/>
-        </p:nvSpPr>
-        <p:spPr>
-          <a:xfrm>
-            <a:off x="548640" y="320040"/>
-            <a:ext cx="7132320" cy="685800"/>
-          </a:xfrm>
-          <a:prstGeom prst="rect">
-            <a:avLst/>
-          </a:prstGeom>
-          <a:noFill/>
-        </p:spPr>
-        <p:txBody>
-          <a:bodyPr wrap="square">
-            <a:spAutoFit/>
-          </a:bodyPr>
-          <a:lstStyle/>
-          <a:p>
-            <a:pPr>
-              <a:defRPr sz="2300" b="1">
-                <a:solidFill>
-                  <a:srgbClr val="0F172A"/>
-                </a:solidFill>
-                <a:latin typeface="Calibri"/>
-              </a:defRPr>
-            </a:pPr>
-            <a:r>
-              <a:t>References</a:t>
-            </a:r>
-          </a:p>
-          <a:p>
-            <a:pPr>
-              <a:defRPr sz="1100" b="1">
-                <a:solidFill>
-                  <a:srgbClr val="CC0000"/>
-                </a:solidFill>
-                <a:latin typeface="Calibri"/>
-              </a:defRPr>
-            </a:pPr>
-            <a:r>
-              <a:t>ACADEMIC &amp; OFFICIAL SOURCES UTILIZED DURING IMPLEMENTATION</a:t>
-            </a:r>
-          </a:p>
-        </p:txBody>
-      </p:sp>
-      <p:sp>
-        <p:nvSpPr>
-          <p:cNvPr id="4" name="TextBox 3"/>
-          <p:cNvSpPr txBox="1"/>
-          <p:nvPr/>
-        </p:nvSpPr>
-        <p:spPr>
-          <a:xfrm>
-            <a:off x="731520" y="1143000"/>
-            <a:ext cx="7680960" cy="3291840"/>
-          </a:xfrm>
-          <a:prstGeom prst="rect">
-            <a:avLst/>
-          </a:prstGeom>
-          <a:noFill/>
-        </p:spPr>
-        <p:txBody>
-          <a:bodyPr wrap="square">
-            <a:spAutoFit/>
-          </a:bodyPr>
-          <a:lstStyle/>
-          <a:p>
-            <a:pPr>
-              <a:spcAft>
-                <a:spcPts val="400"/>
-              </a:spcAft>
-              <a:defRPr sz="1000">
-                <a:solidFill>
-                  <a:srgbClr val="1E293B"/>
-                </a:solidFill>
-                <a:latin typeface="Calibri"/>
-              </a:defRPr>
-            </a:pPr>
-            <a:r>
-              <a:t>1. Han, J., Kamber, M., &amp; Pei, J. (2011). Data Mining: Concepts and Techniques (3rd ed.). Morgan Kaufmann Publishers.</a:t>
-            </a:r>
-          </a:p>
-          <a:p>
-            <a:pPr>
-              <a:spcAft>
-                <a:spcPts val="400"/>
-              </a:spcAft>
-              <a:defRPr sz="1000">
-                <a:solidFill>
-                  <a:srgbClr val="1E293B"/>
-                </a:solidFill>
-                <a:latin typeface="Calibri"/>
-              </a:defRPr>
-            </a:pPr>
-            <a:r>
-              <a:t>2. Breiman, L., Friedman, J., Stone, C. J., &amp; Olshen, R. A. (1984). Classification and Regression Trees. Chapman &amp; Hall/CRC.</a:t>
-            </a:r>
-          </a:p>
-          <a:p>
-            <a:pPr>
-              <a:spcAft>
-                <a:spcPts val="400"/>
-              </a:spcAft>
-              <a:defRPr sz="1000">
-                <a:solidFill>
-                  <a:srgbClr val="1E293B"/>
-                </a:solidFill>
-                <a:latin typeface="Calibri"/>
-              </a:defRPr>
-            </a:pPr>
-            <a:r>
-              <a:t>3. Kerala Police Department. (2024). Police Station Crime Statistics Portal. https://ps.keralapolice.gov.in</a:t>
-            </a:r>
-          </a:p>
-          <a:p>
-            <a:pPr>
-              <a:spcAft>
-                <a:spcPts val="400"/>
-              </a:spcAft>
-              <a:defRPr sz="1000">
-                <a:solidFill>
-                  <a:srgbClr val="1E293B"/>
-                </a:solidFill>
-                <a:latin typeface="Calibri"/>
-              </a:defRPr>
-            </a:pPr>
-            <a:r>
-              <a:t>4. Kochi City Police Commissionerate. (2024). Crime Overview and Administrative Records. https://kochicity.keralapolice.gov.in</a:t>
-            </a:r>
-          </a:p>
-          <a:p>
-            <a:pPr>
-              <a:spcAft>
-                <a:spcPts val="400"/>
-              </a:spcAft>
-              <a:defRPr sz="1000">
-                <a:solidFill>
-                  <a:srgbClr val="1E293B"/>
-                </a:solidFill>
-                <a:latin typeface="Calibri"/>
-              </a:defRPr>
-            </a:pPr>
-            <a:r>
-              <a:t>5. National Crime Records Bureau (NCRB). (2022). Crime in India 2022. Ministry of Home Affairs, Government of India.</a:t>
-            </a:r>
-          </a:p>
-          <a:p>
-            <a:pPr>
-              <a:spcAft>
-                <a:spcPts val="400"/>
-              </a:spcAft>
-              <a:defRPr sz="1000">
-                <a:solidFill>
-                  <a:srgbClr val="1E293B"/>
-                </a:solidFill>
-                <a:latin typeface="Calibri"/>
-              </a:defRPr>
-            </a:pPr>
-            <a:r>
-              <a:t>6. United Nations Department of Economic and Social Affairs. (2015). Sustainable Development Goals (SDG 16, SDG 11, SDG 9).</a:t>
-            </a:r>
-          </a:p>
-          <a:p>
-            <a:pPr>
-              <a:spcAft>
-                <a:spcPts val="400"/>
-              </a:spcAft>
-              <a:defRPr sz="1000">
-                <a:solidFill>
-                  <a:srgbClr val="1E293B"/>
-                </a:solidFill>
-                <a:latin typeface="Calibri"/>
-              </a:defRPr>
-            </a:pPr>
-            <a:r>
-              <a:t>7. Chainey, S., &amp; Ratcliffe, J. (2005). GIS and Crime Mapping. John Wiley &amp; Sons.</a:t>
-            </a:r>
-          </a:p>
-          <a:p>
-            <a:pPr>
-              <a:spcAft>
-                <a:spcPts val="400"/>
-              </a:spcAft>
-              <a:defRPr sz="1000">
-                <a:solidFill>
-                  <a:srgbClr val="1E293B"/>
-                </a:solidFill>
-                <a:latin typeface="Calibri"/>
-              </a:defRPr>
-            </a:pPr>
-            <a:r>
-              <a:t>8. Pedregosa, F., et al. (2011). Scikit-learn: Machine Learning in Python. Journal of Machine Learning Research, 12, 2825-2830.</a:t>
-            </a:r>
-          </a:p>
-          <a:p>
-            <a:pPr>
-              <a:spcAft>
-                <a:spcPts val="400"/>
-              </a:spcAft>
-              <a:defRPr sz="1000">
-                <a:solidFill>
-                  <a:srgbClr val="1E293B"/>
-                </a:solidFill>
-                <a:latin typeface="Calibri"/>
-              </a:defRPr>
-            </a:pPr>
-            <a:r>
-              <a:t>9. Tiarks, E., et al. (2021). Explainable Machine Learning for Predictive Policing: Accountability and Interpretability. AI and Law.</a:t>
-            </a:r>
-          </a:p>
-          <a:p>
-            <a:pPr>
-              <a:spcAft>
-                <a:spcPts val="400"/>
-              </a:spcAft>
-              <a:defRPr sz="1000">
-                <a:solidFill>
-                  <a:srgbClr val="1E293B"/>
-                </a:solidFill>
-                <a:latin typeface="Calibri"/>
-              </a:defRPr>
-            </a:pPr>
-            <a:r>
-              <a:t>10. OpenStreetMap Contributors. (2024). OpenStreetMap Spatial Data &amp; Tiles. https://www.openstreetmap.org</a:t>
-            </a:r>
-          </a:p>
-        </p:txBody>
-      </p:sp>
-      <p:sp>
-        <p:nvSpPr>
-          <p:cNvPr id="5" name="Rectangle 4"/>
-          <p:cNvSpPr/>
-          <p:nvPr/>
-        </p:nvSpPr>
-        <p:spPr>
-          <a:xfrm>
-            <a:off x="0" y="4709160"/>
-            <a:ext cx="9144000" cy="438912"/>
-          </a:xfrm>
-          <a:prstGeom prst="rect">
-            <a:avLst/>
-          </a:prstGeom>
-          <a:solidFill>
-            <a:srgbClr val="CC0000"/>
-          </a:solidFill>
-          <a:ln>
-            <a:noFill/>
-          </a:ln>
-        </p:spPr>
-        <p:style>
-          <a:lnRef idx="1">
-            <a:schemeClr val="accent1"/>
-          </a:lnRef>
-          <a:fillRef idx="3">
-            <a:schemeClr val="accent1"/>
-          </a:fillRef>
-          <a:effectRef idx="2">
-            <a:schemeClr val="accent1"/>
-          </a:effectRef>
-          <a:fontRef idx="minor">
-            <a:schemeClr val="lt1"/>
-          </a:fontRef>
-        </p:style>
-        <p:txBody>
-          <a:bodyPr rtlCol="0" anchor="ctr"/>
-          <a:lstStyle/>
-          <a:p>
-            <a:pPr algn="ctr"/>
-          </a:p>
-        </p:txBody>
-      </p:sp>
-      <p:sp>
-        <p:nvSpPr>
-          <p:cNvPr id="6" name="TextBox 5"/>
-          <p:cNvSpPr txBox="1"/>
-          <p:nvPr/>
-        </p:nvSpPr>
-        <p:spPr>
-          <a:xfrm>
-            <a:off x="457200" y="4727448"/>
-            <a:ext cx="5943600" cy="365760"/>
-          </a:xfrm>
-          <a:prstGeom prst="rect">
-            <a:avLst/>
-          </a:prstGeom>
-          <a:noFill/>
-        </p:spPr>
-        <p:txBody>
-          <a:bodyPr wrap="none">
-            <a:spAutoFit/>
-          </a:bodyPr>
-          <a:lstStyle/>
-          <a:p>
-            <a:pPr>
-              <a:defRPr sz="1100">
-                <a:solidFill>
-                  <a:srgbClr val="FFFFFF"/>
-                </a:solidFill>
-                <a:latin typeface="Calibri"/>
-              </a:defRPr>
-            </a:pPr>
-            <a:r>
-              <a:t>Crime Hotspots Prediction  |  DATAMI  |  Dept. of CSE(AI)</a:t>
-            </a:r>
-          </a:p>
-        </p:txBody>
-      </p:sp>
-      <p:sp>
-        <p:nvSpPr>
-          <p:cNvPr id="7" name="TextBox 6"/>
-          <p:cNvSpPr txBox="1"/>
-          <p:nvPr/>
-        </p:nvSpPr>
-        <p:spPr>
-          <a:xfrm>
-            <a:off x="7772400" y="4727448"/>
-            <a:ext cx="914400" cy="365760"/>
-          </a:xfrm>
-          <a:prstGeom prst="rect">
-            <a:avLst/>
-          </a:prstGeom>
-          <a:noFill/>
-        </p:spPr>
-        <p:txBody>
-          <a:bodyPr wrap="none">
-            <a:spAutoFit/>
-          </a:bodyPr>
-          <a:lstStyle/>
-          <a:p>
-            <a:pPr algn="r">
-              <a:defRPr sz="1200" b="1">
-                <a:solidFill>
-                  <a:srgbClr val="FFFFFF"/>
-                </a:solidFill>
-                <a:latin typeface="Calibri"/>
-              </a:defRPr>
-            </a:pPr>
-            <a:r>
-              <a:t>17</a:t>
+              <a:t>19</a:t>
             </a:r>
           </a:p>
         </p:txBody>
@@ -8334,7 +9373,7 @@
         </p:nvSpPr>
         <p:spPr>
           <a:xfrm>
-            <a:off x="548640" y="320040"/>
+            <a:off x="548640" y="292608"/>
             <a:ext cx="7132320" cy="685800"/>
           </a:xfrm>
           <a:prstGeom prst="rect">
@@ -8349,7 +9388,7 @@
           <a:lstStyle/>
           <a:p>
             <a:pPr>
-              <a:defRPr sz="2300" b="1">
+              <a:defRPr sz="2200" b="1">
                 <a:solidFill>
                   <a:srgbClr val="0F172A"/>
                 </a:solidFill>
@@ -8362,7 +9401,7 @@
           </a:p>
           <a:p>
             <a:pPr>
-              <a:defRPr sz="1100" b="1">
+              <a:defRPr sz="1050" b="1">
                 <a:solidFill>
                   <a:srgbClr val="CC0000"/>
                 </a:solidFill>
@@ -8383,8 +9422,8 @@
         </p:nvSpPr>
         <p:spPr>
           <a:xfrm>
-            <a:off x="731520" y="1188720"/>
-            <a:ext cx="3931920" cy="3291840"/>
+            <a:off x="731520" y="1115568"/>
+            <a:ext cx="3931920" cy="3429000"/>
           </a:xfrm>
           <a:prstGeom prst="rect">
             <a:avLst/>
@@ -8399,9 +9438,9 @@
           <a:p>
             <a:pPr>
               <a:spcAft>
-                <a:spcPts val="700"/>
+                <a:spcPts val="400"/>
               </a:spcAft>
-              <a:defRPr sz="1250" b="1">
+              <a:defRPr sz="1100" b="1">
                 <a:solidFill>
                   <a:srgbClr val="0F172A"/>
                 </a:solidFill>
@@ -8415,9 +9454,9 @@
           <a:p>
             <a:pPr>
               <a:spcAft>
-                <a:spcPts val="700"/>
+                <a:spcPts val="400"/>
               </a:spcAft>
-              <a:defRPr sz="1250" b="1">
+              <a:defRPr sz="1100" b="1">
                 <a:solidFill>
                   <a:srgbClr val="0F172A"/>
                 </a:solidFill>
@@ -8425,15 +9464,15 @@
               </a:defRPr>
             </a:pPr>
             <a:r>
-              <a:t>02. UN Sustainable Development Goals (SDGs)</a:t>
+              <a:t>02. Syllabus Course Outcomes (CO) Mapping</a:t>
             </a:r>
           </a:p>
           <a:p>
             <a:pPr>
               <a:spcAft>
-                <a:spcPts val="700"/>
+                <a:spcPts val="400"/>
               </a:spcAft>
-              <a:defRPr sz="1250" b="1">
+              <a:defRPr sz="1100" b="1">
                 <a:solidFill>
                   <a:srgbClr val="0F172A"/>
                 </a:solidFill>
@@ -8441,15 +9480,15 @@
               </a:defRPr>
             </a:pPr>
             <a:r>
-              <a:t>03. Project Objectives</a:t>
+              <a:t>03. UN Sustainable Development Goals (SDGs)</a:t>
             </a:r>
           </a:p>
           <a:p>
             <a:pPr>
               <a:spcAft>
-                <a:spcPts val="700"/>
+                <a:spcPts val="400"/>
               </a:spcAft>
-              <a:defRPr sz="1250" b="1">
+              <a:defRPr sz="1100" b="1">
                 <a:solidFill>
                   <a:srgbClr val="0F172A"/>
                 </a:solidFill>
@@ -8457,15 +9496,15 @@
               </a:defRPr>
             </a:pPr>
             <a:r>
-              <a:t>04. End-to-End Processing Workflow</a:t>
+              <a:t>04. Formal Engineering Objectives</a:t>
             </a:r>
           </a:p>
           <a:p>
             <a:pPr>
               <a:spcAft>
-                <a:spcPts val="700"/>
+                <a:spcPts val="400"/>
               </a:spcAft>
-              <a:defRPr sz="1250" b="1">
+              <a:defRPr sz="1100" b="1">
                 <a:solidFill>
                   <a:srgbClr val="0F172A"/>
                 </a:solidFill>
@@ -8473,15 +9512,15 @@
               </a:defRPr>
             </a:pPr>
             <a:r>
-              <a:t>05. Data Extraction &amp; Preprocessing</a:t>
+              <a:t>05. End-to-End Processing Workflow</a:t>
             </a:r>
           </a:p>
           <a:p>
             <a:pPr>
               <a:spcAft>
-                <a:spcPts val="700"/>
+                <a:spcPts val="400"/>
               </a:spcAft>
-              <a:defRPr sz="1250" b="1">
+              <a:defRPr sz="1100" b="1">
                 <a:solidFill>
                   <a:srgbClr val="0F172A"/>
                 </a:solidFill>
@@ -8489,15 +9528,15 @@
               </a:defRPr>
             </a:pPr>
             <a:r>
-              <a:t>06. Multidimensional OLAP Warehousing</a:t>
+              <a:t>06. Step 1: Data Extraction &amp; Harvesting</a:t>
             </a:r>
           </a:p>
           <a:p>
             <a:pPr>
               <a:spcAft>
-                <a:spcPts val="700"/>
+                <a:spcPts val="400"/>
               </a:spcAft>
-              <a:defRPr sz="1250" b="1">
+              <a:defRPr sz="1100" b="1">
                 <a:solidFill>
                   <a:srgbClr val="0F172A"/>
                 </a:solidFill>
@@ -8505,15 +9544,15 @@
               </a:defRPr>
             </a:pPr>
             <a:r>
-              <a:t>07. Feature Engineering &amp; Importance</a:t>
+              <a:t>07. Step 2: Cleaning, Normalization &amp; Taxonomy</a:t>
             </a:r>
           </a:p>
           <a:p>
             <a:pPr>
               <a:spcAft>
-                <a:spcPts val="700"/>
+                <a:spcPts val="400"/>
               </a:spcAft>
-              <a:defRPr sz="1250" b="1">
+              <a:defRPr sz="1100" b="1">
                 <a:solidFill>
                   <a:srgbClr val="0F172A"/>
                 </a:solidFill>
@@ -8521,7 +9560,23 @@
               </a:defRPr>
             </a:pPr>
             <a:r>
-              <a:t>08. CART Decision Tree Induction</a:t>
+              <a:t>08. Step 3A: Fact Table Schema &amp; Storage</a:t>
+            </a:r>
+          </a:p>
+          <a:p>
+            <a:pPr>
+              <a:spcAft>
+                <a:spcPts val="400"/>
+              </a:spcAft>
+              <a:defRPr sz="1100" b="1">
+                <a:solidFill>
+                  <a:srgbClr val="0F172A"/>
+                </a:solidFill>
+                <a:latin typeface="Calibri"/>
+              </a:defRPr>
+            </a:pPr>
+            <a:r>
+              <a:t>09. Step 3B: OLAP Operations &amp; Data Cubes</a:t>
             </a:r>
           </a:p>
         </p:txBody>
@@ -8534,8 +9589,8 @@
         </p:nvSpPr>
         <p:spPr>
           <a:xfrm>
-            <a:off x="4846320" y="1188720"/>
-            <a:ext cx="4023360" cy="3291840"/>
+            <a:off x="4846320" y="1115568"/>
+            <a:ext cx="4023360" cy="3429000"/>
           </a:xfrm>
           <a:prstGeom prst="rect">
             <a:avLst/>
@@ -8550,9 +9605,9 @@
           <a:p>
             <a:pPr>
               <a:spcAft>
-                <a:spcPts val="700"/>
+                <a:spcPts val="400"/>
               </a:spcAft>
-              <a:defRPr sz="1250" b="1">
+              <a:defRPr sz="1100" b="1">
                 <a:solidFill>
                   <a:srgbClr val="0F172A"/>
                 </a:solidFill>
@@ -8560,15 +9615,15 @@
               </a:defRPr>
             </a:pPr>
             <a:r>
-              <a:t>09. Crime Spree &amp; Staffing Simulator</a:t>
+              <a:t>10. Step 4A: Feature Engineering &amp; Predictors</a:t>
             </a:r>
           </a:p>
           <a:p>
             <a:pPr>
               <a:spcAft>
-                <a:spcPts val="700"/>
+                <a:spcPts val="400"/>
               </a:spcAft>
-              <a:defRPr sz="1250" b="1">
+              <a:defRPr sz="1100" b="1">
                 <a:solidFill>
                   <a:srgbClr val="0F172A"/>
                 </a:solidFill>
@@ -8576,15 +9631,15 @@
               </a:defRPr>
             </a:pPr>
             <a:r>
-              <a:t>10. Model Evaluation &amp; Confusion Matrix</a:t>
+              <a:t>11. Step 4B: Supervised CART Decision Tree</a:t>
             </a:r>
           </a:p>
           <a:p>
             <a:pPr>
               <a:spcAft>
-                <a:spcPts val="700"/>
+                <a:spcPts val="400"/>
               </a:spcAft>
-              <a:defRPr sz="1250" b="1">
+              <a:defRPr sz="1100" b="1">
                 <a:solidFill>
                   <a:srgbClr val="0F172A"/>
                 </a:solidFill>
@@ -8592,15 +9647,15 @@
               </a:defRPr>
             </a:pPr>
             <a:r>
-              <a:t>11. Operational Findings &amp; Policy Impact</a:t>
+              <a:t>12. Step 4C: Crime Spree &amp; Staffing Simulator</a:t>
             </a:r>
           </a:p>
           <a:p>
             <a:pPr>
               <a:spcAft>
-                <a:spcPts val="700"/>
+                <a:spcPts val="400"/>
               </a:spcAft>
-              <a:defRPr sz="1250" b="1">
+              <a:defRPr sz="1100" b="1">
                 <a:solidFill>
                   <a:srgbClr val="0F172A"/>
                 </a:solidFill>
@@ -8608,15 +9663,15 @@
               </a:defRPr>
             </a:pPr>
             <a:r>
-              <a:t>12. Live Geospatial Interface &amp; Cartography</a:t>
+              <a:t>13. Step 4D: Model Evaluation &amp; Confusion Matrix</a:t>
             </a:r>
           </a:p>
           <a:p>
             <a:pPr>
               <a:spcAft>
-                <a:spcPts val="700"/>
+                <a:spcPts val="400"/>
               </a:spcAft>
-              <a:defRPr sz="1250" b="1">
+              <a:defRPr sz="1100" b="1">
                 <a:solidFill>
                   <a:srgbClr val="0F172A"/>
                 </a:solidFill>
@@ -8624,15 +9679,15 @@
               </a:defRPr>
             </a:pPr>
             <a:r>
-              <a:t>13. Technology Stack &amp; Justifications</a:t>
+              <a:t>14. Operational Findings &amp; Policy Impact</a:t>
             </a:r>
           </a:p>
           <a:p>
             <a:pPr>
               <a:spcAft>
-                <a:spcPts val="700"/>
+                <a:spcPts val="400"/>
               </a:spcAft>
-              <a:defRPr sz="1250" b="1">
+              <a:defRPr sz="1100" b="1">
                 <a:solidFill>
                   <a:srgbClr val="0F172A"/>
                 </a:solidFill>
@@ -8640,15 +9695,15 @@
               </a:defRPr>
             </a:pPr>
             <a:r>
-              <a:t>14. Conclusion &amp; Future Scope</a:t>
+              <a:t>15. Step 5: Live Geospatial Interface</a:t>
             </a:r>
           </a:p>
           <a:p>
             <a:pPr>
               <a:spcAft>
-                <a:spcPts val="700"/>
+                <a:spcPts val="400"/>
               </a:spcAft>
-              <a:defRPr sz="1250" b="1">
+              <a:defRPr sz="1100" b="1">
                 <a:solidFill>
                   <a:srgbClr val="0F172A"/>
                 </a:solidFill>
@@ -8656,7 +9711,39 @@
               </a:defRPr>
             </a:pPr>
             <a:r>
-              <a:t>15. Academic &amp; Official References</a:t>
+              <a:t>16. Technology Stack &amp; Justifications</a:t>
+            </a:r>
+          </a:p>
+          <a:p>
+            <a:pPr>
+              <a:spcAft>
+                <a:spcPts val="400"/>
+              </a:spcAft>
+              <a:defRPr sz="1100" b="1">
+                <a:solidFill>
+                  <a:srgbClr val="0F172A"/>
+                </a:solidFill>
+                <a:latin typeface="Calibri"/>
+              </a:defRPr>
+            </a:pPr>
+            <a:r>
+              <a:t>17. Conclusion &amp; Future Scope</a:t>
+            </a:r>
+          </a:p>
+          <a:p>
+            <a:pPr>
+              <a:spcAft>
+                <a:spcPts val="400"/>
+              </a:spcAft>
+              <a:defRPr sz="1100" b="1">
+                <a:solidFill>
+                  <a:srgbClr val="0F172A"/>
+                </a:solidFill>
+                <a:latin typeface="Calibri"/>
+              </a:defRPr>
+            </a:pPr>
+            <a:r>
+              <a:t>18. Academic &amp; Official References</a:t>
             </a:r>
           </a:p>
         </p:txBody>
@@ -8772,6 +9859,395 @@
             </a:pPr>
             <a:r>
               <a:t>2</a:t>
+            </a:r>
+          </a:p>
+        </p:txBody>
+      </p:sp>
+    </p:spTree>
+  </p:cSld>
+  <p:clrMapOvr>
+    <a:masterClrMapping/>
+  </p:clrMapOvr>
+</p:sld>
+</file>
+
+<file path=ppt/slides/slide20.xml><?xml version="1.0" encoding="utf-8"?>
+<p:sld xmlns:a="http://schemas.openxmlformats.org/drawingml/2006/main" xmlns:p="http://schemas.openxmlformats.org/presentationml/2006/main" xmlns:r="http://schemas.openxmlformats.org/officeDocument/2006/relationships">
+  <p:cSld>
+    <p:spTree>
+      <p:nvGrpSpPr>
+        <p:cNvPr id="1" name=""/>
+        <p:cNvGrpSpPr/>
+        <p:nvPr/>
+      </p:nvGrpSpPr>
+      <p:grpSpPr/>
+      <p:pic>
+        <p:nvPicPr>
+          <p:cNvPr id="2" name="Picture 1" descr="logo.png"/>
+          <p:cNvPicPr>
+            <a:picLocks noChangeAspect="1"/>
+          </p:cNvPicPr>
+          <p:nvPr/>
+        </p:nvPicPr>
+        <p:blipFill>
+          <a:blip r:embed="rId2"/>
+          <a:stretch>
+            <a:fillRect/>
+          </a:stretch>
+        </p:blipFill>
+        <p:spPr>
+          <a:xfrm>
+            <a:off x="7818120" y="164592"/>
+            <a:ext cx="1005840" cy="571293"/>
+          </a:xfrm>
+          <a:prstGeom prst="rect">
+            <a:avLst/>
+          </a:prstGeom>
+        </p:spPr>
+      </p:pic>
+      <p:sp>
+        <p:nvSpPr>
+          <p:cNvPr id="3" name="TextBox 2"/>
+          <p:cNvSpPr txBox="1"/>
+          <p:nvPr/>
+        </p:nvSpPr>
+        <p:spPr>
+          <a:xfrm>
+            <a:off x="548640" y="292608"/>
+            <a:ext cx="7132320" cy="685800"/>
+          </a:xfrm>
+          <a:prstGeom prst="rect">
+            <a:avLst/>
+          </a:prstGeom>
+          <a:noFill/>
+        </p:spPr>
+        <p:txBody>
+          <a:bodyPr wrap="square">
+            <a:spAutoFit/>
+          </a:bodyPr>
+          <a:lstStyle/>
+          <a:p>
+            <a:pPr>
+              <a:defRPr sz="2200" b="1">
+                <a:solidFill>
+                  <a:srgbClr val="0F172A"/>
+                </a:solidFill>
+                <a:latin typeface="Calibri"/>
+              </a:defRPr>
+            </a:pPr>
+            <a:r>
+              <a:t>References</a:t>
+            </a:r>
+          </a:p>
+          <a:p>
+            <a:pPr>
+              <a:defRPr sz="1050" b="1">
+                <a:solidFill>
+                  <a:srgbClr val="CC0000"/>
+                </a:solidFill>
+                <a:latin typeface="Calibri"/>
+              </a:defRPr>
+            </a:pPr>
+            <a:r>
+              <a:t>ACADEMIC &amp; OFFICIAL SOURCES UTILIZED DURING IMPLEMENTATION</a:t>
+            </a:r>
+          </a:p>
+        </p:txBody>
+      </p:sp>
+      <p:sp>
+        <p:nvSpPr>
+          <p:cNvPr id="4" name="TextBox 3"/>
+          <p:cNvSpPr txBox="1"/>
+          <p:nvPr/>
+        </p:nvSpPr>
+        <p:spPr>
+          <a:xfrm>
+            <a:off x="731520" y="1143000"/>
+            <a:ext cx="7680960" cy="3291840"/>
+          </a:xfrm>
+          <a:prstGeom prst="rect">
+            <a:avLst/>
+          </a:prstGeom>
+          <a:noFill/>
+        </p:spPr>
+        <p:txBody>
+          <a:bodyPr wrap="square">
+            <a:spAutoFit/>
+          </a:bodyPr>
+          <a:lstStyle/>
+          <a:p>
+            <a:pPr>
+              <a:spcAft>
+                <a:spcPts val="300"/>
+              </a:spcAft>
+              <a:defRPr sz="950">
+                <a:solidFill>
+                  <a:srgbClr val="1E293B"/>
+                </a:solidFill>
+                <a:latin typeface="Calibri"/>
+              </a:defRPr>
+            </a:pPr>
+            <a:r>
+              <a:t>1. Han, J., Kamber, M., &amp; Pei, J. (2011). Data Mining: Concepts and Techniques (3rd ed.). Morgan Kaufmann Publishers.</a:t>
+            </a:r>
+          </a:p>
+          <a:p>
+            <a:pPr>
+              <a:spcAft>
+                <a:spcPts val="300"/>
+              </a:spcAft>
+              <a:defRPr sz="950">
+                <a:solidFill>
+                  <a:srgbClr val="1E293B"/>
+                </a:solidFill>
+                <a:latin typeface="Calibri"/>
+              </a:defRPr>
+            </a:pPr>
+            <a:r>
+              <a:t>2. Breiman, L., Friedman, J., Stone, C. J., &amp; Olshen, R. A. (1984). Classification and Regression Trees. Chapman &amp; Hall/CRC.</a:t>
+            </a:r>
+          </a:p>
+          <a:p>
+            <a:pPr>
+              <a:spcAft>
+                <a:spcPts val="300"/>
+              </a:spcAft>
+              <a:defRPr sz="950">
+                <a:solidFill>
+                  <a:srgbClr val="1E293B"/>
+                </a:solidFill>
+                <a:latin typeface="Calibri"/>
+              </a:defRPr>
+            </a:pPr>
+            <a:r>
+              <a:t>3. Kerala Police Department. (2024). Police Station Crime Statistics Portal. https://ps.keralapolice.gov.in</a:t>
+            </a:r>
+          </a:p>
+          <a:p>
+            <a:pPr>
+              <a:spcAft>
+                <a:spcPts val="300"/>
+              </a:spcAft>
+              <a:defRPr sz="950">
+                <a:solidFill>
+                  <a:srgbClr val="1E293B"/>
+                </a:solidFill>
+                <a:latin typeface="Calibri"/>
+              </a:defRPr>
+            </a:pPr>
+            <a:r>
+              <a:t>4. Kochi City Police Commissionerate. (2024). Crime Overview and Administrative Records. https://kochicity.keralapolice.gov.in</a:t>
+            </a:r>
+          </a:p>
+          <a:p>
+            <a:pPr>
+              <a:spcAft>
+                <a:spcPts val="300"/>
+              </a:spcAft>
+              <a:defRPr sz="950">
+                <a:solidFill>
+                  <a:srgbClr val="1E293B"/>
+                </a:solidFill>
+                <a:latin typeface="Calibri"/>
+              </a:defRPr>
+            </a:pPr>
+            <a:r>
+              <a:t>5. National Crime Records Bureau (NCRB). (2022). Crime in India 2022. Ministry of Home Affairs, Government of India.</a:t>
+            </a:r>
+          </a:p>
+          <a:p>
+            <a:pPr>
+              <a:spcAft>
+                <a:spcPts val="300"/>
+              </a:spcAft>
+              <a:defRPr sz="950">
+                <a:solidFill>
+                  <a:srgbClr val="1E293B"/>
+                </a:solidFill>
+                <a:latin typeface="Calibri"/>
+              </a:defRPr>
+            </a:pPr>
+            <a:r>
+              <a:t>6. United Nations Department of Economic and Social Affairs. (2015). Sustainable Development Goals (SDG 16, SDG 11, SDG 9).</a:t>
+            </a:r>
+          </a:p>
+          <a:p>
+            <a:pPr>
+              <a:spcAft>
+                <a:spcPts val="300"/>
+              </a:spcAft>
+              <a:defRPr sz="950">
+                <a:solidFill>
+                  <a:srgbClr val="1E293B"/>
+                </a:solidFill>
+                <a:latin typeface="Calibri"/>
+              </a:defRPr>
+            </a:pPr>
+            <a:r>
+              <a:t>7. Chainey, S., &amp; Ratcliffe, J. (2005). GIS and Crime Mapping. John Wiley &amp; Sons.</a:t>
+            </a:r>
+          </a:p>
+          <a:p>
+            <a:pPr>
+              <a:spcAft>
+                <a:spcPts val="300"/>
+              </a:spcAft>
+              <a:defRPr sz="950">
+                <a:solidFill>
+                  <a:srgbClr val="1E293B"/>
+                </a:solidFill>
+                <a:latin typeface="Calibri"/>
+              </a:defRPr>
+            </a:pPr>
+            <a:r>
+              <a:t>8. Pedregosa, F., et al. (2011). Scikit-learn: Machine Learning in Python. Journal of Machine Learning Research, 12, 2825-2830.</a:t>
+            </a:r>
+          </a:p>
+          <a:p>
+            <a:pPr>
+              <a:spcAft>
+                <a:spcPts val="300"/>
+              </a:spcAft>
+              <a:defRPr sz="950">
+                <a:solidFill>
+                  <a:srgbClr val="1E293B"/>
+                </a:solidFill>
+                <a:latin typeface="Calibri"/>
+              </a:defRPr>
+            </a:pPr>
+            <a:r>
+              <a:t>9. Tiarks, E., et al. (2021). Explainable Machine Learning for Predictive Policing: Accountability and Interpretability. AI and Law.</a:t>
+            </a:r>
+          </a:p>
+          <a:p>
+            <a:pPr>
+              <a:spcAft>
+                <a:spcPts val="300"/>
+              </a:spcAft>
+              <a:defRPr sz="950">
+                <a:solidFill>
+                  <a:srgbClr val="1E293B"/>
+                </a:solidFill>
+                <a:latin typeface="Calibri"/>
+              </a:defRPr>
+            </a:pPr>
+            <a:r>
+              <a:t>10. OpenStreetMap Contributors. (2024). OpenStreetMap Spatial Data &amp; Tiles. https://www.openstreetmap.org</a:t>
+            </a:r>
+          </a:p>
+        </p:txBody>
+      </p:sp>
+      <p:sp>
+        <p:nvSpPr>
+          <p:cNvPr id="5" name="Rectangle 4"/>
+          <p:cNvSpPr/>
+          <p:nvPr/>
+        </p:nvSpPr>
+        <p:spPr>
+          <a:xfrm>
+            <a:off x="0" y="4709160"/>
+            <a:ext cx="9144000" cy="438912"/>
+          </a:xfrm>
+          <a:prstGeom prst="rect">
+            <a:avLst/>
+          </a:prstGeom>
+          <a:solidFill>
+            <a:srgbClr val="CC0000"/>
+          </a:solidFill>
+          <a:ln>
+            <a:noFill/>
+          </a:ln>
+        </p:spPr>
+        <p:style>
+          <a:lnRef idx="1">
+            <a:schemeClr val="accent1"/>
+          </a:lnRef>
+          <a:fillRef idx="3">
+            <a:schemeClr val="accent1"/>
+          </a:fillRef>
+          <a:effectRef idx="2">
+            <a:schemeClr val="accent1"/>
+          </a:effectRef>
+          <a:fontRef idx="minor">
+            <a:schemeClr val="lt1"/>
+          </a:fontRef>
+        </p:style>
+        <p:txBody>
+          <a:bodyPr rtlCol="0" anchor="ctr"/>
+          <a:lstStyle/>
+          <a:p>
+            <a:pPr algn="ctr"/>
+          </a:p>
+        </p:txBody>
+      </p:sp>
+      <p:sp>
+        <p:nvSpPr>
+          <p:cNvPr id="6" name="TextBox 5"/>
+          <p:cNvSpPr txBox="1"/>
+          <p:nvPr/>
+        </p:nvSpPr>
+        <p:spPr>
+          <a:xfrm>
+            <a:off x="457200" y="4727448"/>
+            <a:ext cx="5943600" cy="365760"/>
+          </a:xfrm>
+          <a:prstGeom prst="rect">
+            <a:avLst/>
+          </a:prstGeom>
+          <a:noFill/>
+        </p:spPr>
+        <p:txBody>
+          <a:bodyPr wrap="none">
+            <a:spAutoFit/>
+          </a:bodyPr>
+          <a:lstStyle/>
+          <a:p>
+            <a:pPr>
+              <a:defRPr sz="1100">
+                <a:solidFill>
+                  <a:srgbClr val="FFFFFF"/>
+                </a:solidFill>
+                <a:latin typeface="Calibri"/>
+              </a:defRPr>
+            </a:pPr>
+            <a:r>
+              <a:t>Crime Hotspots Prediction  |  DATAMI  |  Dept. of CSE(AI)</a:t>
+            </a:r>
+          </a:p>
+        </p:txBody>
+      </p:sp>
+      <p:sp>
+        <p:nvSpPr>
+          <p:cNvPr id="7" name="TextBox 6"/>
+          <p:cNvSpPr txBox="1"/>
+          <p:nvPr/>
+        </p:nvSpPr>
+        <p:spPr>
+          <a:xfrm>
+            <a:off x="7772400" y="4727448"/>
+            <a:ext cx="914400" cy="365760"/>
+          </a:xfrm>
+          <a:prstGeom prst="rect">
+            <a:avLst/>
+          </a:prstGeom>
+          <a:noFill/>
+        </p:spPr>
+        <p:txBody>
+          <a:bodyPr wrap="none">
+            <a:spAutoFit/>
+          </a:bodyPr>
+          <a:lstStyle/>
+          <a:p>
+            <a:pPr algn="r">
+              <a:defRPr sz="1200" b="1">
+                <a:solidFill>
+                  <a:srgbClr val="FFFFFF"/>
+                </a:solidFill>
+                <a:latin typeface="Calibri"/>
+              </a:defRPr>
+            </a:pPr>
+            <a:r>
+              <a:t>20</a:t>
             </a:r>
           </a:p>
         </p:txBody>
@@ -8826,7 +10302,7 @@
         </p:nvSpPr>
         <p:spPr>
           <a:xfrm>
-            <a:off x="548640" y="320040"/>
+            <a:off x="548640" y="292608"/>
             <a:ext cx="7132320" cy="685800"/>
           </a:xfrm>
           <a:prstGeom prst="rect">
@@ -8841,7 +10317,7 @@
           <a:lstStyle/>
           <a:p>
             <a:pPr>
-              <a:defRPr sz="2300" b="1">
+              <a:defRPr sz="2200" b="1">
                 <a:solidFill>
                   <a:srgbClr val="0F172A"/>
                 </a:solidFill>
@@ -8854,7 +10330,7 @@
           </a:p>
           <a:p>
             <a:pPr>
-              <a:defRPr sz="1100" b="1">
+              <a:defRPr sz="1050" b="1">
                 <a:solidFill>
                   <a:srgbClr val="CC0000"/>
                 </a:solidFill>
@@ -8891,9 +10367,9 @@
           <a:p>
             <a:pPr>
               <a:lnSpc>
-                <a:spcPct val="130000"/>
+                <a:spcPct val="125000"/>
               </a:lnSpc>
-              <a:defRPr sz="1400">
+              <a:defRPr sz="1350">
                 <a:solidFill>
                   <a:srgbClr val="1E293B"/>
                 </a:solidFill>
@@ -8912,9 +10388,9 @@
           <a:p>
             <a:pPr>
               <a:spcBef>
-                <a:spcPts val="1400"/>
+                <a:spcPts val="1200"/>
               </a:spcBef>
-              <a:defRPr sz="1400" b="1">
+              <a:defRPr sz="1350" b="1">
                 <a:solidFill>
                   <a:srgbClr val="CC0000"/>
                 </a:solidFill>
@@ -8928,9 +10404,9 @@
           <a:p>
             <a:pPr>
               <a:spcBef>
-                <a:spcPts val="400"/>
+                <a:spcPts val="300"/>
               </a:spcBef>
-              <a:defRPr sz="1250">
+              <a:defRPr sz="1200">
                 <a:solidFill>
                   <a:srgbClr val="0F172A"/>
                 </a:solidFill>
@@ -8944,9 +10420,9 @@
           <a:p>
             <a:pPr>
               <a:spcBef>
-                <a:spcPts val="400"/>
+                <a:spcPts val="300"/>
               </a:spcBef>
-              <a:defRPr sz="1250">
+              <a:defRPr sz="1200">
                 <a:solidFill>
                   <a:srgbClr val="0F172A"/>
                 </a:solidFill>
@@ -8960,9 +10436,9 @@
           <a:p>
             <a:pPr>
               <a:spcBef>
-                <a:spcPts val="400"/>
+                <a:spcPts val="300"/>
               </a:spcBef>
-              <a:defRPr sz="1250">
+              <a:defRPr sz="1200">
                 <a:solidFill>
                   <a:srgbClr val="0F172A"/>
                 </a:solidFill>
@@ -9140,7 +10616,7 @@
         </p:nvSpPr>
         <p:spPr>
           <a:xfrm>
-            <a:off x="548640" y="320040"/>
+            <a:off x="548640" y="292608"/>
             <a:ext cx="7132320" cy="685800"/>
           </a:xfrm>
           <a:prstGeom prst="rect">
@@ -9155,7 +10631,7 @@
           <a:lstStyle/>
           <a:p>
             <a:pPr>
-              <a:defRPr sz="2300" b="1">
+              <a:defRPr sz="2200" b="1">
                 <a:solidFill>
                   <a:srgbClr val="0F172A"/>
                 </a:solidFill>
@@ -9163,12 +10639,12 @@
               </a:defRPr>
             </a:pPr>
             <a:r>
-              <a:t>Alignment with Sustainable Development Goals</a:t>
-            </a:r>
-          </a:p>
-          <a:p>
-            <a:pPr>
-              <a:defRPr sz="1100" b="1">
+              <a:t>Course Outcomes (CO) Mapping</a:t>
+            </a:r>
+          </a:p>
+          <a:p>
+            <a:pPr>
+              <a:defRPr sz="1050" b="1">
                 <a:solidFill>
                   <a:srgbClr val="CC0000"/>
                 </a:solidFill>
@@ -9176,226 +10652,627 @@
               </a:defRPr>
             </a:pPr>
             <a:r>
-              <a:t>UNITED NATIONS 2030 AGENDA — SDG 16, SDG 11 &amp; SDG 9</a:t>
-            </a:r>
-          </a:p>
-        </p:txBody>
-      </p:sp>
-      <p:sp>
-        <p:nvSpPr>
-          <p:cNvPr id="4" name="TextBox 3"/>
-          <p:cNvSpPr txBox="1"/>
+              <a:t>ALIGNMENT WITH KTU S5 DATA MINING SYLLABUS (PECST525)</a:t>
+            </a:r>
+          </a:p>
+        </p:txBody>
+      </p:sp>
+      <p:graphicFrame>
+        <p:nvGraphicFramePr>
+          <p:cNvPr id="4" name="Table 3"/>
+          <p:cNvGraphicFramePr>
+            <a:graphicFrameLocks noGrp="1"/>
+          </p:cNvGraphicFramePr>
           <p:nvPr/>
-        </p:nvSpPr>
-        <p:spPr>
-          <a:xfrm>
-            <a:off x="731520" y="1097280"/>
-            <a:ext cx="7680960" cy="3383280"/>
-          </a:xfrm>
-          <a:prstGeom prst="rect">
-            <a:avLst/>
-          </a:prstGeom>
-          <a:noFill/>
-        </p:spPr>
-        <p:txBody>
-          <a:bodyPr wrap="square">
-            <a:spAutoFit/>
-          </a:bodyPr>
-          <a:lstStyle/>
-          <a:p>
-            <a:pPr>
-              <a:spcBef>
-                <a:spcPts val="0"/>
-              </a:spcBef>
-              <a:defRPr sz="1300" b="1">
-                <a:solidFill>
-                  <a:srgbClr val="0284C7"/>
-                </a:solidFill>
-                <a:latin typeface="Calibri"/>
-              </a:defRPr>
-            </a:pPr>
-            <a:r>
-              <a:t>SDG 16: Peace, Justice &amp; Strong Institutions (Targets 16.1 &amp; 16.6)</a:t>
-            </a:r>
-          </a:p>
-          <a:p>
-            <a:pPr>
-              <a:spcBef>
-                <a:spcPts val="100"/>
-              </a:spcBef>
-              <a:defRPr sz="1000" i="1">
-                <a:solidFill>
-                  <a:srgbClr val="64748B"/>
-                </a:solidFill>
-                <a:latin typeface="Calibri"/>
-              </a:defRPr>
-            </a:pPr>
-            <a:r>
-              <a:t>Core Target: Significantly reduce all forms of violence; develop effective, accountable and transparent public institutions.</a:t>
-            </a:r>
-          </a:p>
-          <a:p>
-            <a:pPr>
-              <a:spcBef>
-                <a:spcPts val="200"/>
-              </a:spcBef>
-              <a:defRPr sz="1100">
-                <a:solidFill>
-                  <a:srgbClr val="1E293B"/>
-                </a:solidFill>
-                <a:latin typeface="Calibri"/>
-              </a:defRPr>
-            </a:pPr>
-            <a:r>
-              <a:t>• Transparent Patrol Resource Allocation: Replaces subjective dispatching with empirical, explainable CART Decision Tree rules that Station House Officers can legally audit and justify.</a:t>
-            </a:r>
-          </a:p>
-          <a:p>
-            <a:pPr>
-              <a:spcBef>
-                <a:spcPts val="200"/>
-              </a:spcBef>
-              <a:defRPr sz="1100">
-                <a:solidFill>
-                  <a:srgbClr val="1E293B"/>
-                </a:solidFill>
-                <a:latin typeface="Calibri"/>
-              </a:defRPr>
-            </a:pPr>
-            <a:r>
-              <a:t>• Proactive Crime Prevention: Identifies emerging high-risk jurisdictions in advance, allowing preventive patrols to de-escalate violence before incidents occur.</a:t>
-            </a:r>
-          </a:p>
-          <a:p>
-            <a:pPr>
-              <a:spcBef>
-                <a:spcPts val="800"/>
-              </a:spcBef>
-              <a:defRPr sz="1300" b="1">
-                <a:solidFill>
-                  <a:srgbClr val="D97706"/>
-                </a:solidFill>
-                <a:latin typeface="Calibri"/>
-              </a:defRPr>
-            </a:pPr>
-            <a:r>
-              <a:t>SDG 11: Sustainable Cities &amp; Communities (Target 11.7)</a:t>
-            </a:r>
-          </a:p>
-          <a:p>
-            <a:pPr>
-              <a:spcBef>
-                <a:spcPts val="100"/>
-              </a:spcBef>
-              <a:defRPr sz="1000" i="1">
-                <a:solidFill>
-                  <a:srgbClr val="64748B"/>
-                </a:solidFill>
-                <a:latin typeface="Calibri"/>
-              </a:defRPr>
-            </a:pPr>
-            <a:r>
-              <a:t>Core Target: Provide universal access to safe, inclusive and accessible green and public spaces for all citizens.</a:t>
-            </a:r>
-          </a:p>
-          <a:p>
-            <a:pPr>
-              <a:spcBef>
-                <a:spcPts val="200"/>
-              </a:spcBef>
-              <a:defRPr sz="1100">
-                <a:solidFill>
-                  <a:srgbClr val="1E293B"/>
-                </a:solidFill>
-                <a:latin typeface="Calibri"/>
-              </a:defRPr>
-            </a:pPr>
-            <a:r>
-              <a:t>• Metropolitan Cartography &amp; Hotspot Mitigation: Maps crime density across 37 stations in Kochi to safeguard commercial corridors, transit hubs, and waterfront spaces (MG Road, Marine Drive).</a:t>
-            </a:r>
-          </a:p>
-          <a:p>
-            <a:pPr>
-              <a:spcBef>
-                <a:spcPts val="200"/>
-              </a:spcBef>
-              <a:defRPr sz="1100">
-                <a:solidFill>
-                  <a:srgbClr val="1E293B"/>
-                </a:solidFill>
-                <a:latin typeface="Calibri"/>
-              </a:defRPr>
-            </a:pPr>
-            <a:r>
-              <a:t>• Surge Resilience for Urban Security: Simulates fleet readiness during sudden crime sprees, ensuring municipal police stations maintain emergency response capacity.</a:t>
-            </a:r>
-          </a:p>
-          <a:p>
-            <a:pPr>
-              <a:spcBef>
-                <a:spcPts val="800"/>
-              </a:spcBef>
-              <a:defRPr sz="1300" b="1">
-                <a:solidFill>
-                  <a:srgbClr val="059669"/>
-                </a:solidFill>
-                <a:latin typeface="Calibri"/>
-              </a:defRPr>
-            </a:pPr>
-            <a:r>
-              <a:t>SDG 9: Industry, Innovation &amp; Infrastructure (Target 9.b)</a:t>
-            </a:r>
-          </a:p>
-          <a:p>
-            <a:pPr>
-              <a:spcBef>
-                <a:spcPts val="100"/>
-              </a:spcBef>
-              <a:defRPr sz="1000" i="1">
-                <a:solidFill>
-                  <a:srgbClr val="64748B"/>
-                </a:solidFill>
-                <a:latin typeface="Calibri"/>
-              </a:defRPr>
-            </a:pPr>
-            <a:r>
-              <a:t>Core Target: Support domestic technology development, research and innovation in public infrastructure.</a:t>
-            </a:r>
-          </a:p>
-          <a:p>
-            <a:pPr>
-              <a:spcBef>
-                <a:spcPts val="200"/>
-              </a:spcBef>
-              <a:defRPr sz="1100">
-                <a:solidFill>
-                  <a:srgbClr val="1E293B"/>
-                </a:solidFill>
-                <a:latin typeface="Calibri"/>
-              </a:defRPr>
-            </a:pPr>
-            <a:r>
-              <a:t>• Open-Source Public Safety Infrastructure: Modernizes police data systems using reproducible open technologies (FastAPI, Leaflet OSM, Scikit-Learn OLAP) with zero licensing costs.</a:t>
-            </a:r>
-          </a:p>
-          <a:p>
-            <a:pPr>
-              <a:spcBef>
-                <a:spcPts val="200"/>
-              </a:spcBef>
-              <a:defRPr sz="1100">
-                <a:solidFill>
-                  <a:srgbClr val="1E293B"/>
-                </a:solidFill>
-                <a:latin typeface="Calibri"/>
-              </a:defRPr>
-            </a:pPr>
-            <a:r>
-              <a:t>• Data-Driven Institutional Transformation: Converts passive, siloed portal tables into active predictive intelligence, democratizing advanced analytics for state law enforcement.</a:t>
-            </a:r>
-          </a:p>
-        </p:txBody>
-      </p:sp>
+        </p:nvGraphicFramePr>
+        <p:xfrm>
+          <a:off x="548640" y="1097280"/>
+          <a:ext cx="8046720" cy="3383280"/>
+        </p:xfrm>
+        <a:graphic>
+          <a:graphicData uri="http://schemas.openxmlformats.org/drawingml/2006/table">
+            <a:tbl>
+              <a:tblPr firstRow="1" bandRow="1">
+                <a:tableStyleId>{5C22544A-7EE6-4342-B048-85BDC9FD1C3A}</a:tableStyleId>
+              </a:tblPr>
+              <a:tblGrid>
+                <a:gridCol w="914400"/>
+                <a:gridCol w="2926080"/>
+                <a:gridCol w="731520"/>
+                <a:gridCol w="3474720"/>
+              </a:tblGrid>
+              <a:tr h="563880">
+                <a:tc>
+                  <a:txBody>
+                    <a:bodyPr/>
+                    <a:lstStyle/>
+                    <a:p>
+                      <a:pPr>
+                        <a:defRPr b="1" sz="1000">
+                          <a:solidFill>
+                            <a:srgbClr val="FFFFFF"/>
+                          </a:solidFill>
+                          <a:latin typeface="Calibri"/>
+                        </a:defRPr>
+                      </a:pPr>
+                      <a:r>
+                        <a:t>CO Code</a:t>
+                      </a:r>
+                    </a:p>
+                  </a:txBody>
+                  <a:tcPr>
+                    <a:solidFill>
+                      <a:srgbClr val="0F172A"/>
+                    </a:solidFill>
+                  </a:tcPr>
+                </a:tc>
+                <a:tc>
+                  <a:txBody>
+                    <a:bodyPr/>
+                    <a:lstStyle/>
+                    <a:p>
+                      <a:pPr>
+                        <a:defRPr b="1" sz="1000">
+                          <a:solidFill>
+                            <a:srgbClr val="FFFFFF"/>
+                          </a:solidFill>
+                          <a:latin typeface="Calibri"/>
+                        </a:defRPr>
+                      </a:pPr>
+                      <a:r>
+                        <a:t>Course Outcome Description (Syllabus)</a:t>
+                      </a:r>
+                    </a:p>
+                  </a:txBody>
+                  <a:tcPr>
+                    <a:solidFill>
+                      <a:srgbClr val="0F172A"/>
+                    </a:solidFill>
+                  </a:tcPr>
+                </a:tc>
+                <a:tc>
+                  <a:txBody>
+                    <a:bodyPr/>
+                    <a:lstStyle/>
+                    <a:p>
+                      <a:pPr>
+                        <a:defRPr b="1" sz="1000">
+                          <a:solidFill>
+                            <a:srgbClr val="FFFFFF"/>
+                          </a:solidFill>
+                          <a:latin typeface="Calibri"/>
+                        </a:defRPr>
+                      </a:pPr>
+                      <a:r>
+                        <a:t>Level</a:t>
+                      </a:r>
+                    </a:p>
+                  </a:txBody>
+                  <a:tcPr>
+                    <a:solidFill>
+                      <a:srgbClr val="0F172A"/>
+                    </a:solidFill>
+                  </a:tcPr>
+                </a:tc>
+                <a:tc>
+                  <a:txBody>
+                    <a:bodyPr/>
+                    <a:lstStyle/>
+                    <a:p>
+                      <a:pPr>
+                        <a:defRPr b="1" sz="1000">
+                          <a:solidFill>
+                            <a:srgbClr val="FFFFFF"/>
+                          </a:solidFill>
+                          <a:latin typeface="Calibri"/>
+                        </a:defRPr>
+                      </a:pPr>
+                      <a:r>
+                        <a:t>DATAMI Project Implementation &amp; Fulfillment</a:t>
+                      </a:r>
+                    </a:p>
+                  </a:txBody>
+                  <a:tcPr>
+                    <a:solidFill>
+                      <a:srgbClr val="0F172A"/>
+                    </a:solidFill>
+                  </a:tcPr>
+                </a:tc>
+              </a:tr>
+              <a:tr h="563880">
+                <a:tc>
+                  <a:txBody>
+                    <a:bodyPr/>
+                    <a:lstStyle/>
+                    <a:p>
+                      <a:pPr>
+                        <a:defRPr sz="850" b="1">
+                          <a:solidFill>
+                            <a:srgbClr val="CC0000"/>
+                          </a:solidFill>
+                          <a:latin typeface="Calibri"/>
+                        </a:defRPr>
+                      </a:pPr>
+                      <a:r>
+                        <a:t>CO1</a:t>
+                      </a:r>
+                    </a:p>
+                  </a:txBody>
+                  <a:tcPr>
+                    <a:solidFill>
+                      <a:srgbClr val="F8FAFC"/>
+                    </a:solidFill>
+                  </a:tcPr>
+                </a:tc>
+                <a:tc>
+                  <a:txBody>
+                    <a:bodyPr/>
+                    <a:lstStyle/>
+                    <a:p>
+                      <a:pPr>
+                        <a:defRPr sz="850">
+                          <a:solidFill>
+                            <a:srgbClr val="1E293B"/>
+                          </a:solidFill>
+                          <a:latin typeface="Calibri"/>
+                        </a:defRPr>
+                      </a:pPr>
+                      <a:r>
+                        <a:t>Understand the key processes of data mining and data warehousing concepts in application domains.</a:t>
+                      </a:r>
+                    </a:p>
+                  </a:txBody>
+                  <a:tcPr>
+                    <a:solidFill>
+                      <a:srgbClr val="F8FAFC"/>
+                    </a:solidFill>
+                  </a:tcPr>
+                </a:tc>
+                <a:tc>
+                  <a:txBody>
+                    <a:bodyPr/>
+                    <a:lstStyle/>
+                    <a:p>
+                      <a:pPr>
+                        <a:defRPr sz="850" b="1">
+                          <a:solidFill>
+                            <a:srgbClr val="0284C7"/>
+                          </a:solidFill>
+                          <a:latin typeface="Calibri"/>
+                        </a:defRPr>
+                      </a:pPr>
+                      <a:r>
+                        <a:t>K2</a:t>
+                      </a:r>
+                    </a:p>
+                  </a:txBody>
+                  <a:tcPr>
+                    <a:solidFill>
+                      <a:srgbClr val="F8FAFC"/>
+                    </a:solidFill>
+                  </a:tcPr>
+                </a:tc>
+                <a:tc>
+                  <a:txBody>
+                    <a:bodyPr/>
+                    <a:lstStyle/>
+                    <a:p>
+                      <a:pPr>
+                        <a:defRPr sz="850">
+                          <a:solidFill>
+                            <a:srgbClr val="1E293B"/>
+                          </a:solidFill>
+                          <a:latin typeface="Calibri"/>
+                        </a:defRPr>
+                      </a:pPr>
+                      <a:r>
+                        <a:t>Step 1 &amp; Step 3: Ingests raw state portal tables into a multidimensional SQLite warehouse (crime_records) and executes OLAP roll-ups across 37 stations.</a:t>
+                      </a:r>
+                    </a:p>
+                  </a:txBody>
+                  <a:tcPr>
+                    <a:solidFill>
+                      <a:srgbClr val="F8FAFC"/>
+                    </a:solidFill>
+                  </a:tcPr>
+                </a:tc>
+              </a:tr>
+              <a:tr h="563880">
+                <a:tc>
+                  <a:txBody>
+                    <a:bodyPr/>
+                    <a:lstStyle/>
+                    <a:p>
+                      <a:pPr>
+                        <a:defRPr sz="850" b="1">
+                          <a:solidFill>
+                            <a:srgbClr val="CC0000"/>
+                          </a:solidFill>
+                          <a:latin typeface="Calibri"/>
+                        </a:defRPr>
+                      </a:pPr>
+                      <a:r>
+                        <a:t>CO2</a:t>
+                      </a:r>
+                    </a:p>
+                  </a:txBody>
+                  <a:tcPr>
+                    <a:solidFill>
+                      <a:srgbClr val="FFFFFF"/>
+                    </a:solidFill>
+                  </a:tcPr>
+                </a:tc>
+                <a:tc>
+                  <a:txBody>
+                    <a:bodyPr/>
+                    <a:lstStyle/>
+                    <a:p>
+                      <a:pPr>
+                        <a:defRPr sz="850">
+                          <a:solidFill>
+                            <a:srgbClr val="1E293B"/>
+                          </a:solidFill>
+                          <a:latin typeface="Calibri"/>
+                        </a:defRPr>
+                      </a:pPr>
+                      <a:r>
+                        <a:t>Apply appropriate pre-processing techniques to convert raw data into suitable format for data mining.</a:t>
+                      </a:r>
+                    </a:p>
+                  </a:txBody>
+                  <a:tcPr>
+                    <a:solidFill>
+                      <a:srgbClr val="FFFFFF"/>
+                    </a:solidFill>
+                  </a:tcPr>
+                </a:tc>
+                <a:tc>
+                  <a:txBody>
+                    <a:bodyPr/>
+                    <a:lstStyle/>
+                    <a:p>
+                      <a:pPr>
+                        <a:defRPr sz="850" b="1">
+                          <a:solidFill>
+                            <a:srgbClr val="0284C7"/>
+                          </a:solidFill>
+                          <a:latin typeface="Calibri"/>
+                        </a:defRPr>
+                      </a:pPr>
+                      <a:r>
+                        <a:t>K3</a:t>
+                      </a:r>
+                    </a:p>
+                  </a:txBody>
+                  <a:tcPr>
+                    <a:solidFill>
+                      <a:srgbClr val="FFFFFF"/>
+                    </a:solidFill>
+                  </a:tcPr>
+                </a:tc>
+                <a:tc>
+                  <a:txBody>
+                    <a:bodyPr/>
+                    <a:lstStyle/>
+                    <a:p>
+                      <a:pPr>
+                        <a:defRPr sz="850">
+                          <a:solidFill>
+                            <a:srgbClr val="1E293B"/>
+                          </a:solidFill>
+                          <a:latin typeface="Calibri"/>
+                        </a:defRPr>
+                      </a:pPr>
+                      <a:r>
+                        <a:t>Step 2: Enforces strict zero-count vs NULL policy, harmonizes station slugs, and builds 3-tier spatial and IPC/SLL legal concept hierarchies.</a:t>
+                      </a:r>
+                    </a:p>
+                  </a:txBody>
+                  <a:tcPr>
+                    <a:solidFill>
+                      <a:srgbClr val="FFFFFF"/>
+                    </a:solidFill>
+                  </a:tcPr>
+                </a:tc>
+              </a:tr>
+              <a:tr h="563880">
+                <a:tc>
+                  <a:txBody>
+                    <a:bodyPr/>
+                    <a:lstStyle/>
+                    <a:p>
+                      <a:pPr>
+                        <a:defRPr sz="850" b="1">
+                          <a:solidFill>
+                            <a:srgbClr val="CC0000"/>
+                          </a:solidFill>
+                          <a:latin typeface="Calibri"/>
+                        </a:defRPr>
+                      </a:pPr>
+                      <a:r>
+                        <a:t>CO3</a:t>
+                      </a:r>
+                    </a:p>
+                  </a:txBody>
+                  <a:tcPr>
+                    <a:solidFill>
+                      <a:srgbClr val="F8FAFC"/>
+                    </a:solidFill>
+                  </a:tcPr>
+                </a:tc>
+                <a:tc>
+                  <a:txBody>
+                    <a:bodyPr/>
+                    <a:lstStyle/>
+                    <a:p>
+                      <a:pPr>
+                        <a:defRPr sz="850">
+                          <a:solidFill>
+                            <a:srgbClr val="1E293B"/>
+                          </a:solidFill>
+                          <a:latin typeface="Calibri"/>
+                        </a:defRPr>
+                      </a:pPr>
+                      <a:r>
+                        <a:t>Illustrate the use of classification and clustering algorithms in various application domains.</a:t>
+                      </a:r>
+                    </a:p>
+                  </a:txBody>
+                  <a:tcPr>
+                    <a:solidFill>
+                      <a:srgbClr val="F8FAFC"/>
+                    </a:solidFill>
+                  </a:tcPr>
+                </a:tc>
+                <a:tc>
+                  <a:txBody>
+                    <a:bodyPr/>
+                    <a:lstStyle/>
+                    <a:p>
+                      <a:pPr>
+                        <a:defRPr sz="850" b="1">
+                          <a:solidFill>
+                            <a:srgbClr val="0284C7"/>
+                          </a:solidFill>
+                          <a:latin typeface="Calibri"/>
+                        </a:defRPr>
+                      </a:pPr>
+                      <a:r>
+                        <a:t>K3</a:t>
+                      </a:r>
+                    </a:p>
+                  </a:txBody>
+                  <a:tcPr>
+                    <a:solidFill>
+                      <a:srgbClr val="F8FAFC"/>
+                    </a:solidFill>
+                  </a:tcPr>
+                </a:tc>
+                <a:tc>
+                  <a:txBody>
+                    <a:bodyPr/>
+                    <a:lstStyle/>
+                    <a:p>
+                      <a:pPr>
+                        <a:defRPr sz="850">
+                          <a:solidFill>
+                            <a:srgbClr val="1E293B"/>
+                          </a:solidFill>
+                          <a:latin typeface="Calibri"/>
+                        </a:defRPr>
+                      </a:pPr>
+                      <a:r>
+                        <a:t>Step 4B: Induces an explainable CART Decision Tree (Gini Impurity, depth 3) to predict station risk, outperforming Zero-R &amp; persistence baselines.</a:t>
+                      </a:r>
+                    </a:p>
+                  </a:txBody>
+                  <a:tcPr>
+                    <a:solidFill>
+                      <a:srgbClr val="F8FAFC"/>
+                    </a:solidFill>
+                  </a:tcPr>
+                </a:tc>
+              </a:tr>
+              <a:tr h="563880">
+                <a:tc>
+                  <a:txBody>
+                    <a:bodyPr/>
+                    <a:lstStyle/>
+                    <a:p>
+                      <a:pPr>
+                        <a:defRPr sz="850" b="1">
+                          <a:solidFill>
+                            <a:srgbClr val="CC0000"/>
+                          </a:solidFill>
+                          <a:latin typeface="Calibri"/>
+                        </a:defRPr>
+                      </a:pPr>
+                      <a:r>
+                        <a:t>CO4</a:t>
+                      </a:r>
+                    </a:p>
+                  </a:txBody>
+                  <a:tcPr>
+                    <a:solidFill>
+                      <a:srgbClr val="FFFFFF"/>
+                    </a:solidFill>
+                  </a:tcPr>
+                </a:tc>
+                <a:tc>
+                  <a:txBody>
+                    <a:bodyPr/>
+                    <a:lstStyle/>
+                    <a:p>
+                      <a:pPr>
+                        <a:defRPr sz="850">
+                          <a:solidFill>
+                            <a:srgbClr val="1E293B"/>
+                          </a:solidFill>
+                          <a:latin typeface="Calibri"/>
+                        </a:defRPr>
+                      </a:pPr>
+                      <a:r>
+                        <a:t>Comprehend the use of association rule mining techniques.</a:t>
+                      </a:r>
+                    </a:p>
+                  </a:txBody>
+                  <a:tcPr>
+                    <a:solidFill>
+                      <a:srgbClr val="FFFFFF"/>
+                    </a:solidFill>
+                  </a:tcPr>
+                </a:tc>
+                <a:tc>
+                  <a:txBody>
+                    <a:bodyPr/>
+                    <a:lstStyle/>
+                    <a:p>
+                      <a:pPr>
+                        <a:defRPr sz="850" b="1">
+                          <a:solidFill>
+                            <a:srgbClr val="0284C7"/>
+                          </a:solidFill>
+                          <a:latin typeface="Calibri"/>
+                        </a:defRPr>
+                      </a:pPr>
+                      <a:r>
+                        <a:t>K3</a:t>
+                      </a:r>
+                    </a:p>
+                  </a:txBody>
+                  <a:tcPr>
+                    <a:solidFill>
+                      <a:srgbClr val="FFFFFF"/>
+                    </a:solidFill>
+                  </a:tcPr>
+                </a:tc>
+                <a:tc>
+                  <a:txBody>
+                    <a:bodyPr/>
+                    <a:lstStyle/>
+                    <a:p>
+                      <a:pPr>
+                        <a:defRPr sz="850">
+                          <a:solidFill>
+                            <a:srgbClr val="1E293B"/>
+                          </a:solidFill>
+                          <a:latin typeface="Calibri"/>
+                        </a:defRPr>
+                      </a:pPr>
+                      <a:r>
+                        <a:t>Step 4A: Analyzes co-occurrence of vice offenses and evaluates cross-feature lagged momentum dependencies between offense categories.</a:t>
+                      </a:r>
+                    </a:p>
+                  </a:txBody>
+                  <a:tcPr>
+                    <a:solidFill>
+                      <a:srgbClr val="FFFFFF"/>
+                    </a:solidFill>
+                  </a:tcPr>
+                </a:tc>
+              </a:tr>
+              <a:tr h="563880">
+                <a:tc>
+                  <a:txBody>
+                    <a:bodyPr/>
+                    <a:lstStyle/>
+                    <a:p>
+                      <a:pPr>
+                        <a:defRPr sz="850" b="1">
+                          <a:solidFill>
+                            <a:srgbClr val="CC0000"/>
+                          </a:solidFill>
+                          <a:latin typeface="Calibri"/>
+                        </a:defRPr>
+                      </a:pPr>
+                      <a:r>
+                        <a:t>CO5</a:t>
+                      </a:r>
+                    </a:p>
+                  </a:txBody>
+                  <a:tcPr>
+                    <a:solidFill>
+                      <a:srgbClr val="F8FAFC"/>
+                    </a:solidFill>
+                  </a:tcPr>
+                </a:tc>
+                <a:tc>
+                  <a:txBody>
+                    <a:bodyPr/>
+                    <a:lstStyle/>
+                    <a:p>
+                      <a:pPr>
+                        <a:defRPr sz="850">
+                          <a:solidFill>
+                            <a:srgbClr val="1E293B"/>
+                          </a:solidFill>
+                          <a:latin typeface="Calibri"/>
+                        </a:defRPr>
+                      </a:pPr>
+                      <a:r>
+                        <a:t>Explain advanced data mining concepts and their applications in emerging domains.</a:t>
+                      </a:r>
+                    </a:p>
+                  </a:txBody>
+                  <a:tcPr>
+                    <a:solidFill>
+                      <a:srgbClr val="F8FAFC"/>
+                    </a:solidFill>
+                  </a:tcPr>
+                </a:tc>
+                <a:tc>
+                  <a:txBody>
+                    <a:bodyPr/>
+                    <a:lstStyle/>
+                    <a:p>
+                      <a:pPr>
+                        <a:defRPr sz="850" b="1">
+                          <a:solidFill>
+                            <a:srgbClr val="0284C7"/>
+                          </a:solidFill>
+                          <a:latin typeface="Calibri"/>
+                        </a:defRPr>
+                      </a:pPr>
+                      <a:r>
+                        <a:t>K2</a:t>
+                      </a:r>
+                    </a:p>
+                  </a:txBody>
+                  <a:tcPr>
+                    <a:solidFill>
+                      <a:srgbClr val="F8FAFC"/>
+                    </a:solidFill>
+                  </a:tcPr>
+                </a:tc>
+                <a:tc>
+                  <a:txBody>
+                    <a:bodyPr/>
+                    <a:lstStyle/>
+                    <a:p>
+                      <a:pPr>
+                        <a:defRPr sz="850">
+                          <a:solidFill>
+                            <a:srgbClr val="1E293B"/>
+                          </a:solidFill>
+                          <a:latin typeface="Calibri"/>
+                        </a:defRPr>
+                      </a:pPr>
+                      <a:r>
+                        <a:t>Step 1 &amp; Step 5: Web Content Mining from state police portals, operational crime spree simulation, and interactive Leaflet geospatial cartography.</a:t>
+                      </a:r>
+                    </a:p>
+                  </a:txBody>
+                  <a:tcPr>
+                    <a:solidFill>
+                      <a:srgbClr val="F8FAFC"/>
+                    </a:solidFill>
+                  </a:tcPr>
+                </a:tc>
+              </a:tr>
+            </a:tbl>
+          </a:graphicData>
+        </a:graphic>
+      </p:graphicFrame>
       <p:sp>
         <p:nvSpPr>
           <p:cNvPr id="5" name="Rectangle 4"/>
@@ -9561,7 +11438,7 @@
         </p:nvSpPr>
         <p:spPr>
           <a:xfrm>
-            <a:off x="548640" y="320040"/>
+            <a:off x="548640" y="292608"/>
             <a:ext cx="7132320" cy="685800"/>
           </a:xfrm>
           <a:prstGeom prst="rect">
@@ -9576,7 +11453,7 @@
           <a:lstStyle/>
           <a:p>
             <a:pPr>
-              <a:defRPr sz="2300" b="1">
+              <a:defRPr sz="2200" b="1">
                 <a:solidFill>
                   <a:srgbClr val="0F172A"/>
                 </a:solidFill>
@@ -9584,12 +11461,12 @@
               </a:defRPr>
             </a:pPr>
             <a:r>
-              <a:t>Project Objectives</a:t>
-            </a:r>
-          </a:p>
-          <a:p>
-            <a:pPr>
-              <a:defRPr sz="1100" b="1">
+              <a:t>Alignment with Sustainable Development Goals</a:t>
+            </a:r>
+          </a:p>
+          <a:p>
+            <a:pPr>
+              <a:defRPr sz="1050" b="1">
                 <a:solidFill>
                   <a:srgbClr val="CC0000"/>
                 </a:solidFill>
@@ -9597,7 +11474,7 @@
               </a:defRPr>
             </a:pPr>
             <a:r>
-              <a:t>FORMAL ENGINEERING GOALS</a:t>
+              <a:t>UNITED NATIONS 2030 AGENDA — SDG 16, SDG 11 &amp; SDG 9</a:t>
             </a:r>
           </a:p>
         </p:txBody>
@@ -9630,21 +11507,21 @@
               </a:spcBef>
               <a:defRPr sz="1400" b="1">
                 <a:solidFill>
-                  <a:srgbClr val="CC0000"/>
-                </a:solidFill>
-                <a:latin typeface="Calibri"/>
-              </a:defRPr>
-            </a:pPr>
-            <a:r>
-              <a:t>1. Data Harvesting &amp; Relational Warehousing</a:t>
+                  <a:srgbClr val="0284C7"/>
+                </a:solidFill>
+                <a:latin typeface="Calibri"/>
+              </a:defRPr>
+            </a:pPr>
+            <a:r>
+              <a:t>SDG 16: Peace, Justice &amp; Strong Institutions</a:t>
             </a:r>
           </a:p>
           <a:p>
             <a:pPr>
               <a:spcBef>
-                <a:spcPts val="200"/>
+                <a:spcPts val="300"/>
               </a:spcBef>
-              <a:defRPr sz="1200">
+              <a:defRPr sz="1250">
                 <a:solidFill>
                   <a:srgbClr val="1E293B"/>
                 </a:solidFill>
@@ -9652,31 +11529,31 @@
               </a:defRPr>
             </a:pPr>
             <a:r>
-              <a:t>Acquire, clean, and warehouse 10+ years (2014–2023) of real historical crime records, coordinates, and staff data across 37 police stations from official Kerala Police portals with 100% traceability and zero synthetic fabrication.</a:t>
+              <a:t>Empowers police leadership with transparent, legally auditable decision tree rules to deploy preventive patrols and proactively de-escalate violence across 37 police jurisdictions.</a:t>
             </a:r>
           </a:p>
           <a:p>
             <a:pPr>
               <a:spcBef>
-                <a:spcPts val="800"/>
+                <a:spcPts val="1200"/>
               </a:spcBef>
               <a:defRPr sz="1400" b="1">
                 <a:solidFill>
-                  <a:srgbClr val="CC0000"/>
-                </a:solidFill>
-                <a:latin typeface="Calibri"/>
-              </a:defRPr>
-            </a:pPr>
-            <a:r>
-              <a:t>2. Explainable Crime Hotspot Classification</a:t>
+                  <a:srgbClr val="D97706"/>
+                </a:solidFill>
+                <a:latin typeface="Calibri"/>
+              </a:defRPr>
+            </a:pPr>
+            <a:r>
+              <a:t>SDG 11: Sustainable Cities &amp; Communities</a:t>
             </a:r>
           </a:p>
           <a:p>
             <a:pPr>
               <a:spcBef>
-                <a:spcPts val="200"/>
+                <a:spcPts val="300"/>
               </a:spcBef>
-              <a:defRPr sz="1200">
+              <a:defRPr sz="1250">
                 <a:solidFill>
                   <a:srgbClr val="1E293B"/>
                 </a:solidFill>
@@ -9684,31 +11561,31 @@
               </a:defRPr>
             </a:pPr>
             <a:r>
-              <a:t>Induce an explainable CART Decision Tree classifier with Gini Impurity (max depth = 3) to predict whether police stations will face Higher or Lower Relative Risk, evaluated strictly out-of-time (2020–2025) with zero data leakage.</a:t>
+              <a:t>Delivers interactive geospatial cartography and crime surge stress-testing to safeguard Kochi's commercial hubs, transit corridors, and public urban spaces.</a:t>
             </a:r>
           </a:p>
           <a:p>
             <a:pPr>
               <a:spcBef>
-                <a:spcPts val="800"/>
+                <a:spcPts val="1200"/>
               </a:spcBef>
               <a:defRPr sz="1400" b="1">
                 <a:solidFill>
-                  <a:srgbClr val="CC0000"/>
-                </a:solidFill>
-                <a:latin typeface="Calibri"/>
-              </a:defRPr>
-            </a:pPr>
-            <a:r>
-              <a:t>3. Crime Spree Surge &amp; Staffing Simulation</a:t>
+                  <a:srgbClr val="059669"/>
+                </a:solidFill>
+                <a:latin typeface="Calibri"/>
+              </a:defRPr>
+            </a:pPr>
+            <a:r>
+              <a:t>SDG 9: Industry, Innovation &amp; Infrastructure</a:t>
             </a:r>
           </a:p>
           <a:p>
             <a:pPr>
               <a:spcBef>
-                <a:spcPts val="200"/>
+                <a:spcPts val="300"/>
               </a:spcBef>
-              <a:defRPr sz="1200">
+              <a:defRPr sz="1250">
                 <a:solidFill>
                   <a:srgbClr val="1E293B"/>
                 </a:solidFill>
@@ -9716,39 +11593,7 @@
               </a:defRPr>
             </a:pPr>
             <a:r>
-              <a:t>Develop a configurable operational simulation model that tests station capacity against simulated crime sprees (+25%, +50%, +100%), flags understaffed stations, and models how filling vacancies reduces officer caseload strain.</a:t>
-            </a:r>
-          </a:p>
-          <a:p>
-            <a:pPr>
-              <a:spcBef>
-                <a:spcPts val="800"/>
-              </a:spcBef>
-              <a:defRPr sz="1400" b="1">
-                <a:solidFill>
-                  <a:srgbClr val="CC0000"/>
-                </a:solidFill>
-                <a:latin typeface="Calibri"/>
-              </a:defRPr>
-            </a:pPr>
-            <a:r>
-              <a:t>4. Geospatial Cartography &amp; Full-Stack Interface</a:t>
-            </a:r>
-          </a:p>
-          <a:p>
-            <a:pPr>
-              <a:spcBef>
-                <a:spcPts val="200"/>
-              </a:spcBef>
-              <a:defRPr sz="1200">
-                <a:solidFill>
-                  <a:srgbClr val="1E293B"/>
-                </a:solidFill>
-                <a:latin typeface="Calibri"/>
-              </a:defRPr>
-            </a:pPr>
-            <a:r>
-              <a:t>Deploy a step-by-step interactive Web dashboard using Leaflet OpenStreetMap, drill-down station intelligence drawers, and direct CSV data exports.</a:t>
+              <a:t>Modernizes municipal public safety infrastructure by deploying lightweight, open-source data mining technologies rather than expensive proprietary surveillance suites.</a:t>
             </a:r>
           </a:p>
         </p:txBody>
@@ -9918,7 +11763,7 @@
         </p:nvSpPr>
         <p:spPr>
           <a:xfrm>
-            <a:off x="548640" y="320040"/>
+            <a:off x="548640" y="292608"/>
             <a:ext cx="7132320" cy="685800"/>
           </a:xfrm>
           <a:prstGeom prst="rect">
@@ -9933,7 +11778,7 @@
           <a:lstStyle/>
           <a:p>
             <a:pPr>
-              <a:defRPr sz="2300" b="1">
+              <a:defRPr sz="2200" b="1">
                 <a:solidFill>
                   <a:srgbClr val="0F172A"/>
                 </a:solidFill>
@@ -9941,12 +11786,12 @@
               </a:defRPr>
             </a:pPr>
             <a:r>
-              <a:t>System Architecture &amp; Processing Workflow</a:t>
-            </a:r>
-          </a:p>
-          <a:p>
-            <a:pPr>
-              <a:defRPr sz="1100" b="1">
+              <a:t>Project Objectives</a:t>
+            </a:r>
+          </a:p>
+          <a:p>
+            <a:pPr>
+              <a:defRPr sz="1050" b="1">
                 <a:solidFill>
                   <a:srgbClr val="CC0000"/>
                 </a:solidFill>
@@ -9954,45 +11799,21 @@
               </a:defRPr>
             </a:pPr>
             <a:r>
-              <a:t>5-STEP SEQUENTIAL DATA MINING PIPELINE</a:t>
-            </a:r>
-          </a:p>
-        </p:txBody>
-      </p:sp>
-      <p:pic>
-        <p:nvPicPr>
-          <p:cNvPr id="4" name="Picture 3" descr="architecture_flowchart.png"/>
-          <p:cNvPicPr>
-            <a:picLocks noChangeAspect="1"/>
-          </p:cNvPicPr>
-          <p:nvPr/>
-        </p:nvPicPr>
-        <p:blipFill>
-          <a:blip r:embed="rId3"/>
-          <a:stretch>
-            <a:fillRect/>
-          </a:stretch>
-        </p:blipFill>
-        <p:spPr>
-          <a:xfrm>
-            <a:off x="548640" y="1078992"/>
-            <a:ext cx="8046720" cy="3014705"/>
-          </a:xfrm>
-          <a:prstGeom prst="rect">
-            <a:avLst/>
-          </a:prstGeom>
-        </p:spPr>
-      </p:pic>
-      <p:sp>
-        <p:nvSpPr>
-          <p:cNvPr id="5" name="TextBox 4"/>
+              <a:t>FORMAL ENGINEERING GOALS</a:t>
+            </a:r>
+          </a:p>
+        </p:txBody>
+      </p:sp>
+      <p:sp>
+        <p:nvSpPr>
+          <p:cNvPr id="4" name="TextBox 3"/>
           <p:cNvSpPr txBox="1"/>
           <p:nvPr/>
         </p:nvSpPr>
         <p:spPr>
           <a:xfrm>
-            <a:off x="548640" y="3931920"/>
-            <a:ext cx="8046720" cy="731520"/>
+            <a:off x="731520" y="1143000"/>
+            <a:ext cx="7680960" cy="3291840"/>
           </a:xfrm>
           <a:prstGeom prst="rect">
             <a:avLst/>
@@ -10005,23 +11826,138 @@
           </a:bodyPr>
           <a:lstStyle/>
           <a:p>
-            <a:pPr algn="ctr">
-              <a:defRPr sz="1150" b="1">
-                <a:solidFill>
-                  <a:srgbClr val="0F172A"/>
-                </a:solidFill>
-                <a:latin typeface="Calibri"/>
-              </a:defRPr>
-            </a:pPr>
-            <a:r>
-              <a:t>Pipeline Execution Flow: Raw HTML Portals → Clean Relational Warehouse → Temporal Features → Explainable ML Tree → Leaflet Cartography</a:t>
-            </a:r>
-          </a:p>
-        </p:txBody>
-      </p:sp>
-      <p:sp>
-        <p:nvSpPr>
-          <p:cNvPr id="6" name="Rectangle 5"/>
+            <a:pPr>
+              <a:spcBef>
+                <a:spcPts val="0"/>
+              </a:spcBef>
+              <a:defRPr sz="1350" b="1">
+                <a:solidFill>
+                  <a:srgbClr val="CC0000"/>
+                </a:solidFill>
+                <a:latin typeface="Calibri"/>
+              </a:defRPr>
+            </a:pPr>
+            <a:r>
+              <a:t>1. Data Harvesting &amp; Relational Warehousing</a:t>
+            </a:r>
+          </a:p>
+          <a:p>
+            <a:pPr>
+              <a:spcBef>
+                <a:spcPts val="200"/>
+              </a:spcBef>
+              <a:defRPr sz="1150">
+                <a:solidFill>
+                  <a:srgbClr val="1E293B"/>
+                </a:solidFill>
+                <a:latin typeface="Calibri"/>
+              </a:defRPr>
+            </a:pPr>
+            <a:r>
+              <a:t>Acquire, clean, and warehouse 10+ years (2014–2023) of real historical crime records, coordinates, and staff data across 37 police stations from official Kerala Police portals with 100% traceability and zero synthetic fabrication.</a:t>
+            </a:r>
+          </a:p>
+          <a:p>
+            <a:pPr>
+              <a:spcBef>
+                <a:spcPts val="600"/>
+              </a:spcBef>
+              <a:defRPr sz="1350" b="1">
+                <a:solidFill>
+                  <a:srgbClr val="CC0000"/>
+                </a:solidFill>
+                <a:latin typeface="Calibri"/>
+              </a:defRPr>
+            </a:pPr>
+            <a:r>
+              <a:t>2. Explainable Crime Hotspot Classification</a:t>
+            </a:r>
+          </a:p>
+          <a:p>
+            <a:pPr>
+              <a:spcBef>
+                <a:spcPts val="200"/>
+              </a:spcBef>
+              <a:defRPr sz="1150">
+                <a:solidFill>
+                  <a:srgbClr val="1E293B"/>
+                </a:solidFill>
+                <a:latin typeface="Calibri"/>
+              </a:defRPr>
+            </a:pPr>
+            <a:r>
+              <a:t>Induce an explainable CART Decision Tree classifier with Gini Impurity (max depth = 3) to predict whether police stations will face Higher or Lower Relative Risk, evaluated strictly out-of-time (2020–2025) with zero data leakage.</a:t>
+            </a:r>
+          </a:p>
+          <a:p>
+            <a:pPr>
+              <a:spcBef>
+                <a:spcPts val="600"/>
+              </a:spcBef>
+              <a:defRPr sz="1350" b="1">
+                <a:solidFill>
+                  <a:srgbClr val="CC0000"/>
+                </a:solidFill>
+                <a:latin typeface="Calibri"/>
+              </a:defRPr>
+            </a:pPr>
+            <a:r>
+              <a:t>3. Crime Spree Surge &amp; Staffing Simulation</a:t>
+            </a:r>
+          </a:p>
+          <a:p>
+            <a:pPr>
+              <a:spcBef>
+                <a:spcPts val="200"/>
+              </a:spcBef>
+              <a:defRPr sz="1150">
+                <a:solidFill>
+                  <a:srgbClr val="1E293B"/>
+                </a:solidFill>
+                <a:latin typeface="Calibri"/>
+              </a:defRPr>
+            </a:pPr>
+            <a:r>
+              <a:t>Develop a configurable operational simulation model that tests station capacity against simulated crime sprees (+25%, +50%, +100%), flags understaffed stations, and models how filling vacancies reduces officer caseload strain.</a:t>
+            </a:r>
+          </a:p>
+          <a:p>
+            <a:pPr>
+              <a:spcBef>
+                <a:spcPts val="600"/>
+              </a:spcBef>
+              <a:defRPr sz="1350" b="1">
+                <a:solidFill>
+                  <a:srgbClr val="CC0000"/>
+                </a:solidFill>
+                <a:latin typeface="Calibri"/>
+              </a:defRPr>
+            </a:pPr>
+            <a:r>
+              <a:t>4. Geospatial Cartography &amp; Full-Stack Interface</a:t>
+            </a:r>
+          </a:p>
+          <a:p>
+            <a:pPr>
+              <a:spcBef>
+                <a:spcPts val="200"/>
+              </a:spcBef>
+              <a:defRPr sz="1150">
+                <a:solidFill>
+                  <a:srgbClr val="1E293B"/>
+                </a:solidFill>
+                <a:latin typeface="Calibri"/>
+              </a:defRPr>
+            </a:pPr>
+            <a:r>
+              <a:t>Deploy a step-by-step interactive Web dashboard using Leaflet OpenStreetMap, drill-down station intelligence drawers, and direct CSV data exports.</a:t>
+            </a:r>
+          </a:p>
+        </p:txBody>
+      </p:sp>
+      <p:sp>
+        <p:nvSpPr>
+          <p:cNvPr id="5" name="Rectangle 4"/>
           <p:cNvSpPr/>
           <p:nvPr/>
         </p:nvSpPr>
@@ -10064,7 +12000,7 @@
       </p:sp>
       <p:sp>
         <p:nvSpPr>
-          <p:cNvPr id="7" name="TextBox 6"/>
+          <p:cNvPr id="6" name="TextBox 5"/>
           <p:cNvSpPr txBox="1"/>
           <p:nvPr/>
         </p:nvSpPr>
@@ -10100,7 +12036,7 @@
       </p:sp>
       <p:sp>
         <p:nvSpPr>
-          <p:cNvPr id="8" name="TextBox 7"/>
+          <p:cNvPr id="7" name="TextBox 6"/>
           <p:cNvSpPr txBox="1"/>
           <p:nvPr/>
         </p:nvSpPr>
@@ -10184,7 +12120,7 @@
         </p:nvSpPr>
         <p:spPr>
           <a:xfrm>
-            <a:off x="548640" y="320040"/>
+            <a:off x="548640" y="292608"/>
             <a:ext cx="7132320" cy="685800"/>
           </a:xfrm>
           <a:prstGeom prst="rect">
@@ -10199,7 +12135,7 @@
           <a:lstStyle/>
           <a:p>
             <a:pPr>
-              <a:defRPr sz="2300" b="1">
+              <a:defRPr sz="2200" b="1">
                 <a:solidFill>
                   <a:srgbClr val="0F172A"/>
                 </a:solidFill>
@@ -10207,12 +12143,12 @@
               </a:defRPr>
             </a:pPr>
             <a:r>
-              <a:t>Data Extraction &amp; Cleaning Methodology</a:t>
-            </a:r>
-          </a:p>
-          <a:p>
-            <a:pPr>
-              <a:defRPr sz="1100" b="1">
+              <a:t>System Architecture &amp; Processing Workflow</a:t>
+            </a:r>
+          </a:p>
+          <a:p>
+            <a:pPr>
+              <a:defRPr sz="1050" b="1">
                 <a:solidFill>
                   <a:srgbClr val="CC0000"/>
                 </a:solidFill>
@@ -10220,21 +12156,45 @@
               </a:defRPr>
             </a:pPr>
             <a:r>
-              <a:t>DATA INGESTION, TAXONOMY NORMALIZATION &amp; CONCEPT HIERARCHIES</a:t>
-            </a:r>
-          </a:p>
-        </p:txBody>
-      </p:sp>
-      <p:sp>
-        <p:nvSpPr>
-          <p:cNvPr id="4" name="TextBox 3"/>
+              <a:t>5-STEP SEQUENTIAL DATA MINING PIPELINE</a:t>
+            </a:r>
+          </a:p>
+        </p:txBody>
+      </p:sp>
+      <p:pic>
+        <p:nvPicPr>
+          <p:cNvPr id="4" name="Picture 3" descr="architecture_flowchart.png"/>
+          <p:cNvPicPr>
+            <a:picLocks noChangeAspect="1"/>
+          </p:cNvPicPr>
+          <p:nvPr/>
+        </p:nvPicPr>
+        <p:blipFill>
+          <a:blip r:embed="rId3"/>
+          <a:stretch>
+            <a:fillRect/>
+          </a:stretch>
+        </p:blipFill>
+        <p:spPr>
+          <a:xfrm>
+            <a:off x="548640" y="1078992"/>
+            <a:ext cx="8046720" cy="3014705"/>
+          </a:xfrm>
+          <a:prstGeom prst="rect">
+            <a:avLst/>
+          </a:prstGeom>
+        </p:spPr>
+      </p:pic>
+      <p:sp>
+        <p:nvSpPr>
+          <p:cNvPr id="5" name="TextBox 4"/>
           <p:cNvSpPr txBox="1"/>
           <p:nvPr/>
         </p:nvSpPr>
         <p:spPr>
           <a:xfrm>
-            <a:off x="731520" y="1143000"/>
-            <a:ext cx="7680960" cy="3291840"/>
+            <a:off x="548640" y="3931920"/>
+            <a:ext cx="8046720" cy="731520"/>
           </a:xfrm>
           <a:prstGeom prst="rect">
             <a:avLst/>
@@ -10247,142 +12207,23 @@
           </a:bodyPr>
           <a:lstStyle/>
           <a:p>
-            <a:pPr>
-              <a:spcBef>
-                <a:spcPts val="0"/>
-              </a:spcBef>
-              <a:defRPr sz="1350" b="1">
-                <a:solidFill>
-                  <a:srgbClr val="CC0000"/>
-                </a:solidFill>
-                <a:latin typeface="Calibri"/>
-              </a:defRPr>
-            </a:pPr>
-            <a:r>
-              <a:t>• 100% Traceable Real-World Data Acquisition</a:t>
-            </a:r>
-          </a:p>
-          <a:p>
-            <a:pPr>
-              <a:spcBef>
-                <a:spcPts val="200"/>
-              </a:spcBef>
-              <a:defRPr sz="1200">
-                <a:solidFill>
-                  <a:srgbClr val="1E293B"/>
-                </a:solidFill>
-                <a:latin typeface="Calibri"/>
-              </a:defRPr>
-            </a:pPr>
-            <a:r>
-              <a:t>Harvested 14,262 historical crime records (2014–2023), 250 staff posts, and physical coordinates from official portals: ps.keralapolice.gov.in and kochicity.keralapolice.gov.in. Raw HTML cached locally.</a:t>
-            </a:r>
-          </a:p>
-          <a:p>
-            <a:pPr>
-              <a:spcBef>
-                <a:spcPts val="600"/>
-              </a:spcBef>
-              <a:defRPr sz="1350" b="1">
-                <a:solidFill>
-                  <a:srgbClr val="CC0000"/>
-                </a:solidFill>
-                <a:latin typeface="Calibri"/>
-              </a:defRPr>
-            </a:pPr>
-            <a:r>
-              <a:t>• Strict Zero-Count vs Unobserved Year Policy</a:t>
-            </a:r>
-          </a:p>
-          <a:p>
-            <a:pPr>
-              <a:spcBef>
-                <a:spcPts val="200"/>
-              </a:spcBef>
-              <a:defRPr sz="1200">
-                <a:solidFill>
-                  <a:srgbClr val="1E293B"/>
-                </a:solidFill>
-                <a:latin typeface="Calibri"/>
-              </a:defRPr>
-            </a:pPr>
-            <a:r>
-              <a:t>A reported '0' represents an active station with zero occurrences of that specific crime. A NULL indicates an unobserved or unestablished year. Preserving true zeros prevents distorting model probabilities.</a:t>
-            </a:r>
-          </a:p>
-          <a:p>
-            <a:pPr>
-              <a:spcBef>
-                <a:spcPts val="600"/>
-              </a:spcBef>
-              <a:defRPr sz="1350" b="1">
-                <a:solidFill>
-                  <a:srgbClr val="CC0000"/>
-                </a:solidFill>
-                <a:latin typeface="Calibri"/>
-              </a:defRPr>
-            </a:pPr>
-            <a:r>
-              <a:t>• Station Entity Harmonization</a:t>
-            </a:r>
-          </a:p>
-          <a:p>
-            <a:pPr>
-              <a:spcBef>
-                <a:spcPts val="200"/>
-              </a:spcBef>
-              <a:defRPr sz="1200">
-                <a:solidFill>
-                  <a:srgbClr val="1E293B"/>
-                </a:solidFill>
-                <a:latin typeface="Calibri"/>
-              </a:defRPr>
-            </a:pPr>
-            <a:r>
-              <a:t>Resolved mismatched URL slugs and portal naming variations (e.g. 'ernakulamcentral-ps' ↔ 'Ernakulam Central') into unified relational primary keys.</a:t>
-            </a:r>
-          </a:p>
-          <a:p>
-            <a:pPr>
-              <a:spcBef>
-                <a:spcPts val="600"/>
-              </a:spcBef>
-              <a:defRPr sz="1350" b="1">
-                <a:solidFill>
-                  <a:srgbClr val="CC0000"/>
-                </a:solidFill>
-                <a:latin typeface="Calibri"/>
-              </a:defRPr>
-            </a:pPr>
-            <a:r>
-              <a:t>• Spatial &amp; Legal Concept Hierarchies</a:t>
-            </a:r>
-          </a:p>
-          <a:p>
-            <a:pPr>
-              <a:spcBef>
-                <a:spcPts val="200"/>
-              </a:spcBef>
-              <a:defRPr sz="1200">
-                <a:solidFill>
-                  <a:srgbClr val="1E293B"/>
-                </a:solidFill>
-                <a:latin typeface="Calibri"/>
-              </a:defRPr>
-            </a:pPr>
-            <a:r>
-              <a:t>Spatial: State → District (Kochi City / Rural) → Sub-Division (Ernakulam, Mattancherry, etc.) → Station.</a:t>
-            </a:r>
-            <a:br/>
-            <a:r>
-              <a:t>Legal: Penal Code (IPC vs SLL) → Category (Violent, Property, Vice) → Specific Offense Head.</a:t>
-            </a:r>
-          </a:p>
-        </p:txBody>
-      </p:sp>
-      <p:sp>
-        <p:nvSpPr>
-          <p:cNvPr id="5" name="Rectangle 4"/>
+            <a:pPr algn="ctr">
+              <a:defRPr sz="1150" b="1">
+                <a:solidFill>
+                  <a:srgbClr val="0F172A"/>
+                </a:solidFill>
+                <a:latin typeface="Calibri"/>
+              </a:defRPr>
+            </a:pPr>
+            <a:r>
+              <a:t>Pipeline Execution Flow: Raw HTML Portals → Clean Relational Warehouse → Temporal Features → Explainable ML Tree → Leaflet Cartography</a:t>
+            </a:r>
+          </a:p>
+        </p:txBody>
+      </p:sp>
+      <p:sp>
+        <p:nvSpPr>
+          <p:cNvPr id="6" name="Rectangle 5"/>
           <p:cNvSpPr/>
           <p:nvPr/>
         </p:nvSpPr>
@@ -10425,7 +12266,7 @@
       </p:sp>
       <p:sp>
         <p:nvSpPr>
-          <p:cNvPr id="6" name="TextBox 5"/>
+          <p:cNvPr id="7" name="TextBox 6"/>
           <p:cNvSpPr txBox="1"/>
           <p:nvPr/>
         </p:nvSpPr>
@@ -10461,7 +12302,7 @@
       </p:sp>
       <p:sp>
         <p:nvSpPr>
-          <p:cNvPr id="7" name="TextBox 6"/>
+          <p:cNvPr id="8" name="TextBox 7"/>
           <p:cNvSpPr txBox="1"/>
           <p:nvPr/>
         </p:nvSpPr>
@@ -10545,7 +12386,7 @@
         </p:nvSpPr>
         <p:spPr>
           <a:xfrm>
-            <a:off x="548640" y="320040"/>
+            <a:off x="548640" y="292608"/>
             <a:ext cx="7132320" cy="685800"/>
           </a:xfrm>
           <a:prstGeom prst="rect">
@@ -10560,7 +12401,7 @@
           <a:lstStyle/>
           <a:p>
             <a:pPr>
-              <a:defRPr sz="2300" b="1">
+              <a:defRPr sz="2200" b="1">
                 <a:solidFill>
                   <a:srgbClr val="0F172A"/>
                 </a:solidFill>
@@ -10568,12 +12409,12 @@
               </a:defRPr>
             </a:pPr>
             <a:r>
-              <a:t>Data Warehouse &amp; OLAP Operations</a:t>
-            </a:r>
-          </a:p>
-          <a:p>
-            <a:pPr>
-              <a:defRPr sz="1100" b="1">
+              <a:t>Step 1: Data Extraction &amp; Web Harvesting</a:t>
+            </a:r>
+          </a:p>
+          <a:p>
+            <a:pPr>
+              <a:defRPr sz="1050" b="1">
                 <a:solidFill>
                   <a:srgbClr val="CC0000"/>
                 </a:solidFill>
@@ -10581,7 +12422,7 @@
               </a:defRPr>
             </a:pPr>
             <a:r>
-              <a:t>WHY RAW CRIME ROWS ARE LOW &amp; HOW OLAP ROLLS UP STATION TOTALS</a:t>
+              <a:t>TARGET SOURCES, SCRAPING METHODOLOGY &amp; ENTITY EXTRACTION</a:t>
             </a:r>
           </a:p>
         </p:txBody>
@@ -10594,8 +12435,8 @@
         </p:nvSpPr>
         <p:spPr>
           <a:xfrm>
-            <a:off x="548640" y="1143000"/>
-            <a:ext cx="4114800" cy="3291840"/>
+            <a:off x="731520" y="1051560"/>
+            <a:ext cx="7680960" cy="3520440"/>
           </a:xfrm>
           <a:prstGeom prst="rect">
             <a:avLst/>
@@ -10607,9 +12448,32 @@
             <a:spAutoFit/>
           </a:bodyPr>
           <a:lstStyle/>
-          <a:p>
-            <a:pPr>
-              <a:defRPr sz="1400" b="1">
+          <a:p/>
+          <a:p>
+            <a:pPr>
+              <a:spcBef>
+                <a:spcPts val="400"/>
+              </a:spcBef>
+              <a:spcAft>
+                <a:spcPts val="600"/>
+              </a:spcAft>
+              <a:defRPr sz="1150" b="1">
+                <a:solidFill>
+                  <a:srgbClr val="B41414"/>
+                </a:solidFill>
+                <a:latin typeface="Calibri"/>
+              </a:defRPr>
+            </a:pPr>
+            <a:r>
+              <a:t>Operational Rationale: Official crime statistics are locked in public HTML portal tables without an open API; automated harvesting builds an accessible, structured historical archive for public safety analysis.</a:t>
+            </a:r>
+          </a:p>
+          <a:p>
+            <a:pPr>
+              <a:spcBef>
+                <a:spcPts val="400"/>
+              </a:spcBef>
+              <a:defRPr sz="1200" b="1">
                 <a:solidFill>
                   <a:srgbClr val="CC0000"/>
                 </a:solidFill>
@@ -10617,15 +12481,15 @@
               </a:defRPr>
             </a:pPr>
             <a:r>
-              <a:t>Fact Table Granularity vs OLAP Roll-Up:</a:t>
+              <a:t>• Target Source 1: Kerala Police Station Portal (ps.keralapolice.gov.in)</a:t>
             </a:r>
           </a:p>
           <a:p>
             <a:pPr>
               <a:spcBef>
-                <a:spcPts val="600"/>
+                <a:spcPts val="100"/>
               </a:spcBef>
-              <a:defRPr sz="1200">
+              <a:defRPr sz="1100">
                 <a:solidFill>
                   <a:srgbClr val="1E293B"/>
                 </a:solidFill>
@@ -10633,15 +12497,31 @@
               </a:defRPr>
             </a:pPr>
             <a:r>
-              <a:t>• Fine Fact Table Grain: In crime_records, each row is Station × Year × Specific Crime Head. Rare crimes (Murder, Dacoity) naturally show 0, 1, or 2 cases.</a:t>
+              <a:t>Scraped 37 individual police station endpoints across Ernakulam City &amp; Rural (/police-station/&lt;slug&gt;). Extracted 10-year crime registers (2014–2023) across IPC and SLL categories. Harvested Station House Officer (SHO) designations, mobile numbers, and jurisdiction text. Extracted physical GPS coordinates embedded in station Leaflet script initialization.</a:t>
             </a:r>
           </a:p>
           <a:p>
             <a:pPr>
               <a:spcBef>
-                <a:spcPts val="600"/>
+                <a:spcPts val="400"/>
               </a:spcBef>
-              <a:defRPr sz="1200">
+              <a:defRPr sz="1200" b="1">
+                <a:solidFill>
+                  <a:srgbClr val="CC0000"/>
+                </a:solidFill>
+                <a:latin typeface="Calibri"/>
+              </a:defRPr>
+            </a:pPr>
+            <a:r>
+              <a:t>• Target Source 2: Kochi City Police Portal (kochicity.keralapolice.gov.in)</a:t>
+            </a:r>
+          </a:p>
+          <a:p>
+            <a:pPr>
+              <a:spcBef>
+                <a:spcPts val="100"/>
+              </a:spcBef>
+              <a:defRPr sz="1100">
                 <a:solidFill>
                   <a:srgbClr val="1E293B"/>
                 </a:solidFill>
@@ -10649,15 +12529,31 @@
               </a:defRPr>
             </a:pPr>
             <a:r>
-              <a:t>• OLAP Roll-Up: Aggregating all heads to annual totals reveals true metropolitan crime volumes (1,000 to 2,000+ cases).</a:t>
+              <a:t>Extracted administrative staffing orders, sanctioned posts (Inspector, Sub-Inspector, Senior Civil Police Officer, Civil Police Officer), and active on-duty personnel vs unfilled vacancy figures.</a:t>
             </a:r>
           </a:p>
           <a:p>
             <a:pPr>
               <a:spcBef>
-                <a:spcPts val="600"/>
+                <a:spcPts val="400"/>
               </a:spcBef>
-              <a:defRPr sz="1200">
+              <a:defRPr sz="1200" b="1">
+                <a:solidFill>
+                  <a:srgbClr val="CC0000"/>
+                </a:solidFill>
+                <a:latin typeface="Calibri"/>
+              </a:defRPr>
+            </a:pPr>
+            <a:r>
+              <a:t>• Technical Harvesting Pipeline &amp; Local Caching</a:t>
+            </a:r>
+          </a:p>
+          <a:p>
+            <a:pPr>
+              <a:spcBef>
+                <a:spcPts val="100"/>
+              </a:spcBef>
+              <a:defRPr sz="1100">
                 <a:solidFill>
                   <a:srgbClr val="1E293B"/>
                 </a:solidFill>
@@ -10665,54 +12561,14 @@
               </a:defRPr>
             </a:pPr>
             <a:r>
-              <a:t>• Top Stations: Ernakulam Central (1,939 cases), Town South (1,418 cases), and Palarivattom (1,110 cases).</a:t>
-            </a:r>
-          </a:p>
-          <a:p>
-            <a:pPr>
-              <a:spcBef>
-                <a:spcPts val="600"/>
-              </a:spcBef>
-              <a:defRPr sz="1200">
-                <a:solidFill>
-                  <a:srgbClr val="1E293B"/>
-                </a:solidFill>
-                <a:latin typeface="Calibri"/>
-              </a:defRPr>
-            </a:pPr>
-            <a:r>
-              <a:t>• OLAP Pivot Table: Cross-tabulates all 37 stations across 10 years to spot long-term trajectories.</a:t>
-            </a:r>
-          </a:p>
-        </p:txBody>
-      </p:sp>
-      <p:pic>
-        <p:nvPicPr>
-          <p:cNvPr id="5" name="Picture 4" descr="olap_rollup.png"/>
-          <p:cNvPicPr>
-            <a:picLocks noChangeAspect="1"/>
-          </p:cNvPicPr>
-          <p:nvPr/>
-        </p:nvPicPr>
-        <p:blipFill>
-          <a:blip r:embed="rId3"/>
-          <a:stretch>
-            <a:fillRect/>
-          </a:stretch>
-        </p:blipFill>
-        <p:spPr>
-          <a:xfrm>
-            <a:off x="4754880" y="1188720"/>
-            <a:ext cx="3931920" cy="2698376"/>
-          </a:xfrm>
-          <a:prstGeom prst="rect">
-            <a:avLst/>
-          </a:prstGeom>
-        </p:spPr>
-      </p:pic>
-      <p:sp>
-        <p:nvSpPr>
-          <p:cNvPr id="6" name="Rectangle 5"/>
+              <a:t>Implemented BeautifulSoup &amp; Python HTTP scraping scripts with persistent local HTML caching to ensure 100% reproducibility and prevent server throttling. Built an entity resolution layer mapping mismatched URL slugs (e.g. 'ernakulamcentral-ps') to canonical station IDs.</a:t>
+            </a:r>
+          </a:p>
+        </p:txBody>
+      </p:sp>
+      <p:sp>
+        <p:nvSpPr>
+          <p:cNvPr id="5" name="Rectangle 4"/>
           <p:cNvSpPr/>
           <p:nvPr/>
         </p:nvSpPr>
@@ -10755,7 +12611,7 @@
       </p:sp>
       <p:sp>
         <p:nvSpPr>
-          <p:cNvPr id="7" name="TextBox 6"/>
+          <p:cNvPr id="6" name="TextBox 5"/>
           <p:cNvSpPr txBox="1"/>
           <p:nvPr/>
         </p:nvSpPr>
@@ -10791,7 +12647,7 @@
       </p:sp>
       <p:sp>
         <p:nvSpPr>
-          <p:cNvPr id="8" name="TextBox 7"/>
+          <p:cNvPr id="7" name="TextBox 6"/>
           <p:cNvSpPr txBox="1"/>
           <p:nvPr/>
         </p:nvSpPr>
@@ -10875,7 +12731,7 @@
         </p:nvSpPr>
         <p:spPr>
           <a:xfrm>
-            <a:off x="548640" y="320040"/>
+            <a:off x="548640" y="292608"/>
             <a:ext cx="7132320" cy="685800"/>
           </a:xfrm>
           <a:prstGeom prst="rect">
@@ -10890,7 +12746,7 @@
           <a:lstStyle/>
           <a:p>
             <a:pPr>
-              <a:defRPr sz="2300" b="1">
+              <a:defRPr sz="2200" b="1">
                 <a:solidFill>
                   <a:srgbClr val="0F172A"/>
                 </a:solidFill>
@@ -10898,12 +12754,12 @@
               </a:defRPr>
             </a:pPr>
             <a:r>
-              <a:t>Feature Engineering &amp; Chronological Split</a:t>
-            </a:r>
-          </a:p>
-          <a:p>
-            <a:pPr>
-              <a:defRPr sz="1100" b="1">
+              <a:t>Step 2: Data Cleaning, Normalization &amp; Taxonomy</a:t>
+            </a:r>
+          </a:p>
+          <a:p>
+            <a:pPr>
+              <a:defRPr sz="1050" b="1">
                 <a:solidFill>
                   <a:srgbClr val="CC0000"/>
                 </a:solidFill>
@@ -10911,7 +12767,7 @@
               </a:defRPr>
             </a:pPr>
             <a:r>
-              <a:t>5 LAGGED PREDICTORS &amp; ZERO-LEAKAGE TEMPORAL EVALUATION</a:t>
+              <a:t>ZERO-COUNT POLICY, CONCEPT HIERARCHIES &amp; LEGAL TAXONOMY</a:t>
             </a:r>
           </a:p>
         </p:txBody>
@@ -10924,8 +12780,8 @@
         </p:nvSpPr>
         <p:spPr>
           <a:xfrm>
-            <a:off x="548640" y="1143000"/>
-            <a:ext cx="4114800" cy="3291840"/>
+            <a:off x="731520" y="1051560"/>
+            <a:ext cx="7680960" cy="3520440"/>
           </a:xfrm>
           <a:prstGeom prst="rect">
             <a:avLst/>
@@ -10937,33 +12793,24 @@
             <a:spAutoFit/>
           </a:bodyPr>
           <a:lstStyle/>
-          <a:p>
-            <a:pPr>
-              <a:defRPr sz="1400" b="1">
-                <a:solidFill>
-                  <a:srgbClr val="CC0000"/>
-                </a:solidFill>
-                <a:latin typeface="Calibri"/>
-              </a:defRPr>
-            </a:pPr>
-            <a:r>
-              <a:t>Mathematical Feature Formulations:</a:t>
-            </a:r>
-          </a:p>
+          <a:p/>
           <a:p>
             <a:pPr>
               <a:spcBef>
                 <a:spcPts val="400"/>
               </a:spcBef>
-              <a:defRPr sz="1150">
-                <a:solidFill>
-                  <a:srgbClr val="1E293B"/>
-                </a:solidFill>
-                <a:latin typeface="Calibri"/>
-              </a:defRPr>
-            </a:pPr>
-            <a:r>
-              <a:t>• X₁ (lag1_cases): Prior year volume (T-1) — 38.5% Importance (primary momentum).</a:t>
+              <a:spcAft>
+                <a:spcPts val="600"/>
+              </a:spcAft>
+              <a:defRPr sz="1150" b="1">
+                <a:solidFill>
+                  <a:srgbClr val="B41414"/>
+                </a:solidFill>
+                <a:latin typeface="Calibri"/>
+              </a:defRPr>
+            </a:pPr>
+            <a:r>
+              <a:t>Operational Rationale: Machine learning models require distinguishing active stations with zero recorded crimes from unobserved missing years to prevent skewed probability distributions.</a:t>
             </a:r>
           </a:p>
           <a:p>
@@ -10971,7 +12818,23 @@
               <a:spcBef>
                 <a:spcPts val="400"/>
               </a:spcBef>
-              <a:defRPr sz="1150">
+              <a:defRPr sz="1200" b="1">
+                <a:solidFill>
+                  <a:srgbClr val="CC0000"/>
+                </a:solidFill>
+                <a:latin typeface="Calibri"/>
+              </a:defRPr>
+            </a:pPr>
+            <a:r>
+              <a:t>• Strict Zero-Count vs Unobserved NULL Policy</a:t>
+            </a:r>
+          </a:p>
+          <a:p>
+            <a:pPr>
+              <a:spcBef>
+                <a:spcPts val="100"/>
+              </a:spcBef>
+              <a:defRPr sz="1100">
                 <a:solidFill>
                   <a:srgbClr val="1E293B"/>
                 </a:solidFill>
@@ -10979,7 +12842,7 @@
               </a:defRPr>
             </a:pPr>
             <a:r>
-              <a:t>• X₂ (lag2_cases): Two-year prior volume (T-2) — 15.8% (medium-term stability).</a:t>
+              <a:t>A reported '0' represents an active operational station with zero recorded offenses for that specific crime head. A 'NULL' indicates an unobserved year (e.g., station established after 2018). Preserving true zeros prevents distorting baseline averages.</a:t>
             </a:r>
           </a:p>
           <a:p>
@@ -10987,7 +12850,23 @@
               <a:spcBef>
                 <a:spcPts val="400"/>
               </a:spcBef>
-              <a:defRPr sz="1150">
+              <a:defRPr sz="1200" b="1">
+                <a:solidFill>
+                  <a:srgbClr val="CC0000"/>
+                </a:solidFill>
+                <a:latin typeface="Calibri"/>
+              </a:defRPr>
+            </a:pPr>
+            <a:r>
+              <a:t>• Legal Taxonomy Defined: IPC vs SLL</a:t>
+            </a:r>
+          </a:p>
+          <a:p>
+            <a:pPr>
+              <a:spcBef>
+                <a:spcPts val="100"/>
+              </a:spcBef>
+              <a:defRPr sz="1100">
                 <a:solidFill>
                   <a:srgbClr val="1E293B"/>
                 </a:solidFill>
@@ -10995,7 +12874,11 @@
               </a:defRPr>
             </a:pPr>
             <a:r>
-              <a:t>• X₃ (rolling_2yr_avg): Smoothed 2-year average — 28.3% (noise reduction).</a:t>
+              <a:t>Indian Penal Code (IPC): Core offenses against persons and property (Theft, Robbery, Assault, Burglary, Murder).</a:t>
+            </a:r>
+            <a:br/>
+            <a:r>
+              <a:t>Special &amp; Local Laws (SLL): State and statutory regulatory acts (Abkari liquor act, NDPS narcotics, Kerala Police Act, Arms Act). A high SLL ratio indicates proactive police enforcement rather than citizen-reported violent crime.</a:t>
             </a:r>
           </a:p>
           <a:p>
@@ -11003,7 +12886,23 @@
               <a:spcBef>
                 <a:spcPts val="400"/>
               </a:spcBef>
-              <a:defRPr sz="1150">
+              <a:defRPr sz="1200" b="1">
+                <a:solidFill>
+                  <a:srgbClr val="CC0000"/>
+                </a:solidFill>
+                <a:latin typeface="Calibri"/>
+              </a:defRPr>
+            </a:pPr>
+            <a:r>
+              <a:t>• Multi-Level Spatial &amp; Legal Concept Hierarchies</a:t>
+            </a:r>
+          </a:p>
+          <a:p>
+            <a:pPr>
+              <a:spcBef>
+                <a:spcPts val="100"/>
+              </a:spcBef>
+              <a:defRPr sz="1100">
                 <a:solidFill>
                   <a:srgbClr val="1E293B"/>
                 </a:solidFill>
@@ -11011,70 +12910,18 @@
               </a:defRPr>
             </a:pPr>
             <a:r>
-              <a:t>• X₄ (trend_rate): Registration velocity — 10.8% (acceleration indicator).</a:t>
-            </a:r>
-          </a:p>
-          <a:p>
-            <a:pPr>
-              <a:spcBef>
-                <a:spcPts val="400"/>
-              </a:spcBef>
-              <a:defRPr sz="1150">
-                <a:solidFill>
-                  <a:srgbClr val="1E293B"/>
-                </a:solidFill>
-                <a:latin typeface="Calibri"/>
-              </a:defRPr>
-            </a:pPr>
-            <a:r>
-              <a:t>• X₅ (sll_ratio): Proportion of Special &amp; Local Laws — 6.6% (vice activity).</a:t>
-            </a:r>
-          </a:p>
-          <a:p>
-            <a:pPr>
-              <a:spcBef>
-                <a:spcPts val="400"/>
-              </a:spcBef>
-              <a:defRPr sz="1150">
-                <a:solidFill>
-                  <a:srgbClr val="1E293B"/>
-                </a:solidFill>
-                <a:latin typeface="Calibri"/>
-              </a:defRPr>
-            </a:pPr>
-            <a:r>
-              <a:t>• Chronological Split: Train on 2016–2019, test on 2020–2025. Zero future data leakage.</a:t>
-            </a:r>
-          </a:p>
-        </p:txBody>
-      </p:sp>
-      <p:pic>
-        <p:nvPicPr>
-          <p:cNvPr id="5" name="Picture 4" descr="feature_importance.png"/>
-          <p:cNvPicPr>
-            <a:picLocks noChangeAspect="1"/>
-          </p:cNvPicPr>
-          <p:nvPr/>
-        </p:nvPicPr>
-        <p:blipFill>
-          <a:blip r:embed="rId3"/>
-          <a:stretch>
-            <a:fillRect/>
-          </a:stretch>
-        </p:blipFill>
-        <p:spPr>
-          <a:xfrm>
-            <a:off x="4754880" y="1188720"/>
-            <a:ext cx="3931920" cy="2689587"/>
-          </a:xfrm>
-          <a:prstGeom prst="rect">
-            <a:avLst/>
-          </a:prstGeom>
-        </p:spPr>
-      </p:pic>
-      <p:sp>
-        <p:nvSpPr>
-          <p:cNvPr id="6" name="Rectangle 5"/>
+              <a:t>Spatial Hierarchy: State → District (Kochi City / Rural) → Sub-Division (Ernakulam, Mattancherry, etc.) → Station.</a:t>
+            </a:r>
+            <a:br/>
+            <a:r>
+              <a:t>Legal Hierarchy: Code Category (IPC vs SLL) → Crime Class (Violent, Property, Vice) → Specific Offense Head.</a:t>
+            </a:r>
+          </a:p>
+        </p:txBody>
+      </p:sp>
+      <p:sp>
+        <p:nvSpPr>
+          <p:cNvPr id="5" name="Rectangle 4"/>
           <p:cNvSpPr/>
           <p:nvPr/>
         </p:nvSpPr>
@@ -11117,7 +12964,7 @@
       </p:sp>
       <p:sp>
         <p:nvSpPr>
-          <p:cNvPr id="7" name="TextBox 6"/>
+          <p:cNvPr id="6" name="TextBox 5"/>
           <p:cNvSpPr txBox="1"/>
           <p:nvPr/>
         </p:nvSpPr>
@@ -11153,7 +13000,7 @@
       </p:sp>
       <p:sp>
         <p:nvSpPr>
-          <p:cNvPr id="8" name="TextBox 7"/>
+          <p:cNvPr id="7" name="TextBox 6"/>
           <p:cNvSpPr txBox="1"/>
           <p:nvPr/>
         </p:nvSpPr>
